--- a/information-source-decks/08-apriltags-with-hopper.pptx
+++ b/information-source-decks/08-apriltags-with-hopper.pptx
@@ -2,22 +2,22 @@
 <file path=ppt/presentation.xml><?xml version="1.0" encoding="utf-8"?>
 <p:presentation xmlns:p="http://schemas.openxmlformats.org/presentationml/2006/main">
   <p:sldMasterIdLst>
-    <p:sldMasterId xmlns:r="http://schemas.openxmlformats.org/officeDocument/2006/relationships" id="2147483648" r:id="Rcdccb4fc5461446c"/>
+    <p:sldMasterId xmlns:r="http://schemas.openxmlformats.org/officeDocument/2006/relationships" id="2147483648" r:id="Rb69f87943aad43f6"/>
   </p:sldMasterIdLst>
   <p:notesMasterIdLst>
-    <p:notesMasterId xmlns:r="http://schemas.openxmlformats.org/officeDocument/2006/relationships" r:id="R9bd41e655fde43f3"/>
+    <p:notesMasterId xmlns:r="http://schemas.openxmlformats.org/officeDocument/2006/relationships" r:id="Ra0038ff45cfa4a9f"/>
   </p:notesMasterIdLst>
   <p:sldIdLst>
-    <p:sldId xmlns:r="http://schemas.openxmlformats.org/officeDocument/2006/relationships" id="256" r:id="R5e127a9add8149f6"/>
-    <p:sldId xmlns:r="http://schemas.openxmlformats.org/officeDocument/2006/relationships" id="257" r:id="Rf383c590fea044c3"/>
-    <p:sldId xmlns:r="http://schemas.openxmlformats.org/officeDocument/2006/relationships" id="258" r:id="R369fc4438ae04927"/>
-    <p:sldId xmlns:r="http://schemas.openxmlformats.org/officeDocument/2006/relationships" id="259" r:id="R2ee2865cabf44ff9"/>
-    <p:sldId xmlns:r="http://schemas.openxmlformats.org/officeDocument/2006/relationships" id="260" r:id="Ra0f483979a674fbc"/>
-    <p:sldId xmlns:r="http://schemas.openxmlformats.org/officeDocument/2006/relationships" id="261" r:id="R479023b3443b45a6"/>
-    <p:sldId xmlns:r="http://schemas.openxmlformats.org/officeDocument/2006/relationships" id="262" r:id="Rf2b984f9e8794f47"/>
-    <p:sldId xmlns:r="http://schemas.openxmlformats.org/officeDocument/2006/relationships" id="263" r:id="R242dc004735b4c51"/>
-    <p:sldId xmlns:r="http://schemas.openxmlformats.org/officeDocument/2006/relationships" id="264" r:id="R178e77e19f3c4e89"/>
-    <p:sldId xmlns:r="http://schemas.openxmlformats.org/officeDocument/2006/relationships" id="265" r:id="R450c3ab124b447ff"/>
+    <p:sldId xmlns:r="http://schemas.openxmlformats.org/officeDocument/2006/relationships" id="256" r:id="R22598911114d42d3"/>
+    <p:sldId xmlns:r="http://schemas.openxmlformats.org/officeDocument/2006/relationships" id="257" r:id="R9a4ac03141d34c76"/>
+    <p:sldId xmlns:r="http://schemas.openxmlformats.org/officeDocument/2006/relationships" id="258" r:id="Rff2c1e747ed544ce"/>
+    <p:sldId xmlns:r="http://schemas.openxmlformats.org/officeDocument/2006/relationships" id="259" r:id="R88f960cdbf254137"/>
+    <p:sldId xmlns:r="http://schemas.openxmlformats.org/officeDocument/2006/relationships" id="260" r:id="Rb603d23b6688464e"/>
+    <p:sldId xmlns:r="http://schemas.openxmlformats.org/officeDocument/2006/relationships" id="261" r:id="R04b179e4e74e4b2e"/>
+    <p:sldId xmlns:r="http://schemas.openxmlformats.org/officeDocument/2006/relationships" id="262" r:id="Rdb31be0cf1e84e36"/>
+    <p:sldId xmlns:r="http://schemas.openxmlformats.org/officeDocument/2006/relationships" id="263" r:id="R8cb7c064b2cc4d32"/>
+    <p:sldId xmlns:r="http://schemas.openxmlformats.org/officeDocument/2006/relationships" id="264" r:id="R3923385534864a8a"/>
+    <p:sldId xmlns:r="http://schemas.openxmlformats.org/officeDocument/2006/relationships" id="265" r:id="R5372fc92b986429f"/>
   </p:sldIdLst>
   <p:sldSz cx="12192000" cy="6858000"/>
   <p:notesSz cx="6858000" cy="9144000"/>
@@ -451,7 +451,7 @@
           <a:lstStyle xmlns:a="http://schemas.openxmlformats.org/drawingml/2006/main"/>
           <a:p xmlns:a="http://schemas.openxmlformats.org/drawingml/2006/main">
             <a:r>
-              <a:t>AprilTag lesson cover.</a:t>
+              <a:t>AprilTags are designed visual landmarks. Hopper Studio uses tag36h11 and reports tag identity plus frame-relative center coordinates and 2D yaw.</a:t>
             </a:r>
           </a:p>
           <a:p xmlns:a="http://schemas.openxmlformats.org/drawingml/2006/main">
@@ -462,6 +462,11 @@
           <a:p xmlns:a="http://schemas.openxmlformats.org/drawingml/2006/main">
             <a:r>
               <a:t>[Sources]</a:t>
+            </a:r>
+          </a:p>
+          <a:p xmlns:a="http://schemas.openxmlformats.org/drawingml/2006/main">
+            <a:r>
+              <a:t>- User-supplied high-resolution photograph: drone_photos/IMG_4476.jpeg</a:t>
             </a:r>
           </a:p>
           <a:p xmlns:a="http://schemas.openxmlformats.org/drawingml/2006/main">
@@ -1291,7 +1296,7 @@
           <a:lstStyle xmlns:a="http://schemas.openxmlformats.org/drawingml/2006/main"/>
           <a:p xmlns:a="http://schemas.openxmlformats.org/drawingml/2006/main">
             <a:r>
-              <a:t>Connect the family/ID concepts to the site: the printable generator, detector, testing window, blocks, and centering routine all use tag36h11. The centering routine adds lost-tag limits and a 30-second overall timeout.</a:t>
+              <a:t>The centering routine moves only horizontally and in yaw. It clamps arguments, gives up after the configured number of lost-tag searches, and has a 30-second overall timeout. It does not control altitude and does not land, so the calling mission owns the landing boundary. scanAprilTags and seesAprilTag always perform fresh scans.</a:t>
             </a:r>
           </a:p>
           <a:p xmlns:a="http://schemas.openxmlformats.org/drawingml/2006/main">
@@ -1321,7 +1326,7 @@
           </a:p>
           <a:p xmlns:a="http://schemas.openxmlformats.org/drawingml/2006/main">
             <a:r>
-              <a:t>- Hopper Studio UI: local_site/components/HopperStudio.tsx</a:t>
+              <a:t>- Hopper Studio flight API: local_site/lib/drone.ts.</a:t>
             </a:r>
           </a:p>
           <a:p xmlns:a="http://schemas.openxmlformats.org/drawingml/2006/main">
@@ -1394,7 +1399,7 @@
   </p:cSld>
   <p:clrMap bg1="lt1" tx1="dk1" bg2="lt2" tx2="dk2" accent1="accent1" accent2="accent2" accent3="accent3" accent4="accent4" accent5="accent5" accent6="accent6" hlink="hlink" folHlink="folHlink"/>
   <p:sldLayoutIdLst>
-    <p:sldLayoutId xmlns:r="http://schemas.openxmlformats.org/officeDocument/2006/relationships" id="2147483649" r:id="Rb1fa0cd19a7e468f"/>
+    <p:sldLayoutId xmlns:r="http://schemas.openxmlformats.org/officeDocument/2006/relationships" id="2147483649" r:id="R40f2c5f4b05c4b1c"/>
   </p:sldLayoutIdLst>
   <p:txStyles>
     <p:titleStyle>
@@ -1924,6 +1929,13 @@
 <file path=ppt/slides/slide1.xml><?xml version="1.0" encoding="utf-8"?>
 <p:sld xmlns:p="http://schemas.openxmlformats.org/presentationml/2006/main">
   <p:cSld>
+    <p:bg>
+      <p:bgPr>
+        <a:solidFill xmlns:a="http://schemas.openxmlformats.org/drawingml/2006/main">
+          <a:srgbClr val="001B3A"/>
+        </a:solidFill>
+      </p:bgPr>
+    </p:bg>
     <p:spTree>
       <p:nvGrpSpPr>
         <p:cNvPr id="1" name=""/>
@@ -1935,23 +1947,23 @@
       </p:grpSpPr>
       <p:pic>
         <p:nvPicPr>
-          <p:cNvPr id="4" name=""/>
+          <p:cNvPr id="14" name=""/>
           <p:cNvPicPr>
             <a:picLocks xmlns:a="http://schemas.openxmlformats.org/drawingml/2006/main" noChangeAspect="1"/>
           </p:cNvPicPr>
           <p:nvPr/>
         </p:nvPicPr>
         <p:blipFill>
-          <a:blip xmlns:r="http://schemas.openxmlformats.org/officeDocument/2006/relationships" xmlns:a="http://schemas.openxmlformats.org/drawingml/2006/main" r:embed="R248e0c106d2c478c"/>
-          <a:srcRect xmlns:a="http://schemas.openxmlformats.org/drawingml/2006/main" l="0" t="0" r="0" b="0"/>
+          <a:blip xmlns:r="http://schemas.openxmlformats.org/officeDocument/2006/relationships" xmlns:a="http://schemas.openxmlformats.org/drawingml/2006/main" r:embed="R8a44f05dbabd4efb"/>
+          <a:srcRect xmlns:a="http://schemas.openxmlformats.org/drawingml/2006/main" l="0" t="10411" r="0" b="10411"/>
           <a:stretch xmlns:a="http://schemas.openxmlformats.org/drawingml/2006/main">
             <a:fillRect l="0" t="0" r="0" b="0"/>
           </a:stretch>
         </p:blipFill>
         <p:spPr>
           <a:xfrm xmlns:a="http://schemas.openxmlformats.org/drawingml/2006/main">
-            <a:off x="0" y="0"/>
-            <a:ext cx="12192000" cy="6858000"/>
+            <a:off x="5695950" y="0"/>
+            <a:ext cx="6496050" cy="6858000"/>
           </a:xfrm>
           <a:prstGeom xmlns:a="http://schemas.openxmlformats.org/drawingml/2006/main" prst="rect">
             <a:avLst/>
@@ -1963,52 +1975,104 @@
           <p:cNvPr id="2" name="">
             <a:extLst xmlns:a="http://schemas.openxmlformats.org/drawingml/2006/main">
               <a:ext uri="{FF2B5EF4-FFF2-40B4-BE49-F238E27FC236}">
-                <a16:creationId xmlns:a16="http://schemas.microsoft.com/office/drawing/2014/main" id="{46142E56-74EA-4B02-83EF-7B060DBD62C9}"/>
-              </a:ext>
-            </a:extLst>
-          </p:cNvPr>
-          <p:cNvSpPr>
-            <a:spLocks xmlns:a="http://schemas.openxmlformats.org/drawingml/2006/main" noGrp="1"/>
-          </p:cNvSpPr>
-          <p:nvPr/>
-        </p:nvSpPr>
-        <p:spPr>
-          <a:xfrm xmlns:a="http://schemas.openxmlformats.org/drawingml/2006/main">
-            <a:off x="457200" y="6429375"/>
-            <a:ext cx="2571750" cy="285750"/>
-          </a:xfrm>
-          <a:prstGeom xmlns:a="http://schemas.openxmlformats.org/drawingml/2006/main" prst="rect">
-            <a:avLst/>
+                <a16:creationId xmlns:a16="http://schemas.microsoft.com/office/drawing/2014/main" id="{B94EB7A4-595D-43CF-ADB0-C707BA14734C}"/>
+              </a:ext>
+            </a:extLst>
+          </p:cNvPr>
+          <p:cNvSpPr>
+            <a:spLocks xmlns:a="http://schemas.openxmlformats.org/drawingml/2006/main" noGrp="1"/>
+          </p:cNvSpPr>
+          <p:nvPr/>
+        </p:nvSpPr>
+        <p:spPr>
+          <a:xfrm xmlns:a="http://schemas.openxmlformats.org/drawingml/2006/main">
+            <a:off x="5524500" y="0"/>
+            <a:ext cx="590550" cy="6858000"/>
+          </a:xfrm>
+          <a:prstGeom xmlns:a="http://schemas.openxmlformats.org/drawingml/2006/main" prst="rect">
+            <a:avLst/>
+          </a:prstGeom>
+          <a:ln xmlns:a="http://schemas.openxmlformats.org/drawingml/2006/main" w="0">
+            <a:noFill/>
+            <a:prstDash val="solid"/>
+          </a:ln>
+        </p:spPr>
+      </p:sp>
+      <p:sp>
+        <p:nvSpPr>
+          <p:cNvPr id="3" name="">
+            <a:extLst xmlns:a="http://schemas.openxmlformats.org/drawingml/2006/main">
+              <a:ext uri="{FF2B5EF4-FFF2-40B4-BE49-F238E27FC236}">
+                <a16:creationId xmlns:a16="http://schemas.microsoft.com/office/drawing/2014/main" id="{3E6855A3-8DEC-46C5-86F8-652B55BF9692}"/>
+              </a:ext>
+            </a:extLst>
+          </p:cNvPr>
+          <p:cNvSpPr>
+            <a:spLocks xmlns:a="http://schemas.openxmlformats.org/drawingml/2006/main" noGrp="1"/>
+          </p:cNvSpPr>
+          <p:nvPr/>
+        </p:nvSpPr>
+        <p:spPr>
+          <a:xfrm xmlns:a="http://schemas.openxmlformats.org/drawingml/2006/main">
+            <a:off x="514350" y="438150"/>
+            <a:ext cx="2381250" cy="838200"/>
+          </a:xfrm>
+          <a:prstGeom xmlns:a="http://schemas.openxmlformats.org/drawingml/2006/main" prst="roundRect">
+            <a:avLst>
+              <a:gd name="adj" fmla="val 13636"/>
+            </a:avLst>
           </a:prstGeom>
           <a:solidFill xmlns:a="http://schemas.openxmlformats.org/drawingml/2006/main">
-            <a:srgbClr val="001B3A"/>
+            <a:srgbClr val="FFFFFF"/>
           </a:solidFill>
-          <a:ln xmlns:a="http://schemas.openxmlformats.org/drawingml/2006/main" w="0">
+          <a:ln xmlns:a="http://schemas.openxmlformats.org/drawingml/2006/main" w="14288">
             <a:solidFill>
-              <a:srgbClr val="001B3A"/>
+              <a:srgbClr val="FFFFFF"/>
             </a:solidFill>
             <a:prstDash val="solid"/>
           </a:ln>
         </p:spPr>
       </p:sp>
-      <p:sp>
-        <p:nvSpPr>
-          <p:cNvPr id="3" name="">
-            <a:extLst xmlns:a="http://schemas.openxmlformats.org/drawingml/2006/main">
-              <a:ext uri="{FF2B5EF4-FFF2-40B4-BE49-F238E27FC236}">
-                <a16:creationId xmlns:a16="http://schemas.microsoft.com/office/drawing/2014/main" id="{43A02E40-D559-477D-9110-86166B5EA2DF}"/>
-              </a:ext>
-            </a:extLst>
-          </p:cNvPr>
-          <p:cNvSpPr>
-            <a:spLocks xmlns:a="http://schemas.openxmlformats.org/drawingml/2006/main" noGrp="1"/>
-          </p:cNvSpPr>
-          <p:nvPr/>
-        </p:nvSpPr>
-        <p:spPr>
-          <a:xfrm xmlns:a="http://schemas.openxmlformats.org/drawingml/2006/main">
-            <a:off x="609600" y="6534150"/>
-            <a:ext cx="2190750" cy="142875"/>
+      <p:pic>
+        <p:nvPicPr>
+          <p:cNvPr id="17" name=""/>
+          <p:cNvPicPr>
+            <a:picLocks xmlns:a="http://schemas.openxmlformats.org/drawingml/2006/main" noChangeAspect="1"/>
+          </p:cNvPicPr>
+          <p:nvPr/>
+        </p:nvPicPr>
+        <p:blipFill>
+          <a:blip xmlns:r="http://schemas.openxmlformats.org/officeDocument/2006/relationships" xmlns:a="http://schemas.openxmlformats.org/drawingml/2006/main" r:embed="R58ecdace765b4856"/>
+          <a:stretch xmlns:a="http://schemas.openxmlformats.org/drawingml/2006/main"/>
+        </p:blipFill>
+        <p:spPr>
+          <a:xfrm xmlns:a="http://schemas.openxmlformats.org/drawingml/2006/main">
+            <a:off x="1115994" y="561975"/>
+            <a:ext cx="1177963" cy="590550"/>
+          </a:xfrm>
+          <a:prstGeom xmlns:a="http://schemas.openxmlformats.org/drawingml/2006/main" prst="rect">
+            <a:avLst/>
+          </a:prstGeom>
+        </p:spPr>
+      </p:pic>
+      <p:sp>
+        <p:nvSpPr>
+          <p:cNvPr id="5" name="">
+            <a:extLst xmlns:a="http://schemas.openxmlformats.org/drawingml/2006/main">
+              <a:ext uri="{FF2B5EF4-FFF2-40B4-BE49-F238E27FC236}">
+                <a16:creationId xmlns:a16="http://schemas.microsoft.com/office/drawing/2014/main" id="{16D9C38B-3D0A-4B67-969E-2356952930FE}"/>
+              </a:ext>
+            </a:extLst>
+          </p:cNvPr>
+          <p:cNvSpPr>
+            <a:spLocks xmlns:a="http://schemas.openxmlformats.org/drawingml/2006/main" noGrp="1"/>
+          </p:cNvSpPr>
+          <p:nvPr/>
+        </p:nvSpPr>
+        <p:spPr>
+          <a:xfrm xmlns:a="http://schemas.openxmlformats.org/drawingml/2006/main">
+            <a:off x="552450" y="1752600"/>
+            <a:ext cx="3810000" cy="228600"/>
           </a:xfrm>
           <a:prstGeom xmlns:a="http://schemas.openxmlformats.org/drawingml/2006/main" prst="rect">
             <a:avLst/>
@@ -2024,19 +2088,420 @@
           <a:lstStyle xmlns:a="http://schemas.openxmlformats.org/drawingml/2006/main"/>
           <a:p xmlns:a="http://schemas.openxmlformats.org/drawingml/2006/main">
             <a:pPr>
-              <a:defRPr sz="675">
-                <a:solidFill>
-                  <a:srgbClr val="9EB4C0"/>
+              <a:defRPr sz="975" b="1">
+                <a:solidFill>
+                  <a:srgbClr val="14B8B4"/>
                 </a:solidFill>
               </a:defRPr>
             </a:pPr>
             <a:r>
-              <a:rPr sz="675">
-                <a:solidFill>
-                  <a:srgbClr val="9EB4C0"/>
-                </a:solidFill>
-              </a:rPr>
-              <a:t>DECK 08  |  10 SLIDES</a:t>
+              <a:rPr sz="975" b="1">
+                <a:solidFill>
+                  <a:srgbClr val="14B8B4"/>
+                </a:solidFill>
+              </a:rPr>
+              <a:t>HOPPER INFORMATION SERIES</a:t>
+            </a:r>
+          </a:p>
+        </p:txBody>
+      </p:sp>
+      <p:sp>
+        <p:nvSpPr>
+          <p:cNvPr id="6" name="">
+            <a:extLst xmlns:a="http://schemas.openxmlformats.org/drawingml/2006/main">
+              <a:ext uri="{FF2B5EF4-FFF2-40B4-BE49-F238E27FC236}">
+                <a16:creationId xmlns:a16="http://schemas.microsoft.com/office/drawing/2014/main" id="{3AF6B922-27D3-46CB-8BF0-86A28BE4AD1D}"/>
+              </a:ext>
+            </a:extLst>
+          </p:cNvPr>
+          <p:cNvSpPr>
+            <a:spLocks xmlns:a="http://schemas.openxmlformats.org/drawingml/2006/main" noGrp="1"/>
+          </p:cNvSpPr>
+          <p:nvPr/>
+        </p:nvSpPr>
+        <p:spPr>
+          <a:xfrm xmlns:a="http://schemas.openxmlformats.org/drawingml/2006/main">
+            <a:off x="552450" y="2047875"/>
+            <a:ext cx="4095750" cy="209550"/>
+          </a:xfrm>
+          <a:prstGeom xmlns:a="http://schemas.openxmlformats.org/drawingml/2006/main" prst="rect">
+            <a:avLst/>
+          </a:prstGeom>
+          <a:noFill xmlns:a="http://schemas.openxmlformats.org/drawingml/2006/main"/>
+          <a:ln xmlns:a="http://schemas.openxmlformats.org/drawingml/2006/main" w="0">
+            <a:noFill/>
+            <a:prstDash val="solid"/>
+          </a:ln>
+        </p:spPr>
+        <p:txBody>
+          <a:bodyPr xmlns:a="http://schemas.openxmlformats.org/drawingml/2006/main"/>
+          <a:lstStyle xmlns:a="http://schemas.openxmlformats.org/drawingml/2006/main"/>
+          <a:p xmlns:a="http://schemas.openxmlformats.org/drawingml/2006/main">
+            <a:pPr>
+              <a:defRPr sz="900" b="1">
+                <a:solidFill>
+                  <a:srgbClr val="C9A227"/>
+                </a:solidFill>
+              </a:defRPr>
+            </a:pPr>
+            <a:r>
+              <a:rPr sz="900" b="1">
+                <a:solidFill>
+                  <a:srgbClr val="C9A227"/>
+                </a:solidFill>
+              </a:rPr>
+              <a:t>APRILTAGS</a:t>
+            </a:r>
+          </a:p>
+        </p:txBody>
+      </p:sp>
+      <p:sp>
+        <p:nvSpPr>
+          <p:cNvPr id="7" name="">
+            <a:extLst xmlns:a="http://schemas.openxmlformats.org/drawingml/2006/main">
+              <a:ext uri="{FF2B5EF4-FFF2-40B4-BE49-F238E27FC236}">
+                <a16:creationId xmlns:a16="http://schemas.microsoft.com/office/drawing/2014/main" id="{7207A1F2-88B7-4868-BE9E-3710C4B1A3BF}"/>
+              </a:ext>
+            </a:extLst>
+          </p:cNvPr>
+          <p:cNvSpPr>
+            <a:spLocks xmlns:a="http://schemas.openxmlformats.org/drawingml/2006/main" noGrp="1"/>
+          </p:cNvSpPr>
+          <p:nvPr/>
+        </p:nvSpPr>
+        <p:spPr>
+          <a:xfrm xmlns:a="http://schemas.openxmlformats.org/drawingml/2006/main">
+            <a:off x="552450" y="2457450"/>
+            <a:ext cx="4572000" cy="1619250"/>
+          </a:xfrm>
+          <a:prstGeom xmlns:a="http://schemas.openxmlformats.org/drawingml/2006/main" prst="rect">
+            <a:avLst/>
+          </a:prstGeom>
+          <a:noFill xmlns:a="http://schemas.openxmlformats.org/drawingml/2006/main"/>
+          <a:ln xmlns:a="http://schemas.openxmlformats.org/drawingml/2006/main" w="0">
+            <a:noFill/>
+            <a:prstDash val="solid"/>
+          </a:ln>
+        </p:spPr>
+        <p:txBody>
+          <a:bodyPr xmlns:a="http://schemas.openxmlformats.org/drawingml/2006/main" anchor="ctr"/>
+          <a:lstStyle xmlns:a="http://schemas.openxmlformats.org/drawingml/2006/main"/>
+          <a:p xmlns:a="http://schemas.openxmlformats.org/drawingml/2006/main">
+            <a:pPr>
+              <a:defRPr sz="4050" b="1">
+                <a:solidFill>
+                  <a:srgbClr val="FFFFFF"/>
+                </a:solidFill>
+              </a:defRPr>
+            </a:pPr>
+            <a:r>
+              <a:rPr sz="4050" b="1">
+                <a:solidFill>
+                  <a:srgbClr val="FFFFFF"/>
+                </a:solidFill>
+              </a:rPr>
+              <a:t>AprilTags with Hopper</a:t>
+            </a:r>
+          </a:p>
+        </p:txBody>
+      </p:sp>
+      <p:sp>
+        <p:nvSpPr>
+          <p:cNvPr id="8" name="">
+            <a:extLst xmlns:a="http://schemas.openxmlformats.org/drawingml/2006/main">
+              <a:ext uri="{FF2B5EF4-FFF2-40B4-BE49-F238E27FC236}">
+                <a16:creationId xmlns:a16="http://schemas.microsoft.com/office/drawing/2014/main" id="{ECC448DC-E2BE-4FEF-8666-C6CCEB4E34AD}"/>
+              </a:ext>
+            </a:extLst>
+          </p:cNvPr>
+          <p:cNvSpPr>
+            <a:spLocks xmlns:a="http://schemas.openxmlformats.org/drawingml/2006/main" noGrp="1"/>
+          </p:cNvSpPr>
+          <p:nvPr/>
+        </p:nvSpPr>
+        <p:spPr>
+          <a:xfrm xmlns:a="http://schemas.openxmlformats.org/drawingml/2006/main">
+            <a:off x="552450" y="4238625"/>
+            <a:ext cx="4667250" cy="819150"/>
+          </a:xfrm>
+          <a:prstGeom xmlns:a="http://schemas.openxmlformats.org/drawingml/2006/main" prst="rect">
+            <a:avLst/>
+          </a:prstGeom>
+          <a:noFill xmlns:a="http://schemas.openxmlformats.org/drawingml/2006/main"/>
+          <a:ln xmlns:a="http://schemas.openxmlformats.org/drawingml/2006/main" w="0">
+            <a:noFill/>
+            <a:prstDash val="solid"/>
+          </a:ln>
+        </p:spPr>
+        <p:txBody>
+          <a:bodyPr xmlns:a="http://schemas.openxmlformats.org/drawingml/2006/main"/>
+          <a:lstStyle xmlns:a="http://schemas.openxmlformats.org/drawingml/2006/main"/>
+          <a:p xmlns:a="http://schemas.openxmlformats.org/drawingml/2006/main">
+            <a:pPr>
+              <a:defRPr sz="1500">
+                <a:solidFill>
+                  <a:srgbClr val="D4E2E8"/>
+                </a:solidFill>
+              </a:defRPr>
+            </a:pPr>
+            <a:r>
+              <a:rPr sz="1500">
+                <a:solidFill>
+                  <a:srgbClr val="D4E2E8"/>
+                </a:solidFill>
+              </a:rPr>
+              <a:t>Use printed tag36h11 landmarks for identity, relative image position, orientation, and bounded centering.</a:t>
+            </a:r>
+          </a:p>
+        </p:txBody>
+      </p:sp>
+      <p:sp>
+        <p:nvSpPr>
+          <p:cNvPr id="9" name="">
+            <a:extLst xmlns:a="http://schemas.openxmlformats.org/drawingml/2006/main">
+              <a:ext uri="{FF2B5EF4-FFF2-40B4-BE49-F238E27FC236}">
+                <a16:creationId xmlns:a16="http://schemas.microsoft.com/office/drawing/2014/main" id="{F98B948E-64BF-4BD5-8DD4-08972F4C5AF0}"/>
+              </a:ext>
+            </a:extLst>
+          </p:cNvPr>
+          <p:cNvSpPr>
+            <a:spLocks xmlns:a="http://schemas.openxmlformats.org/drawingml/2006/main" noGrp="1"/>
+          </p:cNvSpPr>
+          <p:nvPr/>
+        </p:nvSpPr>
+        <p:spPr>
+          <a:xfrm xmlns:a="http://schemas.openxmlformats.org/drawingml/2006/main">
+            <a:off x="552450" y="5372100"/>
+            <a:ext cx="1104900" cy="304800"/>
+          </a:xfrm>
+          <a:prstGeom xmlns:a="http://schemas.openxmlformats.org/drawingml/2006/main" prst="roundRect">
+            <a:avLst>
+              <a:gd name="adj" fmla="val 50000"/>
+            </a:avLst>
+          </a:prstGeom>
+          <a:solidFill xmlns:a="http://schemas.openxmlformats.org/drawingml/2006/main">
+            <a:srgbClr val="123654"/>
+          </a:solidFill>
+          <a:ln xmlns:a="http://schemas.openxmlformats.org/drawingml/2006/main" w="14288">
+            <a:solidFill>
+              <a:srgbClr val="123654"/>
+            </a:solidFill>
+            <a:prstDash val="solid"/>
+          </a:ln>
+        </p:spPr>
+        <p:txBody>
+          <a:bodyPr xmlns:a="http://schemas.openxmlformats.org/drawingml/2006/main"/>
+          <a:lstStyle xmlns:a="http://schemas.openxmlformats.org/drawingml/2006/main"/>
+          <a:p xmlns:a="http://schemas.openxmlformats.org/drawingml/2006/main">
+            <a:pPr algn="ctr">
+              <a:defRPr sz="1050" b="1">
+                <a:solidFill>
+                  <a:srgbClr val="FFFFFF"/>
+                </a:solidFill>
+              </a:defRPr>
+            </a:pPr>
+            <a:r>
+              <a:rPr sz="1050" b="1">
+                <a:solidFill>
+                  <a:srgbClr val="FFFFFF"/>
+                </a:solidFill>
+              </a:rPr>
+              <a:t>TAG36H11</a:t>
+            </a:r>
+          </a:p>
+        </p:txBody>
+      </p:sp>
+      <p:sp>
+        <p:nvSpPr>
+          <p:cNvPr id="10" name="">
+            <a:extLst xmlns:a="http://schemas.openxmlformats.org/drawingml/2006/main">
+              <a:ext uri="{FF2B5EF4-FFF2-40B4-BE49-F238E27FC236}">
+                <a16:creationId xmlns:a16="http://schemas.microsoft.com/office/drawing/2014/main" id="{4F733376-CF8E-4A54-BB10-BC56C166252E}"/>
+              </a:ext>
+            </a:extLst>
+          </p:cNvPr>
+          <p:cNvSpPr>
+            <a:spLocks xmlns:a="http://schemas.openxmlformats.org/drawingml/2006/main" noGrp="1"/>
+          </p:cNvSpPr>
+          <p:nvPr/>
+        </p:nvSpPr>
+        <p:spPr>
+          <a:xfrm xmlns:a="http://schemas.openxmlformats.org/drawingml/2006/main">
+            <a:off x="1771650" y="5372100"/>
+            <a:ext cx="1190625" cy="304800"/>
+          </a:xfrm>
+          <a:prstGeom xmlns:a="http://schemas.openxmlformats.org/drawingml/2006/main" prst="roundRect">
+            <a:avLst>
+              <a:gd name="adj" fmla="val 50000"/>
+            </a:avLst>
+          </a:prstGeom>
+          <a:solidFill xmlns:a="http://schemas.openxmlformats.org/drawingml/2006/main">
+            <a:srgbClr val="123654"/>
+          </a:solidFill>
+          <a:ln xmlns:a="http://schemas.openxmlformats.org/drawingml/2006/main" w="14288">
+            <a:solidFill>
+              <a:srgbClr val="123654"/>
+            </a:solidFill>
+            <a:prstDash val="solid"/>
+          </a:ln>
+        </p:spPr>
+        <p:txBody>
+          <a:bodyPr xmlns:a="http://schemas.openxmlformats.org/drawingml/2006/main"/>
+          <a:lstStyle xmlns:a="http://schemas.openxmlformats.org/drawingml/2006/main"/>
+          <a:p xmlns:a="http://schemas.openxmlformats.org/drawingml/2006/main">
+            <a:pPr algn="ctr">
+              <a:defRPr sz="1050" b="1">
+                <a:solidFill>
+                  <a:srgbClr val="FFFFFF"/>
+                </a:solidFill>
+              </a:defRPr>
+            </a:pPr>
+            <a:r>
+              <a:rPr sz="1050" b="1">
+                <a:solidFill>
+                  <a:srgbClr val="FFFFFF"/>
+                </a:solidFill>
+              </a:rPr>
+              <a:t>IDS 0–586</a:t>
+            </a:r>
+          </a:p>
+        </p:txBody>
+      </p:sp>
+      <p:sp>
+        <p:nvSpPr>
+          <p:cNvPr id="11" name="">
+            <a:extLst xmlns:a="http://schemas.openxmlformats.org/drawingml/2006/main">
+              <a:ext uri="{FF2B5EF4-FFF2-40B4-BE49-F238E27FC236}">
+                <a16:creationId xmlns:a16="http://schemas.microsoft.com/office/drawing/2014/main" id="{D3385208-65D7-4096-AAE3-71144B34AF9E}"/>
+              </a:ext>
+            </a:extLst>
+          </p:cNvPr>
+          <p:cNvSpPr>
+            <a:spLocks xmlns:a="http://schemas.openxmlformats.org/drawingml/2006/main" noGrp="1"/>
+          </p:cNvSpPr>
+          <p:nvPr/>
+        </p:nvSpPr>
+        <p:spPr>
+          <a:xfrm xmlns:a="http://schemas.openxmlformats.org/drawingml/2006/main">
+            <a:off x="3076575" y="5372100"/>
+            <a:ext cx="1533525" cy="304800"/>
+          </a:xfrm>
+          <a:prstGeom xmlns:a="http://schemas.openxmlformats.org/drawingml/2006/main" prst="roundRect">
+            <a:avLst>
+              <a:gd name="adj" fmla="val 50000"/>
+            </a:avLst>
+          </a:prstGeom>
+          <a:solidFill xmlns:a="http://schemas.openxmlformats.org/drawingml/2006/main">
+            <a:srgbClr val="008C95"/>
+          </a:solidFill>
+          <a:ln xmlns:a="http://schemas.openxmlformats.org/drawingml/2006/main" w="14288">
+            <a:solidFill>
+              <a:srgbClr val="008C95"/>
+            </a:solidFill>
+            <a:prstDash val="solid"/>
+          </a:ln>
+        </p:spPr>
+        <p:txBody>
+          <a:bodyPr xmlns:a="http://schemas.openxmlformats.org/drawingml/2006/main"/>
+          <a:lstStyle xmlns:a="http://schemas.openxmlformats.org/drawingml/2006/main"/>
+          <a:p xmlns:a="http://schemas.openxmlformats.org/drawingml/2006/main">
+            <a:pPr algn="ctr">
+              <a:defRPr sz="1050" b="1">
+                <a:solidFill>
+                  <a:srgbClr val="FFFFFF"/>
+                </a:solidFill>
+              </a:defRPr>
+            </a:pPr>
+            <a:r>
+              <a:rPr sz="1050" b="1">
+                <a:solidFill>
+                  <a:srgbClr val="FFFFFF"/>
+                </a:solidFill>
+              </a:rPr>
+              <a:t>RELATIVE POSE</a:t>
+            </a:r>
+          </a:p>
+        </p:txBody>
+      </p:sp>
+      <p:sp>
+        <p:nvSpPr>
+          <p:cNvPr id="12" name="">
+            <a:extLst xmlns:a="http://schemas.openxmlformats.org/drawingml/2006/main">
+              <a:ext uri="{FF2B5EF4-FFF2-40B4-BE49-F238E27FC236}">
+                <a16:creationId xmlns:a16="http://schemas.microsoft.com/office/drawing/2014/main" id="{B2F5324E-6609-4BE3-9210-50B29A93787F}"/>
+              </a:ext>
+            </a:extLst>
+          </p:cNvPr>
+          <p:cNvSpPr>
+            <a:spLocks xmlns:a="http://schemas.openxmlformats.org/drawingml/2006/main" noGrp="1"/>
+          </p:cNvSpPr>
+          <p:nvPr/>
+        </p:nvSpPr>
+        <p:spPr>
+          <a:xfrm xmlns:a="http://schemas.openxmlformats.org/drawingml/2006/main">
+            <a:off x="552450" y="6419850"/>
+            <a:ext cx="4400550" cy="9525"/>
+          </a:xfrm>
+          <a:prstGeom xmlns:a="http://schemas.openxmlformats.org/drawingml/2006/main" prst="rect">
+            <a:avLst/>
+          </a:prstGeom>
+          <a:solidFill xmlns:a="http://schemas.openxmlformats.org/drawingml/2006/main">
+            <a:srgbClr val="33556E"/>
+          </a:solidFill>
+          <a:ln xmlns:a="http://schemas.openxmlformats.org/drawingml/2006/main" w="0">
+            <a:solidFill>
+              <a:srgbClr val="33556E"/>
+            </a:solidFill>
+            <a:prstDash val="solid"/>
+          </a:ln>
+        </p:spPr>
+      </p:sp>
+      <p:sp>
+        <p:nvSpPr>
+          <p:cNvPr id="13" name="">
+            <a:extLst xmlns:a="http://schemas.openxmlformats.org/drawingml/2006/main">
+              <a:ext uri="{FF2B5EF4-FFF2-40B4-BE49-F238E27FC236}">
+                <a16:creationId xmlns:a16="http://schemas.microsoft.com/office/drawing/2014/main" id="{B5EE8FA1-1F98-4830-9D48-376591EB2268}"/>
+              </a:ext>
+            </a:extLst>
+          </p:cNvPr>
+          <p:cNvSpPr>
+            <a:spLocks xmlns:a="http://schemas.openxmlformats.org/drawingml/2006/main" noGrp="1"/>
+          </p:cNvSpPr>
+          <p:nvPr/>
+        </p:nvSpPr>
+        <p:spPr>
+          <a:xfrm xmlns:a="http://schemas.openxmlformats.org/drawingml/2006/main">
+            <a:off x="552450" y="6543675"/>
+            <a:ext cx="3048000" cy="152400"/>
+          </a:xfrm>
+          <a:prstGeom xmlns:a="http://schemas.openxmlformats.org/drawingml/2006/main" prst="rect">
+            <a:avLst/>
+          </a:prstGeom>
+          <a:noFill xmlns:a="http://schemas.openxmlformats.org/drawingml/2006/main"/>
+          <a:ln xmlns:a="http://schemas.openxmlformats.org/drawingml/2006/main" w="0">
+            <a:noFill/>
+            <a:prstDash val="solid"/>
+          </a:ln>
+        </p:spPr>
+        <p:txBody>
+          <a:bodyPr xmlns:a="http://schemas.openxmlformats.org/drawingml/2006/main"/>
+          <a:lstStyle xmlns:a="http://schemas.openxmlformats.org/drawingml/2006/main"/>
+          <a:p xmlns:a="http://schemas.openxmlformats.org/drawingml/2006/main">
+            <a:pPr>
+              <a:defRPr sz="750">
+                <a:solidFill>
+                  <a:srgbClr val="94AFBC"/>
+                </a:solidFill>
+              </a:defRPr>
+            </a:pPr>
+            <a:r>
+              <a:rPr sz="750">
+                <a:solidFill>
+                  <a:srgbClr val="94AFBC"/>
+                </a:solidFill>
+              </a:rPr>
+              <a:t>DECK 08  |  APRILTAGS</a:t>
             </a:r>
           </a:p>
         </p:txBody>
@@ -2044,7 +2509,7 @@
     </p:spTree>
     <p:extLst>
       <p:ext uri="{BB962C8B-B14F-4D97-AF65-F5344CB8AC3E}">
-        <p14:creationId xmlns:p14="http://schemas.microsoft.com/office/powerpoint/2010/main" val="2134288001"/>
+        <p14:creationId xmlns:p14="http://schemas.microsoft.com/office/powerpoint/2010/main" val="1899979031"/>
       </p:ext>
     </p:extLst>
   </p:cSld>
@@ -2072,7 +2537,7 @@
           <p:nvPr/>
         </p:nvPicPr>
         <p:blipFill>
-          <a:blip xmlns:r="http://schemas.openxmlformats.org/officeDocument/2006/relationships" xmlns:a="http://schemas.openxmlformats.org/drawingml/2006/main" r:embed="Rccbb11b02d4148a5"/>
+          <a:blip xmlns:r="http://schemas.openxmlformats.org/officeDocument/2006/relationships" xmlns:a="http://schemas.openxmlformats.org/drawingml/2006/main" r:embed="R01292c595475401e"/>
           <a:srcRect xmlns:a="http://schemas.openxmlformats.org/drawingml/2006/main" l="0" t="0" r="0" b="0"/>
           <a:stretch xmlns:a="http://schemas.openxmlformats.org/drawingml/2006/main">
             <a:fillRect l="0" t="0" r="0" b="0"/>
@@ -2093,7 +2558,7 @@
           <p:cNvPr id="2" name="">
             <a:extLst xmlns:a="http://schemas.openxmlformats.org/drawingml/2006/main">
               <a:ext uri="{FF2B5EF4-FFF2-40B4-BE49-F238E27FC236}">
-                <a16:creationId xmlns:a16="http://schemas.microsoft.com/office/drawing/2014/main" id="{027814A6-F2ED-48E9-AFEF-16B9067B350B}"/>
+                <a16:creationId xmlns:a16="http://schemas.microsoft.com/office/drawing/2014/main" id="{1661AA1C-2715-49CA-B1C0-1763FF79F52A}"/>
               </a:ext>
             </a:extLst>
           </p:cNvPr>
@@ -2126,7 +2591,7 @@
           <p:cNvPr id="3" name="">
             <a:extLst xmlns:a="http://schemas.openxmlformats.org/drawingml/2006/main">
               <a:ext uri="{FF2B5EF4-FFF2-40B4-BE49-F238E27FC236}">
-                <a16:creationId xmlns:a16="http://schemas.microsoft.com/office/drawing/2014/main" id="{583A81DC-0184-461E-BABB-36B8830B0126}"/>
+                <a16:creationId xmlns:a16="http://schemas.microsoft.com/office/drawing/2014/main" id="{AC59C892-2A10-44EE-B4B7-3FDB8C4CC67F}"/>
               </a:ext>
             </a:extLst>
           </p:cNvPr>
@@ -2176,7 +2641,7 @@
           <p:cNvPr id="4" name="">
             <a:extLst xmlns:a="http://schemas.openxmlformats.org/drawingml/2006/main">
               <a:ext uri="{FF2B5EF4-FFF2-40B4-BE49-F238E27FC236}">
-                <a16:creationId xmlns:a16="http://schemas.microsoft.com/office/drawing/2014/main" id="{77F7DCF7-E6CE-4A88-B4F3-995D87B0FBFB}"/>
+                <a16:creationId xmlns:a16="http://schemas.microsoft.com/office/drawing/2014/main" id="{7AE8C07B-32FA-4B4F-972F-31718F5B3CE7}"/>
               </a:ext>
             </a:extLst>
           </p:cNvPr>
@@ -2209,7 +2674,7 @@
           <p:cNvPr id="5" name="">
             <a:extLst xmlns:a="http://schemas.openxmlformats.org/drawingml/2006/main">
               <a:ext uri="{FF2B5EF4-FFF2-40B4-BE49-F238E27FC236}">
-                <a16:creationId xmlns:a16="http://schemas.microsoft.com/office/drawing/2014/main" id="{F0587112-A8D0-4755-BD94-9E2E8C5A91ED}"/>
+                <a16:creationId xmlns:a16="http://schemas.microsoft.com/office/drawing/2014/main" id="{75B60489-856D-4986-9F9F-EE2B4DF437C0}"/>
               </a:ext>
             </a:extLst>
           </p:cNvPr>
@@ -2257,7 +2722,7 @@
     </p:spTree>
     <p:extLst>
       <p:ext uri="{BB962C8B-B14F-4D97-AF65-F5344CB8AC3E}">
-        <p14:creationId xmlns:p14="http://schemas.microsoft.com/office/powerpoint/2010/main" val="2074765573"/>
+        <p14:creationId xmlns:p14="http://schemas.microsoft.com/office/powerpoint/2010/main" val="793781767"/>
       </p:ext>
     </p:extLst>
   </p:cSld>
@@ -2288,7 +2753,7 @@
           <p:cNvPr id="29" name="">
             <a:extLst xmlns:a="http://schemas.openxmlformats.org/drawingml/2006/main">
               <a:ext uri="{FF2B5EF4-FFF2-40B4-BE49-F238E27FC236}">
-                <a16:creationId xmlns:a16="http://schemas.microsoft.com/office/drawing/2014/main" id="{F6BC52E5-CFAC-4424-A161-A764B8AF3DF9}"/>
+                <a16:creationId xmlns:a16="http://schemas.microsoft.com/office/drawing/2014/main" id="{7DC0D1B6-3F7B-4EA1-8EB3-7105D90703E2}"/>
               </a:ext>
             </a:extLst>
           </p:cNvPr>
@@ -2321,7 +2786,7 @@
           <p:cNvPr id="2" name="">
             <a:extLst xmlns:a="http://schemas.openxmlformats.org/drawingml/2006/main">
               <a:ext uri="{FF2B5EF4-FFF2-40B4-BE49-F238E27FC236}">
-                <a16:creationId xmlns:a16="http://schemas.microsoft.com/office/drawing/2014/main" id="{A21F5B0E-ED06-4D16-8CE1-81E000035C17}"/>
+                <a16:creationId xmlns:a16="http://schemas.microsoft.com/office/drawing/2014/main" id="{A1E6D92F-1340-40DE-96DA-A320C0FA75AF}"/>
               </a:ext>
             </a:extLst>
           </p:cNvPr>
@@ -2354,7 +2819,7 @@
           <p:cNvPr id="3" name="">
             <a:extLst xmlns:a="http://schemas.openxmlformats.org/drawingml/2006/main">
               <a:ext uri="{FF2B5EF4-FFF2-40B4-BE49-F238E27FC236}">
-                <a16:creationId xmlns:a16="http://schemas.microsoft.com/office/drawing/2014/main" id="{C7336851-12B1-430E-9847-2AB789C8DE58}"/>
+                <a16:creationId xmlns:a16="http://schemas.microsoft.com/office/drawing/2014/main" id="{B51EEC2E-93D4-4414-9187-E27404203514}"/>
               </a:ext>
             </a:extLst>
           </p:cNvPr>
@@ -2404,7 +2869,7 @@
           <p:cNvPr id="4" name="">
             <a:extLst xmlns:a="http://schemas.openxmlformats.org/drawingml/2006/main">
               <a:ext uri="{FF2B5EF4-FFF2-40B4-BE49-F238E27FC236}">
-                <a16:creationId xmlns:a16="http://schemas.microsoft.com/office/drawing/2014/main" id="{209A3ECD-6667-4F57-AE6E-8DF623B9115D}"/>
+                <a16:creationId xmlns:a16="http://schemas.microsoft.com/office/drawing/2014/main" id="{31168B62-B308-4168-9CDE-FDF899FAB5E2}"/>
               </a:ext>
             </a:extLst>
           </p:cNvPr>
@@ -2454,7 +2919,7 @@
           <p:cNvPr id="5" name="">
             <a:extLst xmlns:a="http://schemas.openxmlformats.org/drawingml/2006/main">
               <a:ext uri="{FF2B5EF4-FFF2-40B4-BE49-F238E27FC236}">
-                <a16:creationId xmlns:a16="http://schemas.microsoft.com/office/drawing/2014/main" id="{C1B5A550-C3CA-47F2-906C-07A388C07A0D}"/>
+                <a16:creationId xmlns:a16="http://schemas.microsoft.com/office/drawing/2014/main" id="{86AC35B4-DE91-449F-AB18-3EB230001D6A}"/>
               </a:ext>
             </a:extLst>
           </p:cNvPr>
@@ -2508,7 +2973,7 @@
           <p:nvPr/>
         </p:nvPicPr>
         <p:blipFill>
-          <a:blip xmlns:r="http://schemas.openxmlformats.org/officeDocument/2006/relationships" xmlns:a="http://schemas.openxmlformats.org/drawingml/2006/main" r:embed="Ra848f50b10b442df"/>
+          <a:blip xmlns:r="http://schemas.openxmlformats.org/officeDocument/2006/relationships" xmlns:a="http://schemas.openxmlformats.org/drawingml/2006/main" r:embed="Rfcf2eff60afb42b6"/>
           <a:stretch xmlns:a="http://schemas.openxmlformats.org/drawingml/2006/main"/>
         </p:blipFill>
         <p:spPr>
@@ -2526,7 +2991,7 @@
           <p:cNvPr id="7" name="">
             <a:extLst xmlns:a="http://schemas.openxmlformats.org/drawingml/2006/main">
               <a:ext uri="{FF2B5EF4-FFF2-40B4-BE49-F238E27FC236}">
-                <a16:creationId xmlns:a16="http://schemas.microsoft.com/office/drawing/2014/main" id="{1B40A513-FB17-4861-A8A3-F2228BEAFC85}"/>
+                <a16:creationId xmlns:a16="http://schemas.microsoft.com/office/drawing/2014/main" id="{7A69B67B-2F7F-4E2D-A2A9-8396CB71A0C4}"/>
               </a:ext>
             </a:extLst>
           </p:cNvPr>
@@ -2559,7 +3024,7 @@
           <p:cNvPr id="8" name="">
             <a:extLst xmlns:a="http://schemas.openxmlformats.org/drawingml/2006/main">
               <a:ext uri="{FF2B5EF4-FFF2-40B4-BE49-F238E27FC236}">
-                <a16:creationId xmlns:a16="http://schemas.microsoft.com/office/drawing/2014/main" id="{00325B53-1F9D-48B1-BF89-85E98FC5B40B}"/>
+                <a16:creationId xmlns:a16="http://schemas.microsoft.com/office/drawing/2014/main" id="{6B275BAE-C9A7-48E9-9FF7-73399EFB87AE}"/>
               </a:ext>
             </a:extLst>
           </p:cNvPr>
@@ -2609,7 +3074,7 @@
           <p:cNvPr id="9" name="">
             <a:extLst xmlns:a="http://schemas.openxmlformats.org/drawingml/2006/main">
               <a:ext uri="{FF2B5EF4-FFF2-40B4-BE49-F238E27FC236}">
-                <a16:creationId xmlns:a16="http://schemas.microsoft.com/office/drawing/2014/main" id="{980E5EFA-F265-4BBD-B990-E26CFF8FB13E}"/>
+                <a16:creationId xmlns:a16="http://schemas.microsoft.com/office/drawing/2014/main" id="{AE5A726A-3C6F-4AAF-8E83-6DF060EE96DB}"/>
               </a:ext>
             </a:extLst>
           </p:cNvPr>
@@ -2659,7 +3124,7 @@
           <p:cNvPr id="10" name="">
             <a:extLst xmlns:a="http://schemas.openxmlformats.org/drawingml/2006/main">
               <a:ext uri="{FF2B5EF4-FFF2-40B4-BE49-F238E27FC236}">
-                <a16:creationId xmlns:a16="http://schemas.microsoft.com/office/drawing/2014/main" id="{0E34420B-CE88-45B5-964D-EC86A90CAB78}"/>
+                <a16:creationId xmlns:a16="http://schemas.microsoft.com/office/drawing/2014/main" id="{28EAC1F8-A97C-45B8-BFAE-1ED008EE5CA0}"/>
               </a:ext>
             </a:extLst>
           </p:cNvPr>
@@ -2692,7 +3157,7 @@
           <p:cNvPr id="11" name="">
             <a:extLst xmlns:a="http://schemas.openxmlformats.org/drawingml/2006/main">
               <a:ext uri="{FF2B5EF4-FFF2-40B4-BE49-F238E27FC236}">
-                <a16:creationId xmlns:a16="http://schemas.microsoft.com/office/drawing/2014/main" id="{2AAFC824-5BE0-4C00-87B6-D4828F112A08}"/>
+                <a16:creationId xmlns:a16="http://schemas.microsoft.com/office/drawing/2014/main" id="{AB307BFC-8D4C-4DF8-8DB3-AAE9EB9A339D}"/>
               </a:ext>
             </a:extLst>
           </p:cNvPr>
@@ -2725,7 +3190,7 @@
           <p:cNvPr id="12" name="">
             <a:extLst xmlns:a="http://schemas.openxmlformats.org/drawingml/2006/main">
               <a:ext uri="{FF2B5EF4-FFF2-40B4-BE49-F238E27FC236}">
-                <a16:creationId xmlns:a16="http://schemas.microsoft.com/office/drawing/2014/main" id="{F1A3E9D0-EA3D-4FF4-A2B0-99F16D449AD7}"/>
+                <a16:creationId xmlns:a16="http://schemas.microsoft.com/office/drawing/2014/main" id="{A8F6E04E-5357-436F-B3C3-61742E25B0F3}"/>
               </a:ext>
             </a:extLst>
           </p:cNvPr>
@@ -2775,7 +3240,7 @@
           <p:cNvPr id="13" name="">
             <a:extLst xmlns:a="http://schemas.openxmlformats.org/drawingml/2006/main">
               <a:ext uri="{FF2B5EF4-FFF2-40B4-BE49-F238E27FC236}">
-                <a16:creationId xmlns:a16="http://schemas.microsoft.com/office/drawing/2014/main" id="{50A2BF50-109C-4E59-A7C7-8700A9698127}"/>
+                <a16:creationId xmlns:a16="http://schemas.microsoft.com/office/drawing/2014/main" id="{8090A08D-6482-4591-B3A9-84A0752E977A}"/>
               </a:ext>
             </a:extLst>
           </p:cNvPr>
@@ -2825,7 +3290,7 @@
           <p:cNvPr id="14" name="">
             <a:extLst xmlns:a="http://schemas.openxmlformats.org/drawingml/2006/main">
               <a:ext uri="{FF2B5EF4-FFF2-40B4-BE49-F238E27FC236}">
-                <a16:creationId xmlns:a16="http://schemas.microsoft.com/office/drawing/2014/main" id="{A855AA85-3C66-49BF-900E-267DF3CDC760}"/>
+                <a16:creationId xmlns:a16="http://schemas.microsoft.com/office/drawing/2014/main" id="{10165191-24A5-4DD5-865E-67A191233904}"/>
               </a:ext>
             </a:extLst>
           </p:cNvPr>
@@ -2875,7 +3340,7 @@
           <p:cNvPr id="15" name="">
             <a:extLst xmlns:a="http://schemas.openxmlformats.org/drawingml/2006/main">
               <a:ext uri="{FF2B5EF4-FFF2-40B4-BE49-F238E27FC236}">
-                <a16:creationId xmlns:a16="http://schemas.microsoft.com/office/drawing/2014/main" id="{A709D638-38B2-463D-9DC3-9F73BB24B2C0}"/>
+                <a16:creationId xmlns:a16="http://schemas.microsoft.com/office/drawing/2014/main" id="{04461C68-5855-47A6-B9DA-CD6F58C1BD99}"/>
               </a:ext>
             </a:extLst>
           </p:cNvPr>
@@ -2908,7 +3373,7 @@
           <p:cNvPr id="16" name="">
             <a:extLst xmlns:a="http://schemas.openxmlformats.org/drawingml/2006/main">
               <a:ext uri="{FF2B5EF4-FFF2-40B4-BE49-F238E27FC236}">
-                <a16:creationId xmlns:a16="http://schemas.microsoft.com/office/drawing/2014/main" id="{97EC2378-9FE0-4CE8-AADD-7FEC598F7851}"/>
+                <a16:creationId xmlns:a16="http://schemas.microsoft.com/office/drawing/2014/main" id="{93151FD0-5AE4-43F0-ADD4-74FE9AE272CF}"/>
               </a:ext>
             </a:extLst>
           </p:cNvPr>
@@ -2958,7 +3423,7 @@
           <p:cNvPr id="17" name="">
             <a:extLst xmlns:a="http://schemas.openxmlformats.org/drawingml/2006/main">
               <a:ext uri="{FF2B5EF4-FFF2-40B4-BE49-F238E27FC236}">
-                <a16:creationId xmlns:a16="http://schemas.microsoft.com/office/drawing/2014/main" id="{BBE2A954-0E92-45C2-91A6-A6BE10E70CF1}"/>
+                <a16:creationId xmlns:a16="http://schemas.microsoft.com/office/drawing/2014/main" id="{D9CF4699-3894-4BB0-8F8E-804CA9379498}"/>
               </a:ext>
             </a:extLst>
           </p:cNvPr>
@@ -3008,7 +3473,7 @@
           <p:cNvPr id="18" name="">
             <a:extLst xmlns:a="http://schemas.openxmlformats.org/drawingml/2006/main">
               <a:ext uri="{FF2B5EF4-FFF2-40B4-BE49-F238E27FC236}">
-                <a16:creationId xmlns:a16="http://schemas.microsoft.com/office/drawing/2014/main" id="{05711990-99EA-44CF-9258-64B8CBA63E32}"/>
+                <a16:creationId xmlns:a16="http://schemas.microsoft.com/office/drawing/2014/main" id="{B0C699F0-B737-4A71-BECE-DD0953FAE243}"/>
               </a:ext>
             </a:extLst>
           </p:cNvPr>
@@ -3058,7 +3523,7 @@
           <p:cNvPr id="19" name="">
             <a:extLst xmlns:a="http://schemas.openxmlformats.org/drawingml/2006/main">
               <a:ext uri="{FF2B5EF4-FFF2-40B4-BE49-F238E27FC236}">
-                <a16:creationId xmlns:a16="http://schemas.microsoft.com/office/drawing/2014/main" id="{F21D0FB9-073D-409E-B33E-7D53F39A5A61}"/>
+                <a16:creationId xmlns:a16="http://schemas.microsoft.com/office/drawing/2014/main" id="{C1C28ACE-673B-4049-AC60-1691FD05D648}"/>
               </a:ext>
             </a:extLst>
           </p:cNvPr>
@@ -3091,7 +3556,7 @@
           <p:cNvPr id="20" name="">
             <a:extLst xmlns:a="http://schemas.openxmlformats.org/drawingml/2006/main">
               <a:ext uri="{FF2B5EF4-FFF2-40B4-BE49-F238E27FC236}">
-                <a16:creationId xmlns:a16="http://schemas.microsoft.com/office/drawing/2014/main" id="{8A6729EC-2C0E-436C-9FEA-6FBCEE657D03}"/>
+                <a16:creationId xmlns:a16="http://schemas.microsoft.com/office/drawing/2014/main" id="{E40AE5F8-33D1-4177-9965-E9890790FEBF}"/>
               </a:ext>
             </a:extLst>
           </p:cNvPr>
@@ -3141,7 +3606,7 @@
           <p:cNvPr id="21" name="">
             <a:extLst xmlns:a="http://schemas.openxmlformats.org/drawingml/2006/main">
               <a:ext uri="{FF2B5EF4-FFF2-40B4-BE49-F238E27FC236}">
-                <a16:creationId xmlns:a16="http://schemas.microsoft.com/office/drawing/2014/main" id="{EC77A740-D394-472B-8EB1-257BCA2A0374}"/>
+                <a16:creationId xmlns:a16="http://schemas.microsoft.com/office/drawing/2014/main" id="{4A7051F4-AFD4-48A9-8145-338FBDC63863}"/>
               </a:ext>
             </a:extLst>
           </p:cNvPr>
@@ -3191,7 +3656,7 @@
           <p:cNvPr id="22" name="">
             <a:extLst xmlns:a="http://schemas.openxmlformats.org/drawingml/2006/main">
               <a:ext uri="{FF2B5EF4-FFF2-40B4-BE49-F238E27FC236}">
-                <a16:creationId xmlns:a16="http://schemas.microsoft.com/office/drawing/2014/main" id="{1DCAA496-1700-4AC7-9A9D-65072A496F3C}"/>
+                <a16:creationId xmlns:a16="http://schemas.microsoft.com/office/drawing/2014/main" id="{044D1D3E-5E92-4FC3-9A59-ED9A5D8B0122}"/>
               </a:ext>
             </a:extLst>
           </p:cNvPr>
@@ -3241,7 +3706,7 @@
           <p:cNvPr id="23" name="">
             <a:extLst xmlns:a="http://schemas.openxmlformats.org/drawingml/2006/main">
               <a:ext uri="{FF2B5EF4-FFF2-40B4-BE49-F238E27FC236}">
-                <a16:creationId xmlns:a16="http://schemas.microsoft.com/office/drawing/2014/main" id="{4CCA9C62-6377-47F7-B9ED-C25FCBFA3C5E}"/>
+                <a16:creationId xmlns:a16="http://schemas.microsoft.com/office/drawing/2014/main" id="{3D993291-5DCB-4613-96E0-B09BBB10F3ED}"/>
               </a:ext>
             </a:extLst>
           </p:cNvPr>
@@ -3274,7 +3739,7 @@
           <p:cNvPr id="24" name="">
             <a:extLst xmlns:a="http://schemas.openxmlformats.org/drawingml/2006/main">
               <a:ext uri="{FF2B5EF4-FFF2-40B4-BE49-F238E27FC236}">
-                <a16:creationId xmlns:a16="http://schemas.microsoft.com/office/drawing/2014/main" id="{AE697F97-A50E-4E6E-9035-BC52E0846B23}"/>
+                <a16:creationId xmlns:a16="http://schemas.microsoft.com/office/drawing/2014/main" id="{6652D912-242A-4C5B-8231-17BEF164F83F}"/>
               </a:ext>
             </a:extLst>
           </p:cNvPr>
@@ -3324,7 +3789,7 @@
           <p:cNvPr id="25" name="">
             <a:extLst xmlns:a="http://schemas.openxmlformats.org/drawingml/2006/main">
               <a:ext uri="{FF2B5EF4-FFF2-40B4-BE49-F238E27FC236}">
-                <a16:creationId xmlns:a16="http://schemas.microsoft.com/office/drawing/2014/main" id="{D7E2C22F-9036-44B3-8478-8B1A510A8F09}"/>
+                <a16:creationId xmlns:a16="http://schemas.microsoft.com/office/drawing/2014/main" id="{CC89A529-121A-46E7-B6E5-0DCA5B0EC3DC}"/>
               </a:ext>
             </a:extLst>
           </p:cNvPr>
@@ -3374,7 +3839,7 @@
           <p:cNvPr id="26" name="">
             <a:extLst xmlns:a="http://schemas.openxmlformats.org/drawingml/2006/main">
               <a:ext uri="{FF2B5EF4-FFF2-40B4-BE49-F238E27FC236}">
-                <a16:creationId xmlns:a16="http://schemas.microsoft.com/office/drawing/2014/main" id="{47982376-E121-46B5-8DDF-9383F98E2552}"/>
+                <a16:creationId xmlns:a16="http://schemas.microsoft.com/office/drawing/2014/main" id="{DCAA5662-58FB-463D-97DD-77C3B30B3BB0}"/>
               </a:ext>
             </a:extLst>
           </p:cNvPr>
@@ -3424,7 +3889,7 @@
           <p:cNvPr id="27" name="">
             <a:extLst xmlns:a="http://schemas.openxmlformats.org/drawingml/2006/main">
               <a:ext uri="{FF2B5EF4-FFF2-40B4-BE49-F238E27FC236}">
-                <a16:creationId xmlns:a16="http://schemas.microsoft.com/office/drawing/2014/main" id="{DB6EFE9B-0B36-4B4B-BC1F-8CFF3130ABCC}"/>
+                <a16:creationId xmlns:a16="http://schemas.microsoft.com/office/drawing/2014/main" id="{D81B15F5-8744-4654-B6C3-D5BEB0900ECE}"/>
               </a:ext>
             </a:extLst>
           </p:cNvPr>
@@ -3459,7 +3924,7 @@
           <p:cNvPr id="28" name="">
             <a:extLst xmlns:a="http://schemas.openxmlformats.org/drawingml/2006/main">
               <a:ext uri="{FF2B5EF4-FFF2-40B4-BE49-F238E27FC236}">
-                <a16:creationId xmlns:a16="http://schemas.microsoft.com/office/drawing/2014/main" id="{0490FE6A-F3E1-4916-B33C-D08E4D37BA9A}"/>
+                <a16:creationId xmlns:a16="http://schemas.microsoft.com/office/drawing/2014/main" id="{31D902B0-4D3A-4778-AA10-BBAD48B8657E}"/>
               </a:ext>
             </a:extLst>
           </p:cNvPr>
@@ -3507,7 +3972,7 @@
     </p:spTree>
     <p:extLst>
       <p:ext uri="{BB962C8B-B14F-4D97-AF65-F5344CB8AC3E}">
-        <p14:creationId xmlns:p14="http://schemas.microsoft.com/office/powerpoint/2010/main" val="414282704"/>
+        <p14:creationId xmlns:p14="http://schemas.microsoft.com/office/powerpoint/2010/main" val="833818721"/>
       </p:ext>
     </p:extLst>
   </p:cSld>
@@ -3538,7 +4003,7 @@
           <p:cNvPr id="35" name="">
             <a:extLst xmlns:a="http://schemas.openxmlformats.org/drawingml/2006/main">
               <a:ext uri="{FF2B5EF4-FFF2-40B4-BE49-F238E27FC236}">
-                <a16:creationId xmlns:a16="http://schemas.microsoft.com/office/drawing/2014/main" id="{F8FF54BE-6B9F-4F0B-B418-DF75E1BE1C69}"/>
+                <a16:creationId xmlns:a16="http://schemas.microsoft.com/office/drawing/2014/main" id="{4C74D810-6277-4E03-9EA3-B435090C8DD1}"/>
               </a:ext>
             </a:extLst>
           </p:cNvPr>
@@ -3571,7 +4036,7 @@
           <p:cNvPr id="2" name="">
             <a:extLst xmlns:a="http://schemas.openxmlformats.org/drawingml/2006/main">
               <a:ext uri="{FF2B5EF4-FFF2-40B4-BE49-F238E27FC236}">
-                <a16:creationId xmlns:a16="http://schemas.microsoft.com/office/drawing/2014/main" id="{951D6E53-CFED-46F6-9FA9-6C59252FE8C2}"/>
+                <a16:creationId xmlns:a16="http://schemas.microsoft.com/office/drawing/2014/main" id="{0D111DEF-8DBC-4C64-9CE8-F2DE158EBB58}"/>
               </a:ext>
             </a:extLst>
           </p:cNvPr>
@@ -3604,7 +4069,7 @@
           <p:cNvPr id="3" name="">
             <a:extLst xmlns:a="http://schemas.openxmlformats.org/drawingml/2006/main">
               <a:ext uri="{FF2B5EF4-FFF2-40B4-BE49-F238E27FC236}">
-                <a16:creationId xmlns:a16="http://schemas.microsoft.com/office/drawing/2014/main" id="{24463C1F-C191-4A3F-A8DA-E08AAE8B71D1}"/>
+                <a16:creationId xmlns:a16="http://schemas.microsoft.com/office/drawing/2014/main" id="{770980E0-B240-40C9-995A-79B371FCE67C}"/>
               </a:ext>
             </a:extLst>
           </p:cNvPr>
@@ -3654,7 +4119,7 @@
           <p:cNvPr id="4" name="">
             <a:extLst xmlns:a="http://schemas.openxmlformats.org/drawingml/2006/main">
               <a:ext uri="{FF2B5EF4-FFF2-40B4-BE49-F238E27FC236}">
-                <a16:creationId xmlns:a16="http://schemas.microsoft.com/office/drawing/2014/main" id="{93EA57F9-4123-4097-ABD7-FF6E04C418D0}"/>
+                <a16:creationId xmlns:a16="http://schemas.microsoft.com/office/drawing/2014/main" id="{D0CA1AA4-8E15-40E0-95E2-3D4F45D046BA}"/>
               </a:ext>
             </a:extLst>
           </p:cNvPr>
@@ -3704,7 +4169,7 @@
           <p:cNvPr id="5" name="">
             <a:extLst xmlns:a="http://schemas.openxmlformats.org/drawingml/2006/main">
               <a:ext uri="{FF2B5EF4-FFF2-40B4-BE49-F238E27FC236}">
-                <a16:creationId xmlns:a16="http://schemas.microsoft.com/office/drawing/2014/main" id="{0E371316-A261-4185-B7B2-A88EF976B2B5}"/>
+                <a16:creationId xmlns:a16="http://schemas.microsoft.com/office/drawing/2014/main" id="{8E5F9F93-87C7-476C-9404-1FF21368445D}"/>
               </a:ext>
             </a:extLst>
           </p:cNvPr>
@@ -3758,7 +4223,7 @@
           <p:nvPr/>
         </p:nvPicPr>
         <p:blipFill>
-          <a:blip xmlns:r="http://schemas.openxmlformats.org/officeDocument/2006/relationships" xmlns:a="http://schemas.openxmlformats.org/drawingml/2006/main" r:embed="R799b928fc8e04a14"/>
+          <a:blip xmlns:r="http://schemas.openxmlformats.org/officeDocument/2006/relationships" xmlns:a="http://schemas.openxmlformats.org/drawingml/2006/main" r:embed="R825542cfb5714899"/>
           <a:stretch xmlns:a="http://schemas.openxmlformats.org/drawingml/2006/main"/>
         </p:blipFill>
         <p:spPr>
@@ -3776,7 +4241,7 @@
           <p:cNvPr id="7" name="">
             <a:extLst xmlns:a="http://schemas.openxmlformats.org/drawingml/2006/main">
               <a:ext uri="{FF2B5EF4-FFF2-40B4-BE49-F238E27FC236}">
-                <a16:creationId xmlns:a16="http://schemas.microsoft.com/office/drawing/2014/main" id="{47FE0CFF-CD5D-4D89-94EE-B20BB3779EE6}"/>
+                <a16:creationId xmlns:a16="http://schemas.microsoft.com/office/drawing/2014/main" id="{97000B87-9CD7-4A0A-AFAE-D3AD0A200226}"/>
               </a:ext>
             </a:extLst>
           </p:cNvPr>
@@ -3809,7 +4274,7 @@
           <p:cNvPr id="8" name="">
             <a:extLst xmlns:a="http://schemas.openxmlformats.org/drawingml/2006/main">
               <a:ext uri="{FF2B5EF4-FFF2-40B4-BE49-F238E27FC236}">
-                <a16:creationId xmlns:a16="http://schemas.microsoft.com/office/drawing/2014/main" id="{B2560016-EBDE-446D-83DB-8CA155AA2F24}"/>
+                <a16:creationId xmlns:a16="http://schemas.microsoft.com/office/drawing/2014/main" id="{F6EB078C-3D55-4E32-B2B3-EDB971956C24}"/>
               </a:ext>
             </a:extLst>
           </p:cNvPr>
@@ -3859,7 +4324,7 @@
           <p:cNvPr id="9" name="">
             <a:extLst xmlns:a="http://schemas.openxmlformats.org/drawingml/2006/main">
               <a:ext uri="{FF2B5EF4-FFF2-40B4-BE49-F238E27FC236}">
-                <a16:creationId xmlns:a16="http://schemas.microsoft.com/office/drawing/2014/main" id="{95DD988D-7DDA-449A-9162-5A92C96B4E27}"/>
+                <a16:creationId xmlns:a16="http://schemas.microsoft.com/office/drawing/2014/main" id="{BBC9493B-9F6E-47AC-8719-8E69B21B9C4F}"/>
               </a:ext>
             </a:extLst>
           </p:cNvPr>
@@ -3909,7 +4374,7 @@
           <p:cNvPr id="10" name="">
             <a:extLst xmlns:a="http://schemas.openxmlformats.org/drawingml/2006/main">
               <a:ext uri="{FF2B5EF4-FFF2-40B4-BE49-F238E27FC236}">
-                <a16:creationId xmlns:a16="http://schemas.microsoft.com/office/drawing/2014/main" id="{036CE525-AB83-41D3-8EDA-365EAC29C347}"/>
+                <a16:creationId xmlns:a16="http://schemas.microsoft.com/office/drawing/2014/main" id="{D82D55FB-6350-4B89-8611-D9281B688C8C}"/>
               </a:ext>
             </a:extLst>
           </p:cNvPr>
@@ -3944,7 +4409,7 @@
           <p:cNvPr id="11" name="">
             <a:extLst xmlns:a="http://schemas.openxmlformats.org/drawingml/2006/main">
               <a:ext uri="{FF2B5EF4-FFF2-40B4-BE49-F238E27FC236}">
-                <a16:creationId xmlns:a16="http://schemas.microsoft.com/office/drawing/2014/main" id="{68EE013D-41AE-4DF5-97D2-A3D0D330AB40}"/>
+                <a16:creationId xmlns:a16="http://schemas.microsoft.com/office/drawing/2014/main" id="{807DE529-AADC-4A09-A36D-45F325D81CBE}"/>
               </a:ext>
             </a:extLst>
           </p:cNvPr>
@@ -3977,7 +4442,7 @@
           <p:cNvPr id="12" name="">
             <a:extLst xmlns:a="http://schemas.openxmlformats.org/drawingml/2006/main">
               <a:ext uri="{FF2B5EF4-FFF2-40B4-BE49-F238E27FC236}">
-                <a16:creationId xmlns:a16="http://schemas.microsoft.com/office/drawing/2014/main" id="{16BADAE5-E4E1-4CBB-AFED-0F283F3CA0F0}"/>
+                <a16:creationId xmlns:a16="http://schemas.microsoft.com/office/drawing/2014/main" id="{567B5885-249E-43C5-B279-D865E687939E}"/>
               </a:ext>
             </a:extLst>
           </p:cNvPr>
@@ -4027,7 +4492,7 @@
           <p:cNvPr id="13" name="">
             <a:extLst xmlns:a="http://schemas.openxmlformats.org/drawingml/2006/main">
               <a:ext uri="{FF2B5EF4-FFF2-40B4-BE49-F238E27FC236}">
-                <a16:creationId xmlns:a16="http://schemas.microsoft.com/office/drawing/2014/main" id="{774EEB26-957B-444F-8665-97BFCF9A3CE8}"/>
+                <a16:creationId xmlns:a16="http://schemas.microsoft.com/office/drawing/2014/main" id="{27D2F4C6-C398-4A1B-BEFB-3DE12C292C05}"/>
               </a:ext>
             </a:extLst>
           </p:cNvPr>
@@ -4077,7 +4542,7 @@
           <p:cNvPr id="14" name="">
             <a:extLst xmlns:a="http://schemas.openxmlformats.org/drawingml/2006/main">
               <a:ext uri="{FF2B5EF4-FFF2-40B4-BE49-F238E27FC236}">
-                <a16:creationId xmlns:a16="http://schemas.microsoft.com/office/drawing/2014/main" id="{88CD2003-E090-4A9B-9E73-4BB9D3E2E71C}"/>
+                <a16:creationId xmlns:a16="http://schemas.microsoft.com/office/drawing/2014/main" id="{530B58D1-A9A2-43FA-BBCF-8FDE748616F3}"/>
               </a:ext>
             </a:extLst>
           </p:cNvPr>
@@ -4112,7 +4577,7 @@
           <p:cNvPr id="15" name="">
             <a:extLst xmlns:a="http://schemas.openxmlformats.org/drawingml/2006/main">
               <a:ext uri="{FF2B5EF4-FFF2-40B4-BE49-F238E27FC236}">
-                <a16:creationId xmlns:a16="http://schemas.microsoft.com/office/drawing/2014/main" id="{18A93E1D-C8CE-4F01-89CE-0D313716754B}"/>
+                <a16:creationId xmlns:a16="http://schemas.microsoft.com/office/drawing/2014/main" id="{2B45A8BC-92BD-48A3-963B-075C8C9EAE03}"/>
               </a:ext>
             </a:extLst>
           </p:cNvPr>
@@ -4145,7 +4610,7 @@
           <p:cNvPr id="16" name="">
             <a:extLst xmlns:a="http://schemas.openxmlformats.org/drawingml/2006/main">
               <a:ext uri="{FF2B5EF4-FFF2-40B4-BE49-F238E27FC236}">
-                <a16:creationId xmlns:a16="http://schemas.microsoft.com/office/drawing/2014/main" id="{0FD36207-FCC6-4FD2-AC1A-45BAE46A6954}"/>
+                <a16:creationId xmlns:a16="http://schemas.microsoft.com/office/drawing/2014/main" id="{1F2158A1-1EEA-4898-9AD8-3087C14730FC}"/>
               </a:ext>
             </a:extLst>
           </p:cNvPr>
@@ -4195,7 +4660,7 @@
           <p:cNvPr id="17" name="">
             <a:extLst xmlns:a="http://schemas.openxmlformats.org/drawingml/2006/main">
               <a:ext uri="{FF2B5EF4-FFF2-40B4-BE49-F238E27FC236}">
-                <a16:creationId xmlns:a16="http://schemas.microsoft.com/office/drawing/2014/main" id="{506679CB-5E73-400D-924B-EBCB1B285ED5}"/>
+                <a16:creationId xmlns:a16="http://schemas.microsoft.com/office/drawing/2014/main" id="{3267177F-7787-44FF-9DFD-4FEE4E467475}"/>
               </a:ext>
             </a:extLst>
           </p:cNvPr>
@@ -4245,7 +4710,7 @@
           <p:cNvPr id="18" name="">
             <a:extLst xmlns:a="http://schemas.openxmlformats.org/drawingml/2006/main">
               <a:ext uri="{FF2B5EF4-FFF2-40B4-BE49-F238E27FC236}">
-                <a16:creationId xmlns:a16="http://schemas.microsoft.com/office/drawing/2014/main" id="{A431CC80-82F3-4B52-8FB7-AC8DA6B0AECC}"/>
+                <a16:creationId xmlns:a16="http://schemas.microsoft.com/office/drawing/2014/main" id="{842C530F-2EE3-446A-B063-21198EB4EB4A}"/>
               </a:ext>
             </a:extLst>
           </p:cNvPr>
@@ -4280,7 +4745,7 @@
           <p:cNvPr id="19" name="">
             <a:extLst xmlns:a="http://schemas.openxmlformats.org/drawingml/2006/main">
               <a:ext uri="{FF2B5EF4-FFF2-40B4-BE49-F238E27FC236}">
-                <a16:creationId xmlns:a16="http://schemas.microsoft.com/office/drawing/2014/main" id="{A9120738-DEE4-45E6-AA01-4179FE7928C4}"/>
+                <a16:creationId xmlns:a16="http://schemas.microsoft.com/office/drawing/2014/main" id="{008437BD-A481-4D25-A813-A966F125C583}"/>
               </a:ext>
             </a:extLst>
           </p:cNvPr>
@@ -4313,7 +4778,7 @@
           <p:cNvPr id="20" name="">
             <a:extLst xmlns:a="http://schemas.openxmlformats.org/drawingml/2006/main">
               <a:ext uri="{FF2B5EF4-FFF2-40B4-BE49-F238E27FC236}">
-                <a16:creationId xmlns:a16="http://schemas.microsoft.com/office/drawing/2014/main" id="{3AEF4C18-AD95-4F0F-9CE3-2544A233C203}"/>
+                <a16:creationId xmlns:a16="http://schemas.microsoft.com/office/drawing/2014/main" id="{DEA65E6B-B126-4C0A-9E7F-D8339C263F08}"/>
               </a:ext>
             </a:extLst>
           </p:cNvPr>
@@ -4363,7 +4828,7 @@
           <p:cNvPr id="21" name="">
             <a:extLst xmlns:a="http://schemas.openxmlformats.org/drawingml/2006/main">
               <a:ext uri="{FF2B5EF4-FFF2-40B4-BE49-F238E27FC236}">
-                <a16:creationId xmlns:a16="http://schemas.microsoft.com/office/drawing/2014/main" id="{2797BA49-87C6-4E00-A43A-0A5DAFB195E7}"/>
+                <a16:creationId xmlns:a16="http://schemas.microsoft.com/office/drawing/2014/main" id="{C375C0C1-F0A5-49AB-9250-B8EBFC51CED3}"/>
               </a:ext>
             </a:extLst>
           </p:cNvPr>
@@ -4413,7 +4878,7 @@
           <p:cNvPr id="22" name="">
             <a:extLst xmlns:a="http://schemas.openxmlformats.org/drawingml/2006/main">
               <a:ext uri="{FF2B5EF4-FFF2-40B4-BE49-F238E27FC236}">
-                <a16:creationId xmlns:a16="http://schemas.microsoft.com/office/drawing/2014/main" id="{0658D496-8E71-42F9-BB59-A1D6EA15DDE5}"/>
+                <a16:creationId xmlns:a16="http://schemas.microsoft.com/office/drawing/2014/main" id="{B54C209F-8277-491F-82C7-AEF7CA2D1F9F}"/>
               </a:ext>
             </a:extLst>
           </p:cNvPr>
@@ -4448,7 +4913,7 @@
           <p:cNvPr id="23" name="">
             <a:extLst xmlns:a="http://schemas.openxmlformats.org/drawingml/2006/main">
               <a:ext uri="{FF2B5EF4-FFF2-40B4-BE49-F238E27FC236}">
-                <a16:creationId xmlns:a16="http://schemas.microsoft.com/office/drawing/2014/main" id="{C0AA3276-E873-4DCD-82AF-CD0F297B2441}"/>
+                <a16:creationId xmlns:a16="http://schemas.microsoft.com/office/drawing/2014/main" id="{736D3FED-F07B-4AF4-B94F-CB95527A4E79}"/>
               </a:ext>
             </a:extLst>
           </p:cNvPr>
@@ -4481,7 +4946,7 @@
           <p:cNvPr id="24" name="">
             <a:extLst xmlns:a="http://schemas.openxmlformats.org/drawingml/2006/main">
               <a:ext uri="{FF2B5EF4-FFF2-40B4-BE49-F238E27FC236}">
-                <a16:creationId xmlns:a16="http://schemas.microsoft.com/office/drawing/2014/main" id="{29C2217B-8E47-4FCE-976F-7E732567E0CE}"/>
+                <a16:creationId xmlns:a16="http://schemas.microsoft.com/office/drawing/2014/main" id="{9F08BC50-AF77-40DF-9A9D-D6FA622DF790}"/>
               </a:ext>
             </a:extLst>
           </p:cNvPr>
@@ -4531,7 +4996,7 @@
           <p:cNvPr id="25" name="">
             <a:extLst xmlns:a="http://schemas.openxmlformats.org/drawingml/2006/main">
               <a:ext uri="{FF2B5EF4-FFF2-40B4-BE49-F238E27FC236}">
-                <a16:creationId xmlns:a16="http://schemas.microsoft.com/office/drawing/2014/main" id="{D980BD87-4103-478F-ADE7-6F270FBA42D4}"/>
+                <a16:creationId xmlns:a16="http://schemas.microsoft.com/office/drawing/2014/main" id="{9A733A0B-0468-4CB0-8630-9E5ED3270824}"/>
               </a:ext>
             </a:extLst>
           </p:cNvPr>
@@ -4581,7 +5046,7 @@
           <p:cNvPr id="26" name="">
             <a:extLst xmlns:a="http://schemas.openxmlformats.org/drawingml/2006/main">
               <a:ext uri="{FF2B5EF4-FFF2-40B4-BE49-F238E27FC236}">
-                <a16:creationId xmlns:a16="http://schemas.microsoft.com/office/drawing/2014/main" id="{1E708702-AFC7-4F50-B759-73214376F850}"/>
+                <a16:creationId xmlns:a16="http://schemas.microsoft.com/office/drawing/2014/main" id="{523A056F-4BE6-4AF8-8976-9CCF40DDFE05}"/>
               </a:ext>
             </a:extLst>
           </p:cNvPr>
@@ -4616,7 +5081,7 @@
           <p:cNvPr id="27" name="">
             <a:extLst xmlns:a="http://schemas.openxmlformats.org/drawingml/2006/main">
               <a:ext uri="{FF2B5EF4-FFF2-40B4-BE49-F238E27FC236}">
-                <a16:creationId xmlns:a16="http://schemas.microsoft.com/office/drawing/2014/main" id="{736134CD-B284-44E2-9324-CB4B53A14D86}"/>
+                <a16:creationId xmlns:a16="http://schemas.microsoft.com/office/drawing/2014/main" id="{A389153A-F69D-45E4-A220-06647295FE71}"/>
               </a:ext>
             </a:extLst>
           </p:cNvPr>
@@ -4649,7 +5114,7 @@
           <p:cNvPr id="28" name="">
             <a:extLst xmlns:a="http://schemas.openxmlformats.org/drawingml/2006/main">
               <a:ext uri="{FF2B5EF4-FFF2-40B4-BE49-F238E27FC236}">
-                <a16:creationId xmlns:a16="http://schemas.microsoft.com/office/drawing/2014/main" id="{A546648E-9843-40A3-8218-2BF1EDBA1F9C}"/>
+                <a16:creationId xmlns:a16="http://schemas.microsoft.com/office/drawing/2014/main" id="{59EBA7F0-03C6-4653-BBC3-8CB378F4C510}"/>
               </a:ext>
             </a:extLst>
           </p:cNvPr>
@@ -4699,7 +5164,7 @@
           <p:cNvPr id="29" name="">
             <a:extLst xmlns:a="http://schemas.openxmlformats.org/drawingml/2006/main">
               <a:ext uri="{FF2B5EF4-FFF2-40B4-BE49-F238E27FC236}">
-                <a16:creationId xmlns:a16="http://schemas.microsoft.com/office/drawing/2014/main" id="{596871C7-F28F-436F-BDAE-B918D63B0309}"/>
+                <a16:creationId xmlns:a16="http://schemas.microsoft.com/office/drawing/2014/main" id="{240D4199-376A-4DCD-826B-FE3A145FE1A0}"/>
               </a:ext>
             </a:extLst>
           </p:cNvPr>
@@ -4749,7 +5214,7 @@
           <p:cNvPr id="30" name="">
             <a:extLst xmlns:a="http://schemas.openxmlformats.org/drawingml/2006/main">
               <a:ext uri="{FF2B5EF4-FFF2-40B4-BE49-F238E27FC236}">
-                <a16:creationId xmlns:a16="http://schemas.microsoft.com/office/drawing/2014/main" id="{EF5204D4-CD01-4CD5-8F0E-7461FE8BB2FC}"/>
+                <a16:creationId xmlns:a16="http://schemas.microsoft.com/office/drawing/2014/main" id="{B753515F-D079-4C8F-AFB9-FB214B54905D}"/>
               </a:ext>
             </a:extLst>
           </p:cNvPr>
@@ -4784,7 +5249,7 @@
           <p:cNvPr id="31" name="">
             <a:extLst xmlns:a="http://schemas.openxmlformats.org/drawingml/2006/main">
               <a:ext uri="{FF2B5EF4-FFF2-40B4-BE49-F238E27FC236}">
-                <a16:creationId xmlns:a16="http://schemas.microsoft.com/office/drawing/2014/main" id="{0DA67CBF-E95A-4C13-9C7B-A7E50A28D57B}"/>
+                <a16:creationId xmlns:a16="http://schemas.microsoft.com/office/drawing/2014/main" id="{83E01EA6-306F-491E-B6F0-883C1F32B51B}"/>
               </a:ext>
             </a:extLst>
           </p:cNvPr>
@@ -4817,7 +5282,7 @@
           <p:cNvPr id="32" name="">
             <a:extLst xmlns:a="http://schemas.openxmlformats.org/drawingml/2006/main">
               <a:ext uri="{FF2B5EF4-FFF2-40B4-BE49-F238E27FC236}">
-                <a16:creationId xmlns:a16="http://schemas.microsoft.com/office/drawing/2014/main" id="{CC5E1D05-2178-4598-BB65-9555C1FADB76}"/>
+                <a16:creationId xmlns:a16="http://schemas.microsoft.com/office/drawing/2014/main" id="{9563D617-4E46-463E-A146-3448A811DAAC}"/>
               </a:ext>
             </a:extLst>
           </p:cNvPr>
@@ -4867,7 +5332,7 @@
           <p:cNvPr id="33" name="">
             <a:extLst xmlns:a="http://schemas.openxmlformats.org/drawingml/2006/main">
               <a:ext uri="{FF2B5EF4-FFF2-40B4-BE49-F238E27FC236}">
-                <a16:creationId xmlns:a16="http://schemas.microsoft.com/office/drawing/2014/main" id="{D42D72C8-72FF-41BB-8A27-80040DA9D7EB}"/>
+                <a16:creationId xmlns:a16="http://schemas.microsoft.com/office/drawing/2014/main" id="{81444315-6235-4589-802E-2E54B1F7C098}"/>
               </a:ext>
             </a:extLst>
           </p:cNvPr>
@@ -4917,7 +5382,7 @@
           <p:cNvPr id="34" name="">
             <a:extLst xmlns:a="http://schemas.openxmlformats.org/drawingml/2006/main">
               <a:ext uri="{FF2B5EF4-FFF2-40B4-BE49-F238E27FC236}">
-                <a16:creationId xmlns:a16="http://schemas.microsoft.com/office/drawing/2014/main" id="{10BD4A0D-1D80-453E-A76D-38F4DEC264FD}"/>
+                <a16:creationId xmlns:a16="http://schemas.microsoft.com/office/drawing/2014/main" id="{9F0CE87A-D05A-4924-8E44-4A7D1CCDCCD9}"/>
               </a:ext>
             </a:extLst>
           </p:cNvPr>
@@ -4965,7 +5430,7 @@
     </p:spTree>
     <p:extLst>
       <p:ext uri="{BB962C8B-B14F-4D97-AF65-F5344CB8AC3E}">
-        <p14:creationId xmlns:p14="http://schemas.microsoft.com/office/powerpoint/2010/main" val="513582321"/>
+        <p14:creationId xmlns:p14="http://schemas.microsoft.com/office/powerpoint/2010/main" val="341183657"/>
       </p:ext>
     </p:extLst>
   </p:cSld>
@@ -4993,7 +5458,7 @@
           <p:nvPr/>
         </p:nvPicPr>
         <p:blipFill>
-          <a:blip xmlns:r="http://schemas.openxmlformats.org/officeDocument/2006/relationships" xmlns:a="http://schemas.openxmlformats.org/drawingml/2006/main" r:embed="R0bd3f9c5e2ee44ab"/>
+          <a:blip xmlns:r="http://schemas.openxmlformats.org/officeDocument/2006/relationships" xmlns:a="http://schemas.openxmlformats.org/drawingml/2006/main" r:embed="Rcae9433a672d4dec"/>
           <a:srcRect xmlns:a="http://schemas.openxmlformats.org/drawingml/2006/main" l="0" t="0" r="0" b="0"/>
           <a:stretch xmlns:a="http://schemas.openxmlformats.org/drawingml/2006/main">
             <a:fillRect l="0" t="0" r="0" b="0"/>
@@ -5014,7 +5479,7 @@
           <p:cNvPr id="2" name="">
             <a:extLst xmlns:a="http://schemas.openxmlformats.org/drawingml/2006/main">
               <a:ext uri="{FF2B5EF4-FFF2-40B4-BE49-F238E27FC236}">
-                <a16:creationId xmlns:a16="http://schemas.microsoft.com/office/drawing/2014/main" id="{581BDE9C-22CC-4668-ACA6-B52ED10D194E}"/>
+                <a16:creationId xmlns:a16="http://schemas.microsoft.com/office/drawing/2014/main" id="{D5F28BE3-D761-4C52-99C0-FAE2B80E7C23}"/>
               </a:ext>
             </a:extLst>
           </p:cNvPr>
@@ -5047,7 +5512,7 @@
           <p:cNvPr id="3" name="">
             <a:extLst xmlns:a="http://schemas.openxmlformats.org/drawingml/2006/main">
               <a:ext uri="{FF2B5EF4-FFF2-40B4-BE49-F238E27FC236}">
-                <a16:creationId xmlns:a16="http://schemas.microsoft.com/office/drawing/2014/main" id="{22CF1D6A-5D5E-405D-8217-AAB07E44CEB0}"/>
+                <a16:creationId xmlns:a16="http://schemas.microsoft.com/office/drawing/2014/main" id="{0F290781-31EB-46DC-9014-25EB57AA10D7}"/>
               </a:ext>
             </a:extLst>
           </p:cNvPr>
@@ -5097,7 +5562,7 @@
           <p:cNvPr id="4" name="">
             <a:extLst xmlns:a="http://schemas.openxmlformats.org/drawingml/2006/main">
               <a:ext uri="{FF2B5EF4-FFF2-40B4-BE49-F238E27FC236}">
-                <a16:creationId xmlns:a16="http://schemas.microsoft.com/office/drawing/2014/main" id="{C52B0D16-DB4C-4F75-9FBE-4DDC0CD7BE1A}"/>
+                <a16:creationId xmlns:a16="http://schemas.microsoft.com/office/drawing/2014/main" id="{637AE966-DE55-4D83-A84B-CD03C9264108}"/>
               </a:ext>
             </a:extLst>
           </p:cNvPr>
@@ -5130,7 +5595,7 @@
           <p:cNvPr id="5" name="">
             <a:extLst xmlns:a="http://schemas.openxmlformats.org/drawingml/2006/main">
               <a:ext uri="{FF2B5EF4-FFF2-40B4-BE49-F238E27FC236}">
-                <a16:creationId xmlns:a16="http://schemas.microsoft.com/office/drawing/2014/main" id="{77AB6F58-5935-4796-A93F-AADA40AA0378}"/>
+                <a16:creationId xmlns:a16="http://schemas.microsoft.com/office/drawing/2014/main" id="{3D00241E-C9CF-491F-BDD9-ACE1AD2549C3}"/>
               </a:ext>
             </a:extLst>
           </p:cNvPr>
@@ -5178,7 +5643,7 @@
     </p:spTree>
     <p:extLst>
       <p:ext uri="{BB962C8B-B14F-4D97-AF65-F5344CB8AC3E}">
-        <p14:creationId xmlns:p14="http://schemas.microsoft.com/office/powerpoint/2010/main" val="307849256"/>
+        <p14:creationId xmlns:p14="http://schemas.microsoft.com/office/powerpoint/2010/main" val="619806209"/>
       </p:ext>
     </p:extLst>
   </p:cSld>
@@ -5209,7 +5674,7 @@
           <p:cNvPr id="34" name="">
             <a:extLst xmlns:a="http://schemas.openxmlformats.org/drawingml/2006/main">
               <a:ext uri="{FF2B5EF4-FFF2-40B4-BE49-F238E27FC236}">
-                <a16:creationId xmlns:a16="http://schemas.microsoft.com/office/drawing/2014/main" id="{04B55C16-CCE7-4D4F-B8AC-9400FC7E475B}"/>
+                <a16:creationId xmlns:a16="http://schemas.microsoft.com/office/drawing/2014/main" id="{265016D4-378D-4B9F-9D26-B78B2B4B66E2}"/>
               </a:ext>
             </a:extLst>
           </p:cNvPr>
@@ -5242,7 +5707,7 @@
           <p:cNvPr id="2" name="">
             <a:extLst xmlns:a="http://schemas.openxmlformats.org/drawingml/2006/main">
               <a:ext uri="{FF2B5EF4-FFF2-40B4-BE49-F238E27FC236}">
-                <a16:creationId xmlns:a16="http://schemas.microsoft.com/office/drawing/2014/main" id="{DCBD5B75-3B37-4A77-B3D8-2F61F79704F7}"/>
+                <a16:creationId xmlns:a16="http://schemas.microsoft.com/office/drawing/2014/main" id="{8893157E-9E1F-4D0F-98BA-3023E7303875}"/>
               </a:ext>
             </a:extLst>
           </p:cNvPr>
@@ -5275,7 +5740,7 @@
           <p:cNvPr id="3" name="">
             <a:extLst xmlns:a="http://schemas.openxmlformats.org/drawingml/2006/main">
               <a:ext uri="{FF2B5EF4-FFF2-40B4-BE49-F238E27FC236}">
-                <a16:creationId xmlns:a16="http://schemas.microsoft.com/office/drawing/2014/main" id="{8AE59016-4E51-478C-A8A6-A0C629CFEE30}"/>
+                <a16:creationId xmlns:a16="http://schemas.microsoft.com/office/drawing/2014/main" id="{6814A6BA-55E2-44DC-B78E-75E5ADE768C9}"/>
               </a:ext>
             </a:extLst>
           </p:cNvPr>
@@ -5325,7 +5790,7 @@
           <p:cNvPr id="4" name="">
             <a:extLst xmlns:a="http://schemas.openxmlformats.org/drawingml/2006/main">
               <a:ext uri="{FF2B5EF4-FFF2-40B4-BE49-F238E27FC236}">
-                <a16:creationId xmlns:a16="http://schemas.microsoft.com/office/drawing/2014/main" id="{5E1396AA-17A1-4E87-B28F-21B51324720D}"/>
+                <a16:creationId xmlns:a16="http://schemas.microsoft.com/office/drawing/2014/main" id="{32C0BBA5-34B0-49CE-8DCF-9AB347C0AAD8}"/>
               </a:ext>
             </a:extLst>
           </p:cNvPr>
@@ -5375,7 +5840,7 @@
           <p:cNvPr id="5" name="">
             <a:extLst xmlns:a="http://schemas.openxmlformats.org/drawingml/2006/main">
               <a:ext uri="{FF2B5EF4-FFF2-40B4-BE49-F238E27FC236}">
-                <a16:creationId xmlns:a16="http://schemas.microsoft.com/office/drawing/2014/main" id="{B1E5E0BA-56F1-4661-BF95-E4E36938108B}"/>
+                <a16:creationId xmlns:a16="http://schemas.microsoft.com/office/drawing/2014/main" id="{DE3BB7A0-F3A5-4DE9-8D8A-E648E9957602}"/>
               </a:ext>
             </a:extLst>
           </p:cNvPr>
@@ -5429,7 +5894,7 @@
           <p:nvPr/>
         </p:nvPicPr>
         <p:blipFill>
-          <a:blip xmlns:r="http://schemas.openxmlformats.org/officeDocument/2006/relationships" xmlns:a="http://schemas.openxmlformats.org/drawingml/2006/main" r:embed="R817af62760954bbd"/>
+          <a:blip xmlns:r="http://schemas.openxmlformats.org/officeDocument/2006/relationships" xmlns:a="http://schemas.openxmlformats.org/drawingml/2006/main" r:embed="R0f1d7672899b420c"/>
           <a:stretch xmlns:a="http://schemas.openxmlformats.org/drawingml/2006/main"/>
         </p:blipFill>
         <p:spPr>
@@ -5447,7 +5912,7 @@
           <p:cNvPr id="7" name="">
             <a:extLst xmlns:a="http://schemas.openxmlformats.org/drawingml/2006/main">
               <a:ext uri="{FF2B5EF4-FFF2-40B4-BE49-F238E27FC236}">
-                <a16:creationId xmlns:a16="http://schemas.microsoft.com/office/drawing/2014/main" id="{F6026B57-DDFF-4749-9484-A6C15AEEE581}"/>
+                <a16:creationId xmlns:a16="http://schemas.microsoft.com/office/drawing/2014/main" id="{C23077CF-3139-4BC2-B1F5-FA7E0ECCD743}"/>
               </a:ext>
             </a:extLst>
           </p:cNvPr>
@@ -5480,7 +5945,7 @@
           <p:cNvPr id="8" name="">
             <a:extLst xmlns:a="http://schemas.openxmlformats.org/drawingml/2006/main">
               <a:ext uri="{FF2B5EF4-FFF2-40B4-BE49-F238E27FC236}">
-                <a16:creationId xmlns:a16="http://schemas.microsoft.com/office/drawing/2014/main" id="{E53D9CE1-2463-4D9B-9DEA-D5A5AFB07162}"/>
+                <a16:creationId xmlns:a16="http://schemas.microsoft.com/office/drawing/2014/main" id="{76D03585-698C-4589-B570-21A570E893D0}"/>
               </a:ext>
             </a:extLst>
           </p:cNvPr>
@@ -5530,7 +5995,7 @@
           <p:cNvPr id="9" name="">
             <a:extLst xmlns:a="http://schemas.openxmlformats.org/drawingml/2006/main">
               <a:ext uri="{FF2B5EF4-FFF2-40B4-BE49-F238E27FC236}">
-                <a16:creationId xmlns:a16="http://schemas.microsoft.com/office/drawing/2014/main" id="{9626C341-1509-4930-9DBD-F4A390E48EEA}"/>
+                <a16:creationId xmlns:a16="http://schemas.microsoft.com/office/drawing/2014/main" id="{20A10D28-9F1D-40CC-95D7-F7DAD953B6DA}"/>
               </a:ext>
             </a:extLst>
           </p:cNvPr>
@@ -5580,7 +6045,7 @@
           <p:cNvPr id="10" name="">
             <a:extLst xmlns:a="http://schemas.openxmlformats.org/drawingml/2006/main">
               <a:ext uri="{FF2B5EF4-FFF2-40B4-BE49-F238E27FC236}">
-                <a16:creationId xmlns:a16="http://schemas.microsoft.com/office/drawing/2014/main" id="{7663B226-E47B-4E7D-8F39-58CA77F4438A}"/>
+                <a16:creationId xmlns:a16="http://schemas.microsoft.com/office/drawing/2014/main" id="{B9875D96-6E21-4A56-986F-0EF42C46D30F}"/>
               </a:ext>
             </a:extLst>
           </p:cNvPr>
@@ -5630,7 +6095,7 @@
           <p:cNvPr id="11" name="">
             <a:extLst xmlns:a="http://schemas.openxmlformats.org/drawingml/2006/main">
               <a:ext uri="{FF2B5EF4-FFF2-40B4-BE49-F238E27FC236}">
-                <a16:creationId xmlns:a16="http://schemas.microsoft.com/office/drawing/2014/main" id="{F1F0C0FA-8B81-4021-848C-7910563B0FE8}"/>
+                <a16:creationId xmlns:a16="http://schemas.microsoft.com/office/drawing/2014/main" id="{2C3B4E14-E661-4A94-AE73-393349975BC7}"/>
               </a:ext>
             </a:extLst>
           </p:cNvPr>
@@ -5680,7 +6145,7 @@
           <p:cNvPr id="12" name="">
             <a:extLst xmlns:a="http://schemas.openxmlformats.org/drawingml/2006/main">
               <a:ext uri="{FF2B5EF4-FFF2-40B4-BE49-F238E27FC236}">
-                <a16:creationId xmlns:a16="http://schemas.microsoft.com/office/drawing/2014/main" id="{E37EC5B4-FD8C-4B15-954E-808CBA796E27}"/>
+                <a16:creationId xmlns:a16="http://schemas.microsoft.com/office/drawing/2014/main" id="{5588E09E-06EE-4C94-AFFB-9738F402BD52}"/>
               </a:ext>
             </a:extLst>
           </p:cNvPr>
@@ -5730,7 +6195,7 @@
           <p:cNvPr id="13" name="">
             <a:extLst xmlns:a="http://schemas.openxmlformats.org/drawingml/2006/main">
               <a:ext uri="{FF2B5EF4-FFF2-40B4-BE49-F238E27FC236}">
-                <a16:creationId xmlns:a16="http://schemas.microsoft.com/office/drawing/2014/main" id="{BE601512-CBA6-4618-9B93-094407279C50}"/>
+                <a16:creationId xmlns:a16="http://schemas.microsoft.com/office/drawing/2014/main" id="{173D99B1-FEB4-4082-90C9-B299375F2FDB}"/>
               </a:ext>
             </a:extLst>
           </p:cNvPr>
@@ -5765,7 +6230,7 @@
           <p:cNvPr id="14" name="">
             <a:extLst xmlns:a="http://schemas.openxmlformats.org/drawingml/2006/main">
               <a:ext uri="{FF2B5EF4-FFF2-40B4-BE49-F238E27FC236}">
-                <a16:creationId xmlns:a16="http://schemas.microsoft.com/office/drawing/2014/main" id="{77ADAA6F-5FB3-400A-9702-F6CB443D314D}"/>
+                <a16:creationId xmlns:a16="http://schemas.microsoft.com/office/drawing/2014/main" id="{24A8CCA5-697C-436F-B97B-0A11C0B777DA}"/>
               </a:ext>
             </a:extLst>
           </p:cNvPr>
@@ -5815,7 +6280,7 @@
           <p:cNvPr id="15" name="">
             <a:extLst xmlns:a="http://schemas.openxmlformats.org/drawingml/2006/main">
               <a:ext uri="{FF2B5EF4-FFF2-40B4-BE49-F238E27FC236}">
-                <a16:creationId xmlns:a16="http://schemas.microsoft.com/office/drawing/2014/main" id="{5FF7A58B-7CDE-4B7F-9EF4-51C16080BCF3}"/>
+                <a16:creationId xmlns:a16="http://schemas.microsoft.com/office/drawing/2014/main" id="{2B11E27A-3607-4016-9DB0-097E380D7A7F}"/>
               </a:ext>
             </a:extLst>
           </p:cNvPr>
@@ -5865,7 +6330,7 @@
           <p:cNvPr id="16" name="">
             <a:extLst xmlns:a="http://schemas.openxmlformats.org/drawingml/2006/main">
               <a:ext uri="{FF2B5EF4-FFF2-40B4-BE49-F238E27FC236}">
-                <a16:creationId xmlns:a16="http://schemas.microsoft.com/office/drawing/2014/main" id="{773FBB39-22A7-4246-9955-5C3887364A02}"/>
+                <a16:creationId xmlns:a16="http://schemas.microsoft.com/office/drawing/2014/main" id="{AFD52C10-0EA8-4EAE-A4DD-5CFD5206D2C7}"/>
               </a:ext>
             </a:extLst>
           </p:cNvPr>
@@ -5915,7 +6380,7 @@
           <p:cNvPr id="17" name="">
             <a:extLst xmlns:a="http://schemas.openxmlformats.org/drawingml/2006/main">
               <a:ext uri="{FF2B5EF4-FFF2-40B4-BE49-F238E27FC236}">
-                <a16:creationId xmlns:a16="http://schemas.microsoft.com/office/drawing/2014/main" id="{37261D0A-4470-4801-938D-FE76392651C0}"/>
+                <a16:creationId xmlns:a16="http://schemas.microsoft.com/office/drawing/2014/main" id="{28E39A9B-9ACB-45D6-8DC0-ED9EF759E08B}"/>
               </a:ext>
             </a:extLst>
           </p:cNvPr>
@@ -5950,7 +6415,7 @@
           <p:cNvPr id="18" name="">
             <a:extLst xmlns:a="http://schemas.openxmlformats.org/drawingml/2006/main">
               <a:ext uri="{FF2B5EF4-FFF2-40B4-BE49-F238E27FC236}">
-                <a16:creationId xmlns:a16="http://schemas.microsoft.com/office/drawing/2014/main" id="{9D6FF87C-F94C-422D-ABBF-58D847C3446F}"/>
+                <a16:creationId xmlns:a16="http://schemas.microsoft.com/office/drawing/2014/main" id="{B8F6095E-DDAC-451B-8A15-776E7FF7E981}"/>
               </a:ext>
             </a:extLst>
           </p:cNvPr>
@@ -6000,7 +6465,7 @@
           <p:cNvPr id="19" name="">
             <a:extLst xmlns:a="http://schemas.openxmlformats.org/drawingml/2006/main">
               <a:ext uri="{FF2B5EF4-FFF2-40B4-BE49-F238E27FC236}">
-                <a16:creationId xmlns:a16="http://schemas.microsoft.com/office/drawing/2014/main" id="{E4C18DC4-02E9-432C-A48E-A89D7E888C77}"/>
+                <a16:creationId xmlns:a16="http://schemas.microsoft.com/office/drawing/2014/main" id="{90714321-4646-41D4-A4BD-9CB40AB8C89E}"/>
               </a:ext>
             </a:extLst>
           </p:cNvPr>
@@ -6050,7 +6515,7 @@
           <p:cNvPr id="20" name="">
             <a:extLst xmlns:a="http://schemas.openxmlformats.org/drawingml/2006/main">
               <a:ext uri="{FF2B5EF4-FFF2-40B4-BE49-F238E27FC236}">
-                <a16:creationId xmlns:a16="http://schemas.microsoft.com/office/drawing/2014/main" id="{9431701B-4E3D-4CD7-A56A-C93124D42233}"/>
+                <a16:creationId xmlns:a16="http://schemas.microsoft.com/office/drawing/2014/main" id="{3F3847AF-0DB7-4C3D-B2FD-4711AE027DD6}"/>
               </a:ext>
             </a:extLst>
           </p:cNvPr>
@@ -6100,7 +6565,7 @@
           <p:cNvPr id="21" name="">
             <a:extLst xmlns:a="http://schemas.openxmlformats.org/drawingml/2006/main">
               <a:ext uri="{FF2B5EF4-FFF2-40B4-BE49-F238E27FC236}">
-                <a16:creationId xmlns:a16="http://schemas.microsoft.com/office/drawing/2014/main" id="{45F74693-B060-4B69-B32A-E191B16291BC}"/>
+                <a16:creationId xmlns:a16="http://schemas.microsoft.com/office/drawing/2014/main" id="{C16D5E5F-5E23-452D-9772-D77DE026FBDB}"/>
               </a:ext>
             </a:extLst>
           </p:cNvPr>
@@ -6135,7 +6600,7 @@
           <p:cNvPr id="22" name="">
             <a:extLst xmlns:a="http://schemas.openxmlformats.org/drawingml/2006/main">
               <a:ext uri="{FF2B5EF4-FFF2-40B4-BE49-F238E27FC236}">
-                <a16:creationId xmlns:a16="http://schemas.microsoft.com/office/drawing/2014/main" id="{B5AFE9F9-2471-434C-BBD2-7712C7AFC4D4}"/>
+                <a16:creationId xmlns:a16="http://schemas.microsoft.com/office/drawing/2014/main" id="{7F460A3B-6188-40E3-84F8-722785D3D4E5}"/>
               </a:ext>
             </a:extLst>
           </p:cNvPr>
@@ -6185,7 +6650,7 @@
           <p:cNvPr id="23" name="">
             <a:extLst xmlns:a="http://schemas.openxmlformats.org/drawingml/2006/main">
               <a:ext uri="{FF2B5EF4-FFF2-40B4-BE49-F238E27FC236}">
-                <a16:creationId xmlns:a16="http://schemas.microsoft.com/office/drawing/2014/main" id="{FF889AE2-14DA-4632-905D-512800562F02}"/>
+                <a16:creationId xmlns:a16="http://schemas.microsoft.com/office/drawing/2014/main" id="{B9E4A650-3CF2-47B5-B3FC-C22088348742}"/>
               </a:ext>
             </a:extLst>
           </p:cNvPr>
@@ -6235,7 +6700,7 @@
           <p:cNvPr id="24" name="">
             <a:extLst xmlns:a="http://schemas.openxmlformats.org/drawingml/2006/main">
               <a:ext uri="{FF2B5EF4-FFF2-40B4-BE49-F238E27FC236}">
-                <a16:creationId xmlns:a16="http://schemas.microsoft.com/office/drawing/2014/main" id="{D0A9237D-DFEF-4D27-951A-3611BF3E336A}"/>
+                <a16:creationId xmlns:a16="http://schemas.microsoft.com/office/drawing/2014/main" id="{DCD623E2-5CC0-497D-A2EB-5F4304C88A65}"/>
               </a:ext>
             </a:extLst>
           </p:cNvPr>
@@ -6285,7 +6750,7 @@
           <p:cNvPr id="25" name="">
             <a:extLst xmlns:a="http://schemas.openxmlformats.org/drawingml/2006/main">
               <a:ext uri="{FF2B5EF4-FFF2-40B4-BE49-F238E27FC236}">
-                <a16:creationId xmlns:a16="http://schemas.microsoft.com/office/drawing/2014/main" id="{581A40CF-6E50-4C01-9710-D239B557C46B}"/>
+                <a16:creationId xmlns:a16="http://schemas.microsoft.com/office/drawing/2014/main" id="{ACA538BC-27EC-42F1-BC6E-44D193B2FE31}"/>
               </a:ext>
             </a:extLst>
           </p:cNvPr>
@@ -6320,7 +6785,7 @@
           <p:cNvPr id="26" name="">
             <a:extLst xmlns:a="http://schemas.openxmlformats.org/drawingml/2006/main">
               <a:ext uri="{FF2B5EF4-FFF2-40B4-BE49-F238E27FC236}">
-                <a16:creationId xmlns:a16="http://schemas.microsoft.com/office/drawing/2014/main" id="{67D52EC6-DBFB-493B-9A66-97EF23B3905A}"/>
+                <a16:creationId xmlns:a16="http://schemas.microsoft.com/office/drawing/2014/main" id="{B6C72426-1327-4C71-9AC1-70B7A25F1ACD}"/>
               </a:ext>
             </a:extLst>
           </p:cNvPr>
@@ -6370,7 +6835,7 @@
           <p:cNvPr id="27" name="">
             <a:extLst xmlns:a="http://schemas.openxmlformats.org/drawingml/2006/main">
               <a:ext uri="{FF2B5EF4-FFF2-40B4-BE49-F238E27FC236}">
-                <a16:creationId xmlns:a16="http://schemas.microsoft.com/office/drawing/2014/main" id="{D568C72E-F563-4883-881A-5C4BEADD950A}"/>
+                <a16:creationId xmlns:a16="http://schemas.microsoft.com/office/drawing/2014/main" id="{ED19312C-7CEB-470F-9EF0-D0D9471723CF}"/>
               </a:ext>
             </a:extLst>
           </p:cNvPr>
@@ -6420,7 +6885,7 @@
           <p:cNvPr id="28" name="">
             <a:extLst xmlns:a="http://schemas.openxmlformats.org/drawingml/2006/main">
               <a:ext uri="{FF2B5EF4-FFF2-40B4-BE49-F238E27FC236}">
-                <a16:creationId xmlns:a16="http://schemas.microsoft.com/office/drawing/2014/main" id="{DAA321C7-DFEE-4893-A8D7-C162A0845ED5}"/>
+                <a16:creationId xmlns:a16="http://schemas.microsoft.com/office/drawing/2014/main" id="{52B250EA-E9CE-4D06-A256-33BC4F65F428}"/>
               </a:ext>
             </a:extLst>
           </p:cNvPr>
@@ -6470,7 +6935,7 @@
           <p:cNvPr id="29" name="">
             <a:extLst xmlns:a="http://schemas.openxmlformats.org/drawingml/2006/main">
               <a:ext uri="{FF2B5EF4-FFF2-40B4-BE49-F238E27FC236}">
-                <a16:creationId xmlns:a16="http://schemas.microsoft.com/office/drawing/2014/main" id="{1D44D237-E22D-4747-8E7F-C407647C1325}"/>
+                <a16:creationId xmlns:a16="http://schemas.microsoft.com/office/drawing/2014/main" id="{61DF514B-03B4-41DB-A7BF-4C47C0AEA230}"/>
               </a:ext>
             </a:extLst>
           </p:cNvPr>
@@ -6505,7 +6970,7 @@
           <p:cNvPr id="30" name="">
             <a:extLst xmlns:a="http://schemas.openxmlformats.org/drawingml/2006/main">
               <a:ext uri="{FF2B5EF4-FFF2-40B4-BE49-F238E27FC236}">
-                <a16:creationId xmlns:a16="http://schemas.microsoft.com/office/drawing/2014/main" id="{C28F6BC1-F283-40D5-85C8-C414EAE225F4}"/>
+                <a16:creationId xmlns:a16="http://schemas.microsoft.com/office/drawing/2014/main" id="{8FACAE8C-9276-4B3F-B7D0-AA7A2D56B09E}"/>
               </a:ext>
             </a:extLst>
           </p:cNvPr>
@@ -6555,7 +7020,7 @@
           <p:cNvPr id="31" name="">
             <a:extLst xmlns:a="http://schemas.openxmlformats.org/drawingml/2006/main">
               <a:ext uri="{FF2B5EF4-FFF2-40B4-BE49-F238E27FC236}">
-                <a16:creationId xmlns:a16="http://schemas.microsoft.com/office/drawing/2014/main" id="{D1A7D72C-CBA3-4B58-BD67-D709CF25B948}"/>
+                <a16:creationId xmlns:a16="http://schemas.microsoft.com/office/drawing/2014/main" id="{4D91C367-1C3C-4276-8FF4-7583FC421F7D}"/>
               </a:ext>
             </a:extLst>
           </p:cNvPr>
@@ -6605,7 +7070,7 @@
           <p:cNvPr id="32" name="">
             <a:extLst xmlns:a="http://schemas.openxmlformats.org/drawingml/2006/main">
               <a:ext uri="{FF2B5EF4-FFF2-40B4-BE49-F238E27FC236}">
-                <a16:creationId xmlns:a16="http://schemas.microsoft.com/office/drawing/2014/main" id="{EE92DC0E-7BFE-4BE8-BDFA-CB05DFF2ABDF}"/>
+                <a16:creationId xmlns:a16="http://schemas.microsoft.com/office/drawing/2014/main" id="{4329613F-D412-4F50-B201-05CA36B23474}"/>
               </a:ext>
             </a:extLst>
           </p:cNvPr>
@@ -6655,7 +7120,7 @@
           <p:cNvPr id="33" name="">
             <a:extLst xmlns:a="http://schemas.openxmlformats.org/drawingml/2006/main">
               <a:ext uri="{FF2B5EF4-FFF2-40B4-BE49-F238E27FC236}">
-                <a16:creationId xmlns:a16="http://schemas.microsoft.com/office/drawing/2014/main" id="{05D32196-F7C1-40E6-85BA-99A8BB9FD4D9}"/>
+                <a16:creationId xmlns:a16="http://schemas.microsoft.com/office/drawing/2014/main" id="{58E73E05-F4B4-43E8-934F-9B998EF73BE5}"/>
               </a:ext>
             </a:extLst>
           </p:cNvPr>
@@ -6703,7 +7168,7 @@
     </p:spTree>
     <p:extLst>
       <p:ext uri="{BB962C8B-B14F-4D97-AF65-F5344CB8AC3E}">
-        <p14:creationId xmlns:p14="http://schemas.microsoft.com/office/powerpoint/2010/main" val="2057262827"/>
+        <p14:creationId xmlns:p14="http://schemas.microsoft.com/office/powerpoint/2010/main" val="1501009106"/>
       </p:ext>
     </p:extLst>
   </p:cSld>
@@ -6731,7 +7196,7 @@
           <p:nvPr/>
         </p:nvPicPr>
         <p:blipFill>
-          <a:blip xmlns:r="http://schemas.openxmlformats.org/officeDocument/2006/relationships" xmlns:a="http://schemas.openxmlformats.org/drawingml/2006/main" r:embed="R48089920d2634982"/>
+          <a:blip xmlns:r="http://schemas.openxmlformats.org/officeDocument/2006/relationships" xmlns:a="http://schemas.openxmlformats.org/drawingml/2006/main" r:embed="Rf12cc8a4d1ee40e1"/>
           <a:srcRect xmlns:a="http://schemas.openxmlformats.org/drawingml/2006/main" l="0" t="0" r="0" b="0"/>
           <a:stretch xmlns:a="http://schemas.openxmlformats.org/drawingml/2006/main">
             <a:fillRect l="0" t="0" r="0" b="0"/>
@@ -6752,7 +7217,7 @@
           <p:cNvPr id="2" name="">
             <a:extLst xmlns:a="http://schemas.openxmlformats.org/drawingml/2006/main">
               <a:ext uri="{FF2B5EF4-FFF2-40B4-BE49-F238E27FC236}">
-                <a16:creationId xmlns:a16="http://schemas.microsoft.com/office/drawing/2014/main" id="{6906B3D7-5ECA-49A0-8276-963A2CCDC69C}"/>
+                <a16:creationId xmlns:a16="http://schemas.microsoft.com/office/drawing/2014/main" id="{972CDB49-E6DC-486E-8262-033D3793F05F}"/>
               </a:ext>
             </a:extLst>
           </p:cNvPr>
@@ -6785,7 +7250,7 @@
           <p:cNvPr id="3" name="">
             <a:extLst xmlns:a="http://schemas.openxmlformats.org/drawingml/2006/main">
               <a:ext uri="{FF2B5EF4-FFF2-40B4-BE49-F238E27FC236}">
-                <a16:creationId xmlns:a16="http://schemas.microsoft.com/office/drawing/2014/main" id="{35037214-B29C-4AB9-B01C-3B0F52E3E79B}"/>
+                <a16:creationId xmlns:a16="http://schemas.microsoft.com/office/drawing/2014/main" id="{8E8845E3-10D2-492D-B339-07E0565D8E26}"/>
               </a:ext>
             </a:extLst>
           </p:cNvPr>
@@ -6835,7 +7300,7 @@
           <p:cNvPr id="4" name="">
             <a:extLst xmlns:a="http://schemas.openxmlformats.org/drawingml/2006/main">
               <a:ext uri="{FF2B5EF4-FFF2-40B4-BE49-F238E27FC236}">
-                <a16:creationId xmlns:a16="http://schemas.microsoft.com/office/drawing/2014/main" id="{11CB63D3-5D51-4F4F-8E93-D42BF0D13F8D}"/>
+                <a16:creationId xmlns:a16="http://schemas.microsoft.com/office/drawing/2014/main" id="{D929C61E-9653-4BAC-8F43-268C448BC016}"/>
               </a:ext>
             </a:extLst>
           </p:cNvPr>
@@ -6868,7 +7333,7 @@
           <p:cNvPr id="5" name="">
             <a:extLst xmlns:a="http://schemas.openxmlformats.org/drawingml/2006/main">
               <a:ext uri="{FF2B5EF4-FFF2-40B4-BE49-F238E27FC236}">
-                <a16:creationId xmlns:a16="http://schemas.microsoft.com/office/drawing/2014/main" id="{8FB08413-15F1-4E70-96A6-04AD1FDAFA49}"/>
+                <a16:creationId xmlns:a16="http://schemas.microsoft.com/office/drawing/2014/main" id="{70D7250D-6F74-49F0-A0FD-484872E1440D}"/>
               </a:ext>
             </a:extLst>
           </p:cNvPr>
@@ -6916,7 +7381,7 @@
     </p:spTree>
     <p:extLst>
       <p:ext uri="{BB962C8B-B14F-4D97-AF65-F5344CB8AC3E}">
-        <p14:creationId xmlns:p14="http://schemas.microsoft.com/office/powerpoint/2010/main" val="1087434319"/>
+        <p14:creationId xmlns:p14="http://schemas.microsoft.com/office/powerpoint/2010/main" val="715516333"/>
       </p:ext>
     </p:extLst>
   </p:cSld>
@@ -6944,7 +7409,7 @@
           <p:nvPr/>
         </p:nvPicPr>
         <p:blipFill>
-          <a:blip xmlns:r="http://schemas.openxmlformats.org/officeDocument/2006/relationships" xmlns:a="http://schemas.openxmlformats.org/drawingml/2006/main" r:embed="R3f3eaae35ea34e37"/>
+          <a:blip xmlns:r="http://schemas.openxmlformats.org/officeDocument/2006/relationships" xmlns:a="http://schemas.openxmlformats.org/drawingml/2006/main" r:embed="R0adb6c8bd0a048e5"/>
           <a:srcRect xmlns:a="http://schemas.openxmlformats.org/drawingml/2006/main" l="0" t="0" r="0" b="0"/>
           <a:stretch xmlns:a="http://schemas.openxmlformats.org/drawingml/2006/main">
             <a:fillRect l="0" t="0" r="0" b="0"/>
@@ -6965,7 +7430,7 @@
           <p:cNvPr id="2" name="">
             <a:extLst xmlns:a="http://schemas.openxmlformats.org/drawingml/2006/main">
               <a:ext uri="{FF2B5EF4-FFF2-40B4-BE49-F238E27FC236}">
-                <a16:creationId xmlns:a16="http://schemas.microsoft.com/office/drawing/2014/main" id="{6CBB7B15-08F5-4650-BAC5-918900205C04}"/>
+                <a16:creationId xmlns:a16="http://schemas.microsoft.com/office/drawing/2014/main" id="{B1E2BE37-E1C6-4E1B-8A69-099D8B2DEC1D}"/>
               </a:ext>
             </a:extLst>
           </p:cNvPr>
@@ -6998,7 +7463,7 @@
           <p:cNvPr id="3" name="">
             <a:extLst xmlns:a="http://schemas.openxmlformats.org/drawingml/2006/main">
               <a:ext uri="{FF2B5EF4-FFF2-40B4-BE49-F238E27FC236}">
-                <a16:creationId xmlns:a16="http://schemas.microsoft.com/office/drawing/2014/main" id="{064D6F21-2AE1-4835-880D-95ADF6B568B9}"/>
+                <a16:creationId xmlns:a16="http://schemas.microsoft.com/office/drawing/2014/main" id="{07533D72-11D8-4C4A-84CE-9C39B76EE7F9}"/>
               </a:ext>
             </a:extLst>
           </p:cNvPr>
@@ -7048,7 +7513,7 @@
           <p:cNvPr id="4" name="">
             <a:extLst xmlns:a="http://schemas.openxmlformats.org/drawingml/2006/main">
               <a:ext uri="{FF2B5EF4-FFF2-40B4-BE49-F238E27FC236}">
-                <a16:creationId xmlns:a16="http://schemas.microsoft.com/office/drawing/2014/main" id="{BE402410-A45E-47C2-8AE3-FBD12D7A9F8F}"/>
+                <a16:creationId xmlns:a16="http://schemas.microsoft.com/office/drawing/2014/main" id="{364FE6B2-9E87-4DF8-A9E5-CBE355F96857}"/>
               </a:ext>
             </a:extLst>
           </p:cNvPr>
@@ -7081,7 +7546,7 @@
           <p:cNvPr id="5" name="">
             <a:extLst xmlns:a="http://schemas.openxmlformats.org/drawingml/2006/main">
               <a:ext uri="{FF2B5EF4-FFF2-40B4-BE49-F238E27FC236}">
-                <a16:creationId xmlns:a16="http://schemas.microsoft.com/office/drawing/2014/main" id="{83DF17D2-8EE1-453C-88B5-E6277E14F9D7}"/>
+                <a16:creationId xmlns:a16="http://schemas.microsoft.com/office/drawing/2014/main" id="{1AF1970A-8E7C-4CE4-9754-77712E37D623}"/>
               </a:ext>
             </a:extLst>
           </p:cNvPr>
@@ -7129,7 +7594,7 @@
     </p:spTree>
     <p:extLst>
       <p:ext uri="{BB962C8B-B14F-4D97-AF65-F5344CB8AC3E}">
-        <p14:creationId xmlns:p14="http://schemas.microsoft.com/office/powerpoint/2010/main" val="701948454"/>
+        <p14:creationId xmlns:p14="http://schemas.microsoft.com/office/powerpoint/2010/main" val="800079288"/>
       </p:ext>
     </p:extLst>
   </p:cSld>
@@ -7157,7 +7622,7 @@
           <p:nvPr/>
         </p:nvPicPr>
         <p:blipFill>
-          <a:blip xmlns:r="http://schemas.openxmlformats.org/officeDocument/2006/relationships" xmlns:a="http://schemas.openxmlformats.org/drawingml/2006/main" r:embed="R457b82ac39f94be8"/>
+          <a:blip xmlns:r="http://schemas.openxmlformats.org/officeDocument/2006/relationships" xmlns:a="http://schemas.openxmlformats.org/drawingml/2006/main" r:embed="R620bbedc4b13487c"/>
           <a:srcRect xmlns:a="http://schemas.openxmlformats.org/drawingml/2006/main" l="0" t="0" r="0" b="0"/>
           <a:stretch xmlns:a="http://schemas.openxmlformats.org/drawingml/2006/main">
             <a:fillRect l="0" t="0" r="0" b="0"/>
@@ -7178,7 +7643,7 @@
           <p:cNvPr id="2" name="">
             <a:extLst xmlns:a="http://schemas.openxmlformats.org/drawingml/2006/main">
               <a:ext uri="{FF2B5EF4-FFF2-40B4-BE49-F238E27FC236}">
-                <a16:creationId xmlns:a16="http://schemas.microsoft.com/office/drawing/2014/main" id="{38396979-036F-4C17-BDD8-2F273CE1C02F}"/>
+                <a16:creationId xmlns:a16="http://schemas.microsoft.com/office/drawing/2014/main" id="{8954AFCB-0417-4C9E-B110-36E189EBCDF9}"/>
               </a:ext>
             </a:extLst>
           </p:cNvPr>
@@ -7211,7 +7676,7 @@
           <p:cNvPr id="3" name="">
             <a:extLst xmlns:a="http://schemas.openxmlformats.org/drawingml/2006/main">
               <a:ext uri="{FF2B5EF4-FFF2-40B4-BE49-F238E27FC236}">
-                <a16:creationId xmlns:a16="http://schemas.microsoft.com/office/drawing/2014/main" id="{02A8BB00-E4EE-44CE-9701-2CC8D28D202B}"/>
+                <a16:creationId xmlns:a16="http://schemas.microsoft.com/office/drawing/2014/main" id="{AF9058DE-4DFE-4D8F-9642-F654B8DE59F8}"/>
               </a:ext>
             </a:extLst>
           </p:cNvPr>
@@ -7261,7 +7726,7 @@
           <p:cNvPr id="4" name="">
             <a:extLst xmlns:a="http://schemas.openxmlformats.org/drawingml/2006/main">
               <a:ext uri="{FF2B5EF4-FFF2-40B4-BE49-F238E27FC236}">
-                <a16:creationId xmlns:a16="http://schemas.microsoft.com/office/drawing/2014/main" id="{EE8B5D18-2400-4ED5-B53F-B777B8DC4CB2}"/>
+                <a16:creationId xmlns:a16="http://schemas.microsoft.com/office/drawing/2014/main" id="{35A4C8F4-F940-4795-9CA3-2B3FE76A1FCF}"/>
               </a:ext>
             </a:extLst>
           </p:cNvPr>
@@ -7294,7 +7759,7 @@
           <p:cNvPr id="5" name="">
             <a:extLst xmlns:a="http://schemas.openxmlformats.org/drawingml/2006/main">
               <a:ext uri="{FF2B5EF4-FFF2-40B4-BE49-F238E27FC236}">
-                <a16:creationId xmlns:a16="http://schemas.microsoft.com/office/drawing/2014/main" id="{958FCA90-8D2E-482E-8783-204961D7ED56}"/>
+                <a16:creationId xmlns:a16="http://schemas.microsoft.com/office/drawing/2014/main" id="{493BF866-4248-4A8A-8156-202B9556D8D1}"/>
               </a:ext>
             </a:extLst>
           </p:cNvPr>
@@ -7342,7 +7807,7 @@
     </p:spTree>
     <p:extLst>
       <p:ext uri="{BB962C8B-B14F-4D97-AF65-F5344CB8AC3E}">
-        <p14:creationId xmlns:p14="http://schemas.microsoft.com/office/powerpoint/2010/main" val="1481750625"/>
+        <p14:creationId xmlns:p14="http://schemas.microsoft.com/office/powerpoint/2010/main" val="600485965"/>
       </p:ext>
     </p:extLst>
   </p:cSld>
@@ -7370,10 +7835,10 @@
       </p:grpSpPr>
       <p:sp>
         <p:nvSpPr>
-          <p:cNvPr id="44" name="">
-            <a:extLst xmlns:a="http://schemas.openxmlformats.org/drawingml/2006/main">
-              <a:ext uri="{FF2B5EF4-FFF2-40B4-BE49-F238E27FC236}">
-                <a16:creationId xmlns:a16="http://schemas.microsoft.com/office/drawing/2014/main" id="{53050165-81D5-4CE9-9AC6-216E4A613ECB}"/>
+          <p:cNvPr id="32" name="">
+            <a:extLst xmlns:a="http://schemas.openxmlformats.org/drawingml/2006/main">
+              <a:ext uri="{FF2B5EF4-FFF2-40B4-BE49-F238E27FC236}">
+                <a16:creationId xmlns:a16="http://schemas.microsoft.com/office/drawing/2014/main" id="{66EA4B21-00CB-425A-81D7-B6924630BF20}"/>
               </a:ext>
             </a:extLst>
           </p:cNvPr>
@@ -7406,7 +7871,7 @@
           <p:cNvPr id="2" name="">
             <a:extLst xmlns:a="http://schemas.openxmlformats.org/drawingml/2006/main">
               <a:ext uri="{FF2B5EF4-FFF2-40B4-BE49-F238E27FC236}">
-                <a16:creationId xmlns:a16="http://schemas.microsoft.com/office/drawing/2014/main" id="{11C7BC3D-685A-4648-9BE2-14CD579872B4}"/>
+                <a16:creationId xmlns:a16="http://schemas.microsoft.com/office/drawing/2014/main" id="{68CE4B88-75F6-4AAD-973C-81AAA042E6D3}"/>
               </a:ext>
             </a:extLst>
           </p:cNvPr>
@@ -7439,7 +7904,7 @@
           <p:cNvPr id="3" name="">
             <a:extLst xmlns:a="http://schemas.openxmlformats.org/drawingml/2006/main">
               <a:ext uri="{FF2B5EF4-FFF2-40B4-BE49-F238E27FC236}">
-                <a16:creationId xmlns:a16="http://schemas.microsoft.com/office/drawing/2014/main" id="{6764D591-76F0-4DCA-B9C5-924D71AEA558}"/>
+                <a16:creationId xmlns:a16="http://schemas.microsoft.com/office/drawing/2014/main" id="{D256C5AF-1A37-4757-8DB1-B95C827A8999}"/>
               </a:ext>
             </a:extLst>
           </p:cNvPr>
@@ -7489,7 +7954,7 @@
           <p:cNvPr id="4" name="">
             <a:extLst xmlns:a="http://schemas.openxmlformats.org/drawingml/2006/main">
               <a:ext uri="{FF2B5EF4-FFF2-40B4-BE49-F238E27FC236}">
-                <a16:creationId xmlns:a16="http://schemas.microsoft.com/office/drawing/2014/main" id="{5086A91D-E728-4948-9C7B-CDF244B355AB}"/>
+                <a16:creationId xmlns:a16="http://schemas.microsoft.com/office/drawing/2014/main" id="{E19449F6-7F43-484D-AB6A-1AC80AAF21D8}"/>
               </a:ext>
             </a:extLst>
           </p:cNvPr>
@@ -7529,7 +7994,7 @@
                   <a:srgbClr val="C9A227"/>
                 </a:solidFill>
               </a:rPr>
-              <a:t>HOPPER STUDIO</a:t>
+              <a:t>HOPPER STUDIO API</a:t>
             </a:r>
           </a:p>
         </p:txBody>
@@ -7539,7 +8004,7 @@
           <p:cNvPr id="5" name="">
             <a:extLst xmlns:a="http://schemas.openxmlformats.org/drawingml/2006/main">
               <a:ext uri="{FF2B5EF4-FFF2-40B4-BE49-F238E27FC236}">
-                <a16:creationId xmlns:a16="http://schemas.microsoft.com/office/drawing/2014/main" id="{8408077E-DB62-4354-ABFE-5F01937CE943}"/>
+                <a16:creationId xmlns:a16="http://schemas.microsoft.com/office/drawing/2014/main" id="{CE9D9A5F-FC0E-4F4F-90B1-7E7F5508E26F}"/>
               </a:ext>
             </a:extLst>
           </p:cNvPr>
@@ -7579,21 +8044,21 @@
                   <a:srgbClr val="001B3A"/>
                 </a:solidFill>
               </a:rPr>
-              <a:t>From a printed ID to a mission decision</a:t>
+              <a:t>Centering needs tolerances, timeouts, and landing</a:t>
             </a:r>
           </a:p>
         </p:txBody>
       </p:sp>
       <p:pic>
         <p:nvPicPr>
-          <p:cNvPr id="49" name=""/>
+          <p:cNvPr id="37" name=""/>
           <p:cNvPicPr>
             <a:picLocks xmlns:a="http://schemas.openxmlformats.org/drawingml/2006/main" noChangeAspect="1"/>
           </p:cNvPicPr>
           <p:nvPr/>
         </p:nvPicPr>
         <p:blipFill>
-          <a:blip xmlns:r="http://schemas.openxmlformats.org/officeDocument/2006/relationships" xmlns:a="http://schemas.openxmlformats.org/drawingml/2006/main" r:embed="R61661ca6dee34d7f"/>
+          <a:blip xmlns:r="http://schemas.openxmlformats.org/officeDocument/2006/relationships" xmlns:a="http://schemas.openxmlformats.org/drawingml/2006/main" r:embed="R1923b34b823d4c36"/>
           <a:stretch xmlns:a="http://schemas.openxmlformats.org/drawingml/2006/main"/>
         </p:blipFill>
         <p:spPr>
@@ -7611,7 +8076,7 @@
           <p:cNvPr id="7" name="">
             <a:extLst xmlns:a="http://schemas.openxmlformats.org/drawingml/2006/main">
               <a:ext uri="{FF2B5EF4-FFF2-40B4-BE49-F238E27FC236}">
-                <a16:creationId xmlns:a16="http://schemas.microsoft.com/office/drawing/2014/main" id="{575B5E80-1300-4F44-8034-3B037088D0F8}"/>
+                <a16:creationId xmlns:a16="http://schemas.microsoft.com/office/drawing/2014/main" id="{57A6E9C2-8C4D-440F-860A-BBC53CADDEBE}"/>
               </a:ext>
             </a:extLst>
           </p:cNvPr>
@@ -7644,7 +8109,7 @@
           <p:cNvPr id="8" name="">
             <a:extLst xmlns:a="http://schemas.openxmlformats.org/drawingml/2006/main">
               <a:ext uri="{FF2B5EF4-FFF2-40B4-BE49-F238E27FC236}">
-                <a16:creationId xmlns:a16="http://schemas.microsoft.com/office/drawing/2014/main" id="{682B54C5-6600-43AD-AB5F-A32A8709BC29}"/>
+                <a16:creationId xmlns:a16="http://schemas.microsoft.com/office/drawing/2014/main" id="{B405B247-205F-41E4-8746-B5BED9AF4BAD}"/>
               </a:ext>
             </a:extLst>
           </p:cNvPr>
@@ -7694,7 +8159,7 @@
           <p:cNvPr id="9" name="">
             <a:extLst xmlns:a="http://schemas.openxmlformats.org/drawingml/2006/main">
               <a:ext uri="{FF2B5EF4-FFF2-40B4-BE49-F238E27FC236}">
-                <a16:creationId xmlns:a16="http://schemas.microsoft.com/office/drawing/2014/main" id="{304174CC-42BA-428F-B715-60E78AD9C109}"/>
+                <a16:creationId xmlns:a16="http://schemas.microsoft.com/office/drawing/2014/main" id="{1EB1C9D6-62DE-417F-9148-B6B01E320FB8}"/>
               </a:ext>
             </a:extLst>
           </p:cNvPr>
@@ -7744,262 +8209,1282 @@
           <p:cNvPr id="10" name="">
             <a:extLst xmlns:a="http://schemas.openxmlformats.org/drawingml/2006/main">
               <a:ext uri="{FF2B5EF4-FFF2-40B4-BE49-F238E27FC236}">
-                <a16:creationId xmlns:a16="http://schemas.microsoft.com/office/drawing/2014/main" id="{D8434970-716B-4D40-B06F-CFA5656B2D95}"/>
-              </a:ext>
-            </a:extLst>
-          </p:cNvPr>
-          <p:cNvSpPr>
-            <a:spLocks xmlns:a="http://schemas.openxmlformats.org/drawingml/2006/main" noGrp="1"/>
-          </p:cNvSpPr>
-          <p:nvPr/>
-        </p:nvSpPr>
-        <p:spPr>
-          <a:xfrm xmlns:a="http://schemas.openxmlformats.org/drawingml/2006/main">
-            <a:off x="666750" y="1952625"/>
-            <a:ext cx="1988820" cy="1619250"/>
-          </a:xfrm>
-          <a:prstGeom xmlns:a="http://schemas.openxmlformats.org/drawingml/2006/main" prst="rect">
-            <a:avLst/>
-          </a:prstGeom>
-          <a:ln xmlns:a="http://schemas.openxmlformats.org/drawingml/2006/main" w="0">
-            <a:prstDash val="solid"/>
-          </a:ln>
-        </p:spPr>
-      </p:sp>
-      <p:sp>
-        <p:nvSpPr>
-          <p:cNvPr id="11" name="">
-            <a:extLst xmlns:a="http://schemas.openxmlformats.org/drawingml/2006/main">
-              <a:ext uri="{FF2B5EF4-FFF2-40B4-BE49-F238E27FC236}">
-                <a16:creationId xmlns:a16="http://schemas.microsoft.com/office/drawing/2014/main" id="{6A828E94-C0BA-4E70-8EF6-8C747F667DB0}"/>
-              </a:ext>
-            </a:extLst>
-          </p:cNvPr>
-          <p:cNvSpPr>
-            <a:spLocks xmlns:a="http://schemas.openxmlformats.org/drawingml/2006/main" noGrp="1"/>
-          </p:cNvSpPr>
-          <p:nvPr/>
-        </p:nvSpPr>
-        <p:spPr>
-          <a:xfrm xmlns:a="http://schemas.openxmlformats.org/drawingml/2006/main">
-            <a:off x="2884170" y="1952625"/>
-            <a:ext cx="1988820" cy="1619250"/>
-          </a:xfrm>
-          <a:prstGeom xmlns:a="http://schemas.openxmlformats.org/drawingml/2006/main" prst="rect">
-            <a:avLst/>
-          </a:prstGeom>
-          <a:ln xmlns:a="http://schemas.openxmlformats.org/drawingml/2006/main" w="0">
-            <a:prstDash val="solid"/>
-          </a:ln>
-        </p:spPr>
-      </p:sp>
-      <p:sp>
-        <p:nvSpPr>
-          <p:cNvPr id="12" name="">
-            <a:extLst xmlns:a="http://schemas.openxmlformats.org/drawingml/2006/main">
-              <a:ext uri="{FF2B5EF4-FFF2-40B4-BE49-F238E27FC236}">
-                <a16:creationId xmlns:a16="http://schemas.microsoft.com/office/drawing/2014/main" id="{A659E44A-293E-446F-9655-88B0B3209EF0}"/>
-              </a:ext>
-            </a:extLst>
-          </p:cNvPr>
-          <p:cNvSpPr>
-            <a:spLocks xmlns:a="http://schemas.openxmlformats.org/drawingml/2006/main" noGrp="1"/>
-          </p:cNvSpPr>
-          <p:nvPr/>
-        </p:nvSpPr>
-        <p:spPr>
-          <a:xfrm xmlns:a="http://schemas.openxmlformats.org/drawingml/2006/main">
-            <a:off x="5101590" y="1952625"/>
-            <a:ext cx="1988820" cy="1619250"/>
-          </a:xfrm>
-          <a:prstGeom xmlns:a="http://schemas.openxmlformats.org/drawingml/2006/main" prst="rect">
-            <a:avLst/>
-          </a:prstGeom>
-          <a:ln xmlns:a="http://schemas.openxmlformats.org/drawingml/2006/main" w="0">
-            <a:prstDash val="solid"/>
-          </a:ln>
-        </p:spPr>
-      </p:sp>
-      <p:sp>
-        <p:nvSpPr>
-          <p:cNvPr id="13" name="">
-            <a:extLst xmlns:a="http://schemas.openxmlformats.org/drawingml/2006/main">
-              <a:ext uri="{FF2B5EF4-FFF2-40B4-BE49-F238E27FC236}">
-                <a16:creationId xmlns:a16="http://schemas.microsoft.com/office/drawing/2014/main" id="{0B04E9C4-A044-4CA2-B442-8D3BE83E8A95}"/>
-              </a:ext>
-            </a:extLst>
-          </p:cNvPr>
-          <p:cNvSpPr>
-            <a:spLocks xmlns:a="http://schemas.openxmlformats.org/drawingml/2006/main" noGrp="1"/>
-          </p:cNvSpPr>
-          <p:nvPr/>
-        </p:nvSpPr>
-        <p:spPr>
-          <a:xfrm xmlns:a="http://schemas.openxmlformats.org/drawingml/2006/main">
-            <a:off x="7319010" y="1952625"/>
-            <a:ext cx="1988820" cy="1619250"/>
-          </a:xfrm>
-          <a:prstGeom xmlns:a="http://schemas.openxmlformats.org/drawingml/2006/main" prst="rect">
-            <a:avLst/>
-          </a:prstGeom>
-          <a:ln xmlns:a="http://schemas.openxmlformats.org/drawingml/2006/main" w="0">
-            <a:prstDash val="solid"/>
-          </a:ln>
-        </p:spPr>
-      </p:sp>
-      <p:sp>
-        <p:nvSpPr>
-          <p:cNvPr id="14" name="">
-            <a:extLst xmlns:a="http://schemas.openxmlformats.org/drawingml/2006/main">
-              <a:ext uri="{FF2B5EF4-FFF2-40B4-BE49-F238E27FC236}">
-                <a16:creationId xmlns:a16="http://schemas.microsoft.com/office/drawing/2014/main" id="{BA477F2C-37C0-434C-85A5-03A019962164}"/>
-              </a:ext>
-            </a:extLst>
-          </p:cNvPr>
-          <p:cNvSpPr>
-            <a:spLocks xmlns:a="http://schemas.openxmlformats.org/drawingml/2006/main" noGrp="1"/>
-          </p:cNvSpPr>
-          <p:nvPr/>
-        </p:nvSpPr>
-        <p:spPr>
-          <a:xfrm xmlns:a="http://schemas.openxmlformats.org/drawingml/2006/main">
-            <a:off x="9536430" y="1952625"/>
-            <a:ext cx="1988820" cy="1619250"/>
-          </a:xfrm>
-          <a:prstGeom xmlns:a="http://schemas.openxmlformats.org/drawingml/2006/main" prst="rect">
-            <a:avLst/>
-          </a:prstGeom>
-          <a:ln xmlns:a="http://schemas.openxmlformats.org/drawingml/2006/main" w="0">
-            <a:prstDash val="solid"/>
-          </a:ln>
-        </p:spPr>
-      </p:sp>
-      <p:cxnSp>
-        <p:nvCxnSpPr>
-          <p:cNvPr id="58" name=""/>
-          <p:cNvCxnSpPr>
-            <a:stCxn xmlns:a="http://schemas.openxmlformats.org/drawingml/2006/main" id="10" idx="3"/>
-            <a:endCxn xmlns:a="http://schemas.openxmlformats.org/drawingml/2006/main" id="11" idx="1"/>
-          </p:cNvCxnSpPr>
-          <p:nvPr/>
-        </p:nvCxnSpPr>
-        <p:spPr>
-          <a:xfrm xmlns:a="http://schemas.openxmlformats.org/drawingml/2006/main">
-            <a:off x="2655570" y="2762250"/>
-            <a:ext cx="228600" cy="0"/>
-          </a:xfrm>
-          <a:prstGeom xmlns:a="http://schemas.openxmlformats.org/drawingml/2006/main" prst="straightConnector1">
-            <a:avLst/>
-          </a:prstGeom>
-          <a:ln xmlns:a="http://schemas.openxmlformats.org/drawingml/2006/main" w="38100">
-            <a:solidFill>
-              <a:srgbClr val="008C95"/>
-            </a:solidFill>
-            <a:prstDash val="solid"/>
-            <a:tailEnd type="triangle" w="med" len="med"/>
-          </a:ln>
-        </p:spPr>
-      </p:cxnSp>
-      <p:cxnSp>
-        <p:nvCxnSpPr>
-          <p:cNvPr id="59" name=""/>
-          <p:cNvCxnSpPr>
-            <a:stCxn xmlns:a="http://schemas.openxmlformats.org/drawingml/2006/main" id="11" idx="3"/>
-            <a:endCxn xmlns:a="http://schemas.openxmlformats.org/drawingml/2006/main" id="12" idx="1"/>
-          </p:cNvCxnSpPr>
-          <p:nvPr/>
-        </p:nvCxnSpPr>
-        <p:spPr>
-          <a:xfrm xmlns:a="http://schemas.openxmlformats.org/drawingml/2006/main">
-            <a:off x="4872990" y="2762250"/>
-            <a:ext cx="228600" cy="0"/>
-          </a:xfrm>
-          <a:prstGeom xmlns:a="http://schemas.openxmlformats.org/drawingml/2006/main" prst="straightConnector1">
-            <a:avLst/>
-          </a:prstGeom>
-          <a:ln xmlns:a="http://schemas.openxmlformats.org/drawingml/2006/main" w="38100">
-            <a:solidFill>
-              <a:srgbClr val="008C95"/>
-            </a:solidFill>
-            <a:prstDash val="solid"/>
-            <a:tailEnd type="triangle" w="med" len="med"/>
-          </a:ln>
-        </p:spPr>
-      </p:cxnSp>
-      <p:cxnSp>
-        <p:nvCxnSpPr>
-          <p:cNvPr id="60" name=""/>
-          <p:cNvCxnSpPr>
-            <a:stCxn xmlns:a="http://schemas.openxmlformats.org/drawingml/2006/main" id="12" idx="3"/>
-            <a:endCxn xmlns:a="http://schemas.openxmlformats.org/drawingml/2006/main" id="13" idx="1"/>
-          </p:cNvCxnSpPr>
-          <p:nvPr/>
-        </p:nvCxnSpPr>
-        <p:spPr>
-          <a:xfrm xmlns:a="http://schemas.openxmlformats.org/drawingml/2006/main">
-            <a:off x="7090410" y="2762250"/>
-            <a:ext cx="228600" cy="0"/>
-          </a:xfrm>
-          <a:prstGeom xmlns:a="http://schemas.openxmlformats.org/drawingml/2006/main" prst="straightConnector1">
-            <a:avLst/>
-          </a:prstGeom>
-          <a:ln xmlns:a="http://schemas.openxmlformats.org/drawingml/2006/main" w="38100">
-            <a:solidFill>
-              <a:srgbClr val="008C95"/>
-            </a:solidFill>
-            <a:prstDash val="solid"/>
-            <a:tailEnd type="triangle" w="med" len="med"/>
-          </a:ln>
-        </p:spPr>
-      </p:cxnSp>
-      <p:cxnSp>
-        <p:nvCxnSpPr>
-          <p:cNvPr id="61" name=""/>
-          <p:cNvCxnSpPr>
-            <a:stCxn xmlns:a="http://schemas.openxmlformats.org/drawingml/2006/main" id="13" idx="3"/>
-            <a:endCxn xmlns:a="http://schemas.openxmlformats.org/drawingml/2006/main" id="14" idx="1"/>
-          </p:cNvCxnSpPr>
-          <p:nvPr/>
-        </p:nvCxnSpPr>
-        <p:spPr>
-          <a:xfrm xmlns:a="http://schemas.openxmlformats.org/drawingml/2006/main">
-            <a:off x="9307830" y="2762250"/>
-            <a:ext cx="228600" cy="0"/>
-          </a:xfrm>
-          <a:prstGeom xmlns:a="http://schemas.openxmlformats.org/drawingml/2006/main" prst="straightConnector1">
-            <a:avLst/>
-          </a:prstGeom>
-          <a:ln xmlns:a="http://schemas.openxmlformats.org/drawingml/2006/main" w="38100">
-            <a:solidFill>
-              <a:srgbClr val="008C95"/>
-            </a:solidFill>
-            <a:prstDash val="solid"/>
-            <a:tailEnd type="triangle" w="med" len="med"/>
-          </a:ln>
-        </p:spPr>
-      </p:cxnSp>
-      <p:sp>
-        <p:nvSpPr>
-          <p:cNvPr id="19" name="">
-            <a:extLst xmlns:a="http://schemas.openxmlformats.org/drawingml/2006/main">
-              <a:ext uri="{FF2B5EF4-FFF2-40B4-BE49-F238E27FC236}">
-                <a16:creationId xmlns:a16="http://schemas.microsoft.com/office/drawing/2014/main" id="{1F595A88-03AC-47C1-9AE3-F8C0A2D858A7}"/>
-              </a:ext>
-            </a:extLst>
-          </p:cNvPr>
-          <p:cNvSpPr>
-            <a:spLocks xmlns:a="http://schemas.openxmlformats.org/drawingml/2006/main" noGrp="1"/>
-          </p:cNvSpPr>
-          <p:nvPr/>
-        </p:nvSpPr>
-        <p:spPr>
-          <a:xfrm xmlns:a="http://schemas.openxmlformats.org/drawingml/2006/main">
-            <a:off x="666750" y="1952625"/>
-            <a:ext cx="1988820" cy="1619250"/>
+                <a16:creationId xmlns:a16="http://schemas.microsoft.com/office/drawing/2014/main" id="{06A17F5F-0D0C-40C4-A3B4-954995C2A75D}"/>
+              </a:ext>
+            </a:extLst>
+          </p:cNvPr>
+          <p:cNvSpPr>
+            <a:spLocks xmlns:a="http://schemas.openxmlformats.org/drawingml/2006/main" noGrp="1"/>
+          </p:cNvSpPr>
+          <p:nvPr/>
+        </p:nvSpPr>
+        <p:spPr>
+          <a:xfrm xmlns:a="http://schemas.openxmlformats.org/drawingml/2006/main">
+            <a:off x="514350" y="1409700"/>
+            <a:ext cx="5334000" cy="4838700"/>
           </a:xfrm>
           <a:prstGeom xmlns:a="http://schemas.openxmlformats.org/drawingml/2006/main" prst="roundRect">
             <a:avLst>
-              <a:gd name="adj" fmla="val 7059"/>
+              <a:gd name="adj" fmla="val 2362"/>
+            </a:avLst>
+          </a:prstGeom>
+          <a:solidFill xmlns:a="http://schemas.openxmlformats.org/drawingml/2006/main">
+            <a:srgbClr val="062B4D"/>
+          </a:solidFill>
+          <a:ln xmlns:a="http://schemas.openxmlformats.org/drawingml/2006/main" w="14288">
+            <a:solidFill>
+              <a:srgbClr val="0C365A"/>
+            </a:solidFill>
+            <a:prstDash val="solid"/>
+          </a:ln>
+        </p:spPr>
+      </p:sp>
+      <p:sp>
+        <p:nvSpPr>
+          <p:cNvPr id="11" name="">
+            <a:extLst xmlns:a="http://schemas.openxmlformats.org/drawingml/2006/main">
+              <a:ext uri="{FF2B5EF4-FFF2-40B4-BE49-F238E27FC236}">
+                <a16:creationId xmlns:a16="http://schemas.microsoft.com/office/drawing/2014/main" id="{D3BCA3DE-DB49-443C-837F-EC3525CDE92B}"/>
+              </a:ext>
+            </a:extLst>
+          </p:cNvPr>
+          <p:cNvSpPr>
+            <a:spLocks xmlns:a="http://schemas.openxmlformats.org/drawingml/2006/main" noGrp="1"/>
+          </p:cNvSpPr>
+          <p:nvPr/>
+        </p:nvSpPr>
+        <p:spPr>
+          <a:xfrm xmlns:a="http://schemas.openxmlformats.org/drawingml/2006/main">
+            <a:off x="514350" y="1409700"/>
+            <a:ext cx="5334000" cy="342900"/>
+          </a:xfrm>
+          <a:prstGeom xmlns:a="http://schemas.openxmlformats.org/drawingml/2006/main" prst="rect">
+            <a:avLst/>
+          </a:prstGeom>
+          <a:solidFill xmlns:a="http://schemas.openxmlformats.org/drawingml/2006/main">
+            <a:srgbClr val="071A30"/>
+          </a:solidFill>
+          <a:ln xmlns:a="http://schemas.openxmlformats.org/drawingml/2006/main" w="0">
+            <a:solidFill>
+              <a:srgbClr val="071A30"/>
+            </a:solidFill>
+            <a:prstDash val="solid"/>
+          </a:ln>
+        </p:spPr>
+      </p:sp>
+      <p:sp>
+        <p:nvSpPr>
+          <p:cNvPr id="12" name="">
+            <a:extLst xmlns:a="http://schemas.openxmlformats.org/drawingml/2006/main">
+              <a:ext uri="{FF2B5EF4-FFF2-40B4-BE49-F238E27FC236}">
+                <a16:creationId xmlns:a16="http://schemas.microsoft.com/office/drawing/2014/main" id="{0D7C90CE-FB54-43A7-B91B-B21567252D67}"/>
+              </a:ext>
+            </a:extLst>
+          </p:cNvPr>
+          <p:cNvSpPr>
+            <a:spLocks xmlns:a="http://schemas.openxmlformats.org/drawingml/2006/main" noGrp="1"/>
+          </p:cNvSpPr>
+          <p:nvPr/>
+        </p:nvSpPr>
+        <p:spPr>
+          <a:xfrm xmlns:a="http://schemas.openxmlformats.org/drawingml/2006/main">
+            <a:off x="666750" y="1533525"/>
+            <a:ext cx="85725" cy="85725"/>
+          </a:xfrm>
+          <a:prstGeom xmlns:a="http://schemas.openxmlformats.org/drawingml/2006/main" prst="ellipse">
+            <a:avLst/>
+          </a:prstGeom>
+          <a:solidFill xmlns:a="http://schemas.openxmlformats.org/drawingml/2006/main">
+            <a:srgbClr val="F16B72"/>
+          </a:solidFill>
+          <a:ln xmlns:a="http://schemas.openxmlformats.org/drawingml/2006/main" w="0">
+            <a:solidFill>
+              <a:srgbClr val="F16B72"/>
+            </a:solidFill>
+            <a:prstDash val="solid"/>
+          </a:ln>
+        </p:spPr>
+      </p:sp>
+      <p:sp>
+        <p:nvSpPr>
+          <p:cNvPr id="13" name="">
+            <a:extLst xmlns:a="http://schemas.openxmlformats.org/drawingml/2006/main">
+              <a:ext uri="{FF2B5EF4-FFF2-40B4-BE49-F238E27FC236}">
+                <a16:creationId xmlns:a16="http://schemas.microsoft.com/office/drawing/2014/main" id="{76239C03-9D94-4164-9AED-A2B0273EFC36}"/>
+              </a:ext>
+            </a:extLst>
+          </p:cNvPr>
+          <p:cNvSpPr>
+            <a:spLocks xmlns:a="http://schemas.openxmlformats.org/drawingml/2006/main" noGrp="1"/>
+          </p:cNvSpPr>
+          <p:nvPr/>
+        </p:nvSpPr>
+        <p:spPr>
+          <a:xfrm xmlns:a="http://schemas.openxmlformats.org/drawingml/2006/main">
+            <a:off x="838200" y="1533525"/>
+            <a:ext cx="85725" cy="85725"/>
+          </a:xfrm>
+          <a:prstGeom xmlns:a="http://schemas.openxmlformats.org/drawingml/2006/main" prst="ellipse">
+            <a:avLst/>
+          </a:prstGeom>
+          <a:solidFill xmlns:a="http://schemas.openxmlformats.org/drawingml/2006/main">
+            <a:srgbClr val="EABF48"/>
+          </a:solidFill>
+          <a:ln xmlns:a="http://schemas.openxmlformats.org/drawingml/2006/main" w="0">
+            <a:solidFill>
+              <a:srgbClr val="EABF48"/>
+            </a:solidFill>
+            <a:prstDash val="solid"/>
+          </a:ln>
+        </p:spPr>
+      </p:sp>
+      <p:sp>
+        <p:nvSpPr>
+          <p:cNvPr id="14" name="">
+            <a:extLst xmlns:a="http://schemas.openxmlformats.org/drawingml/2006/main">
+              <a:ext uri="{FF2B5EF4-FFF2-40B4-BE49-F238E27FC236}">
+                <a16:creationId xmlns:a16="http://schemas.microsoft.com/office/drawing/2014/main" id="{A737BFBA-77FB-41C3-9DCC-BC2588D2DFF8}"/>
+              </a:ext>
+            </a:extLst>
+          </p:cNvPr>
+          <p:cNvSpPr>
+            <a:spLocks xmlns:a="http://schemas.openxmlformats.org/drawingml/2006/main" noGrp="1"/>
+          </p:cNvSpPr>
+          <p:nvPr/>
+        </p:nvSpPr>
+        <p:spPr>
+          <a:xfrm xmlns:a="http://schemas.openxmlformats.org/drawingml/2006/main">
+            <a:off x="1009650" y="1533525"/>
+            <a:ext cx="85725" cy="85725"/>
+          </a:xfrm>
+          <a:prstGeom xmlns:a="http://schemas.openxmlformats.org/drawingml/2006/main" prst="ellipse">
+            <a:avLst/>
+          </a:prstGeom>
+          <a:solidFill xmlns:a="http://schemas.openxmlformats.org/drawingml/2006/main">
+            <a:srgbClr val="4CC2A8"/>
+          </a:solidFill>
+          <a:ln xmlns:a="http://schemas.openxmlformats.org/drawingml/2006/main" w="0">
+            <a:solidFill>
+              <a:srgbClr val="4CC2A8"/>
+            </a:solidFill>
+            <a:prstDash val="solid"/>
+          </a:ln>
+        </p:spPr>
+      </p:sp>
+      <p:sp>
+        <p:nvSpPr>
+          <p:cNvPr id="15" name="">
+            <a:extLst xmlns:a="http://schemas.openxmlformats.org/drawingml/2006/main">
+              <a:ext uri="{FF2B5EF4-FFF2-40B4-BE49-F238E27FC236}">
+                <a16:creationId xmlns:a16="http://schemas.microsoft.com/office/drawing/2014/main" id="{F3154EED-C67E-48A3-BB9E-B2979D96F2B5}"/>
+              </a:ext>
+            </a:extLst>
+          </p:cNvPr>
+          <p:cNvSpPr>
+            <a:spLocks xmlns:a="http://schemas.openxmlformats.org/drawingml/2006/main" noGrp="1"/>
+          </p:cNvSpPr>
+          <p:nvPr/>
+        </p:nvSpPr>
+        <p:spPr>
+          <a:xfrm xmlns:a="http://schemas.openxmlformats.org/drawingml/2006/main">
+            <a:off x="1257300" y="1495425"/>
+            <a:ext cx="4419600" cy="190500"/>
+          </a:xfrm>
+          <a:prstGeom xmlns:a="http://schemas.openxmlformats.org/drawingml/2006/main" prst="rect">
+            <a:avLst/>
+          </a:prstGeom>
+          <a:noFill xmlns:a="http://schemas.openxmlformats.org/drawingml/2006/main"/>
+          <a:ln xmlns:a="http://schemas.openxmlformats.org/drawingml/2006/main" w="0">
+            <a:noFill/>
+            <a:prstDash val="solid"/>
+          </a:ln>
+        </p:spPr>
+        <p:txBody>
+          <a:bodyPr xmlns:a="http://schemas.openxmlformats.org/drawingml/2006/main"/>
+          <a:lstStyle xmlns:a="http://schemas.openxmlformats.org/drawingml/2006/main"/>
+          <a:p xmlns:a="http://schemas.openxmlformats.org/drawingml/2006/main">
+            <a:pPr>
+              <a:defRPr sz="825" b="1">
+                <a:solidFill>
+                  <a:srgbClr val="A7C2CF"/>
+                </a:solidFill>
+              </a:defRPr>
+            </a:pPr>
+            <a:r>
+              <a:rPr sz="825" b="1">
+                <a:solidFill>
+                  <a:srgbClr val="A7C2CF"/>
+                </a:solidFill>
+              </a:rPr>
+              <a:t>BOUNDED APRILTAG CENTERING · PROGRAM.JS</a:t>
+            </a:r>
+          </a:p>
+        </p:txBody>
+      </p:sp>
+      <p:sp>
+        <p:nvSpPr>
+          <p:cNvPr id="16" name="">
+            <a:extLst xmlns:a="http://schemas.openxmlformats.org/drawingml/2006/main">
+              <a:ext uri="{FF2B5EF4-FFF2-40B4-BE49-F238E27FC236}">
+                <a16:creationId xmlns:a16="http://schemas.microsoft.com/office/drawing/2014/main" id="{EA859DF3-8A34-45D8-984E-C6F1D65182CA}"/>
+              </a:ext>
+            </a:extLst>
+          </p:cNvPr>
+          <p:cNvSpPr>
+            <a:spLocks xmlns:a="http://schemas.openxmlformats.org/drawingml/2006/main" noGrp="1"/>
+          </p:cNvSpPr>
+          <p:nvPr/>
+        </p:nvSpPr>
+        <p:spPr>
+          <a:xfrm xmlns:a="http://schemas.openxmlformats.org/drawingml/2006/main">
+            <a:off x="685800" y="1885950"/>
+            <a:ext cx="4991100" cy="4229100"/>
+          </a:xfrm>
+          <a:prstGeom xmlns:a="http://schemas.openxmlformats.org/drawingml/2006/main" prst="rect">
+            <a:avLst/>
+          </a:prstGeom>
+          <a:noFill xmlns:a="http://schemas.openxmlformats.org/drawingml/2006/main"/>
+          <a:ln xmlns:a="http://schemas.openxmlformats.org/drawingml/2006/main" w="0">
+            <a:noFill/>
+            <a:prstDash val="solid"/>
+          </a:ln>
+        </p:spPr>
+        <p:txBody>
+          <a:bodyPr xmlns:a="http://schemas.openxmlformats.org/drawingml/2006/main" lIns="0" tIns="0" rIns="0" bIns="0">
+            <a:noAutofit/>
+          </a:bodyPr>
+          <a:lstStyle xmlns:a="http://schemas.openxmlformats.org/drawingml/2006/main"/>
+          <a:p xmlns:a="http://schemas.openxmlformats.org/drawingml/2006/main">
+            <a:pPr>
+              <a:lnSpc>
+                <a:spcPct val="105000"/>
+              </a:lnSpc>
+              <a:spcAft>
+                <a:spcPts val="0"/>
+              </a:spcAft>
+              <a:buNone/>
+              <a:defRPr sz="1125"/>
+            </a:pPr>
+            <a:r>
+              <a:rPr sz="1125">
+                <a:solidFill>
+                  <a:srgbClr val="67869A"/>
+                </a:solidFill>
+                <a:latin typeface="Aptos Mono"/>
+                <a:ea typeface="Aptos Mono"/>
+                <a:cs typeface="Aptos Mono"/>
+              </a:rPr>
+              <a:t> 1  </a:t>
+            </a:r>
+            <a:r>
+              <a:rPr sz="1125">
+                <a:solidFill>
+                  <a:srgbClr val="78C7FF"/>
+                </a:solidFill>
+                <a:latin typeface="Aptos Mono"/>
+                <a:ea typeface="Aptos Mono"/>
+                <a:cs typeface="Aptos Mono"/>
+              </a:rPr>
+              <a:t>await</a:t>
+            </a:r>
+            <a:r>
+              <a:rPr sz="1125">
+                <a:solidFill>
+                  <a:srgbClr val="E7F1F5"/>
+                </a:solidFill>
+                <a:latin typeface="Aptos Mono"/>
+                <a:ea typeface="Aptos Mono"/>
+                <a:cs typeface="Aptos Mono"/>
+              </a:rPr>
+              <a:t> drone</a:t>
+            </a:r>
+            <a:r>
+              <a:rPr sz="1125">
+                <a:solidFill>
+                  <a:srgbClr val="B4C9D8"/>
+                </a:solidFill>
+                <a:latin typeface="Aptos Mono"/>
+                <a:ea typeface="Aptos Mono"/>
+                <a:cs typeface="Aptos Mono"/>
+              </a:rPr>
+              <a:t>.</a:t>
+            </a:r>
+            <a:r>
+              <a:rPr sz="1125">
+                <a:solidFill>
+                  <a:srgbClr val="55D6C2"/>
+                </a:solidFill>
+                <a:latin typeface="Aptos Mono"/>
+                <a:ea typeface="Aptos Mono"/>
+                <a:cs typeface="Aptos Mono"/>
+              </a:rPr>
+              <a:t>takeOff</a:t>
+            </a:r>
+            <a:r>
+              <a:rPr sz="1125">
+                <a:solidFill>
+                  <a:srgbClr val="E7F1F5"/>
+                </a:solidFill>
+                <a:latin typeface="Aptos Mono"/>
+                <a:ea typeface="Aptos Mono"/>
+                <a:cs typeface="Aptos Mono"/>
+              </a:rPr>
+              <a:t>();</a:t>
+            </a:r>
+          </a:p>
+          <a:p xmlns:a="http://schemas.openxmlformats.org/drawingml/2006/main">
+            <a:pPr>
+              <a:lnSpc>
+                <a:spcPct val="105000"/>
+              </a:lnSpc>
+              <a:spcAft>
+                <a:spcPts val="0"/>
+              </a:spcAft>
+              <a:buNone/>
+              <a:defRPr sz="1125"/>
+            </a:pPr>
+            <a:r>
+              <a:rPr sz="1125">
+                <a:solidFill>
+                  <a:srgbClr val="67869A"/>
+                </a:solidFill>
+                <a:latin typeface="Aptos Mono"/>
+                <a:ea typeface="Aptos Mono"/>
+                <a:cs typeface="Aptos Mono"/>
+              </a:rPr>
+              <a:t> 2  </a:t>
+            </a:r>
+            <a:r>
+              <a:rPr sz="1125">
+                <a:solidFill>
+                  <a:srgbClr val="78C7FF"/>
+                </a:solidFill>
+                <a:latin typeface="Aptos Mono"/>
+                <a:ea typeface="Aptos Mono"/>
+                <a:cs typeface="Aptos Mono"/>
+              </a:rPr>
+              <a:t>try</a:t>
+            </a:r>
+            <a:r>
+              <a:rPr sz="1125">
+                <a:solidFill>
+                  <a:srgbClr val="E7F1F5"/>
+                </a:solidFill>
+                <a:latin typeface="Aptos Mono"/>
+                <a:ea typeface="Aptos Mono"/>
+                <a:cs typeface="Aptos Mono"/>
+              </a:rPr>
+              <a:t> {</a:t>
+            </a:r>
+          </a:p>
+          <a:p xmlns:a="http://schemas.openxmlformats.org/drawingml/2006/main">
+            <a:pPr>
+              <a:lnSpc>
+                <a:spcPct val="105000"/>
+              </a:lnSpc>
+              <a:spcAft>
+                <a:spcPts val="0"/>
+              </a:spcAft>
+              <a:buNone/>
+              <a:defRPr sz="1125"/>
+            </a:pPr>
+            <a:r>
+              <a:rPr sz="1125">
+                <a:solidFill>
+                  <a:srgbClr val="67869A"/>
+                </a:solidFill>
+                <a:latin typeface="Aptos Mono"/>
+                <a:ea typeface="Aptos Mono"/>
+                <a:cs typeface="Aptos Mono"/>
+              </a:rPr>
+              <a:t> 3  </a:t>
+            </a:r>
+            <a:r>
+              <a:rPr sz="1125">
+                <a:solidFill>
+                  <a:srgbClr val="E7F1F5"/>
+                </a:solidFill>
+                <a:latin typeface="Aptos Mono"/>
+                <a:ea typeface="Aptos Mono"/>
+                <a:cs typeface="Aptos Mono"/>
+              </a:rPr>
+              <a:t>  </a:t>
+            </a:r>
+            <a:r>
+              <a:rPr sz="1125">
+                <a:solidFill>
+                  <a:srgbClr val="78C7FF"/>
+                </a:solidFill>
+                <a:latin typeface="Aptos Mono"/>
+                <a:ea typeface="Aptos Mono"/>
+                <a:cs typeface="Aptos Mono"/>
+              </a:rPr>
+              <a:t>const</a:t>
+            </a:r>
+            <a:r>
+              <a:rPr sz="1125">
+                <a:solidFill>
+                  <a:srgbClr val="E7F1F5"/>
+                </a:solidFill>
+                <a:latin typeface="Aptos Mono"/>
+                <a:ea typeface="Aptos Mono"/>
+                <a:cs typeface="Aptos Mono"/>
+              </a:rPr>
+              <a:t> centered </a:t>
+            </a:r>
+            <a:r>
+              <a:rPr sz="1125">
+                <a:solidFill>
+                  <a:srgbClr val="B4C9D8"/>
+                </a:solidFill>
+                <a:latin typeface="Aptos Mono"/>
+                <a:ea typeface="Aptos Mono"/>
+                <a:cs typeface="Aptos Mono"/>
+              </a:rPr>
+              <a:t>=</a:t>
+            </a:r>
+            <a:r>
+              <a:rPr sz="1125">
+                <a:solidFill>
+                  <a:srgbClr val="E7F1F5"/>
+                </a:solidFill>
+                <a:latin typeface="Aptos Mono"/>
+                <a:ea typeface="Aptos Mono"/>
+                <a:cs typeface="Aptos Mono"/>
+              </a:rPr>
+              <a:t> </a:t>
+            </a:r>
+            <a:r>
+              <a:rPr sz="1125">
+                <a:solidFill>
+                  <a:srgbClr val="78C7FF"/>
+                </a:solidFill>
+                <a:latin typeface="Aptos Mono"/>
+                <a:ea typeface="Aptos Mono"/>
+                <a:cs typeface="Aptos Mono"/>
+              </a:rPr>
+              <a:t>await</a:t>
+            </a:r>
+            <a:r>
+              <a:rPr sz="1125">
+                <a:solidFill>
+                  <a:srgbClr val="E7F1F5"/>
+                </a:solidFill>
+                <a:latin typeface="Aptos Mono"/>
+                <a:ea typeface="Aptos Mono"/>
+                <a:cs typeface="Aptos Mono"/>
+              </a:rPr>
+              <a:t> vision</a:t>
+            </a:r>
+            <a:r>
+              <a:rPr sz="1125">
+                <a:solidFill>
+                  <a:srgbClr val="B4C9D8"/>
+                </a:solidFill>
+                <a:latin typeface="Aptos Mono"/>
+                <a:ea typeface="Aptos Mono"/>
+                <a:cs typeface="Aptos Mono"/>
+              </a:rPr>
+              <a:t>.</a:t>
+            </a:r>
+            <a:r>
+              <a:rPr sz="1125">
+                <a:solidFill>
+                  <a:srgbClr val="55D6C2"/>
+                </a:solidFill>
+                <a:latin typeface="Aptos Mono"/>
+                <a:ea typeface="Aptos Mono"/>
+                <a:cs typeface="Aptos Mono"/>
+              </a:rPr>
+              <a:t>centerOnAprilTag</a:t>
+            </a:r>
+            <a:r>
+              <a:rPr sz="1125">
+                <a:solidFill>
+                  <a:srgbClr val="E7F1F5"/>
+                </a:solidFill>
+                <a:latin typeface="Aptos Mono"/>
+                <a:ea typeface="Aptos Mono"/>
+                <a:cs typeface="Aptos Mono"/>
+              </a:rPr>
+              <a:t>(</a:t>
+            </a:r>
+          </a:p>
+          <a:p xmlns:a="http://schemas.openxmlformats.org/drawingml/2006/main">
+            <a:pPr>
+              <a:lnSpc>
+                <a:spcPct val="105000"/>
+              </a:lnSpc>
+              <a:spcAft>
+                <a:spcPts val="0"/>
+              </a:spcAft>
+              <a:buNone/>
+              <a:defRPr sz="1125"/>
+            </a:pPr>
+            <a:r>
+              <a:rPr sz="1125">
+                <a:solidFill>
+                  <a:srgbClr val="67869A"/>
+                </a:solidFill>
+                <a:latin typeface="Aptos Mono"/>
+                <a:ea typeface="Aptos Mono"/>
+                <a:cs typeface="Aptos Mono"/>
+              </a:rPr>
+              <a:t> 4  </a:t>
+            </a:r>
+            <a:r>
+              <a:rPr sz="1125">
+                <a:solidFill>
+                  <a:srgbClr val="E7F1F5"/>
+                </a:solidFill>
+                <a:latin typeface="Aptos Mono"/>
+                <a:ea typeface="Aptos Mono"/>
+                <a:cs typeface="Aptos Mono"/>
+              </a:rPr>
+              <a:t>    drone,</a:t>
+            </a:r>
+          </a:p>
+          <a:p xmlns:a="http://schemas.openxmlformats.org/drawingml/2006/main">
+            <a:pPr>
+              <a:lnSpc>
+                <a:spcPct val="105000"/>
+              </a:lnSpc>
+              <a:spcAft>
+                <a:spcPts val="0"/>
+              </a:spcAft>
+              <a:buNone/>
+              <a:defRPr sz="1125"/>
+            </a:pPr>
+            <a:r>
+              <a:rPr sz="1125">
+                <a:solidFill>
+                  <a:srgbClr val="67869A"/>
+                </a:solidFill>
+                <a:latin typeface="Aptos Mono"/>
+                <a:ea typeface="Aptos Mono"/>
+                <a:cs typeface="Aptos Mono"/>
+              </a:rPr>
+              <a:t> 5  </a:t>
+            </a:r>
+            <a:r>
+              <a:rPr sz="1125">
+                <a:solidFill>
+                  <a:srgbClr val="E7F1F5"/>
+                </a:solidFill>
+                <a:latin typeface="Aptos Mono"/>
+                <a:ea typeface="Aptos Mono"/>
+                <a:cs typeface="Aptos Mono"/>
+              </a:rPr>
+              <a:t>    </a:t>
+            </a:r>
+            <a:r>
+              <a:rPr sz="1125">
+                <a:solidFill>
+                  <a:srgbClr val="F5C66B"/>
+                </a:solidFill>
+                <a:latin typeface="Aptos Mono"/>
+                <a:ea typeface="Aptos Mono"/>
+                <a:cs typeface="Aptos Mono"/>
+              </a:rPr>
+              <a:t>7</a:t>
+            </a:r>
+            <a:r>
+              <a:rPr sz="1125">
+                <a:solidFill>
+                  <a:srgbClr val="E7F1F5"/>
+                </a:solidFill>
+                <a:latin typeface="Aptos Mono"/>
+                <a:ea typeface="Aptos Mono"/>
+                <a:cs typeface="Aptos Mono"/>
+              </a:rPr>
+              <a:t>,</a:t>
+            </a:r>
+          </a:p>
+          <a:p xmlns:a="http://schemas.openxmlformats.org/drawingml/2006/main">
+            <a:pPr>
+              <a:lnSpc>
+                <a:spcPct val="105000"/>
+              </a:lnSpc>
+              <a:spcAft>
+                <a:spcPts val="0"/>
+              </a:spcAft>
+              <a:buNone/>
+              <a:defRPr sz="1125"/>
+            </a:pPr>
+            <a:r>
+              <a:rPr sz="1125">
+                <a:solidFill>
+                  <a:srgbClr val="67869A"/>
+                </a:solidFill>
+                <a:latin typeface="Aptos Mono"/>
+                <a:ea typeface="Aptos Mono"/>
+                <a:cs typeface="Aptos Mono"/>
+              </a:rPr>
+              <a:t> 6  </a:t>
+            </a:r>
+            <a:r>
+              <a:rPr sz="1125">
+                <a:solidFill>
+                  <a:srgbClr val="E7F1F5"/>
+                </a:solidFill>
+                <a:latin typeface="Aptos Mono"/>
+                <a:ea typeface="Aptos Mono"/>
+                <a:cs typeface="Aptos Mono"/>
+              </a:rPr>
+              <a:t>    </a:t>
+            </a:r>
+            <a:r>
+              <a:rPr sz="1125">
+                <a:solidFill>
+                  <a:srgbClr val="F5C66B"/>
+                </a:solidFill>
+                <a:latin typeface="Aptos Mono"/>
+                <a:ea typeface="Aptos Mono"/>
+                <a:cs typeface="Aptos Mono"/>
+              </a:rPr>
+              <a:t>10</a:t>
+            </a:r>
+            <a:r>
+              <a:rPr sz="1125">
+                <a:solidFill>
+                  <a:srgbClr val="E7F1F5"/>
+                </a:solidFill>
+                <a:latin typeface="Aptos Mono"/>
+                <a:ea typeface="Aptos Mono"/>
+                <a:cs typeface="Aptos Mono"/>
+              </a:rPr>
+              <a:t>,</a:t>
+            </a:r>
+          </a:p>
+          <a:p xmlns:a="http://schemas.openxmlformats.org/drawingml/2006/main">
+            <a:pPr>
+              <a:lnSpc>
+                <a:spcPct val="105000"/>
+              </a:lnSpc>
+              <a:spcAft>
+                <a:spcPts val="0"/>
+              </a:spcAft>
+              <a:buNone/>
+              <a:defRPr sz="1125"/>
+            </a:pPr>
+            <a:r>
+              <a:rPr sz="1125">
+                <a:solidFill>
+                  <a:srgbClr val="67869A"/>
+                </a:solidFill>
+                <a:latin typeface="Aptos Mono"/>
+                <a:ea typeface="Aptos Mono"/>
+                <a:cs typeface="Aptos Mono"/>
+              </a:rPr>
+              <a:t> 7  </a:t>
+            </a:r>
+            <a:r>
+              <a:rPr sz="1125">
+                <a:solidFill>
+                  <a:srgbClr val="E7F1F5"/>
+                </a:solidFill>
+                <a:latin typeface="Aptos Mono"/>
+                <a:ea typeface="Aptos Mono"/>
+                <a:cs typeface="Aptos Mono"/>
+              </a:rPr>
+              <a:t>    </a:t>
+            </a:r>
+            <a:r>
+              <a:rPr sz="1125">
+                <a:solidFill>
+                  <a:srgbClr val="F5C66B"/>
+                </a:solidFill>
+                <a:latin typeface="Aptos Mono"/>
+                <a:ea typeface="Aptos Mono"/>
+                <a:cs typeface="Aptos Mono"/>
+              </a:rPr>
+              <a:t>5</a:t>
+            </a:r>
+            <a:r>
+              <a:rPr sz="1125">
+                <a:solidFill>
+                  <a:srgbClr val="E7F1F5"/>
+                </a:solidFill>
+                <a:latin typeface="Aptos Mono"/>
+                <a:ea typeface="Aptos Mono"/>
+                <a:cs typeface="Aptos Mono"/>
+              </a:rPr>
+              <a:t>,</a:t>
+            </a:r>
+          </a:p>
+          <a:p xmlns:a="http://schemas.openxmlformats.org/drawingml/2006/main">
+            <a:pPr>
+              <a:lnSpc>
+                <a:spcPct val="105000"/>
+              </a:lnSpc>
+              <a:spcAft>
+                <a:spcPts val="0"/>
+              </a:spcAft>
+              <a:buNone/>
+              <a:defRPr sz="1125"/>
+            </a:pPr>
+            <a:r>
+              <a:rPr sz="1125">
+                <a:solidFill>
+                  <a:srgbClr val="67869A"/>
+                </a:solidFill>
+                <a:latin typeface="Aptos Mono"/>
+                <a:ea typeface="Aptos Mono"/>
+                <a:cs typeface="Aptos Mono"/>
+              </a:rPr>
+              <a:t> 8  </a:t>
+            </a:r>
+            <a:r>
+              <a:rPr sz="1125">
+                <a:solidFill>
+                  <a:srgbClr val="E7F1F5"/>
+                </a:solidFill>
+                <a:latin typeface="Aptos Mono"/>
+                <a:ea typeface="Aptos Mono"/>
+                <a:cs typeface="Aptos Mono"/>
+              </a:rPr>
+              <a:t>    </a:t>
+            </a:r>
+            <a:r>
+              <a:rPr sz="1125">
+                <a:solidFill>
+                  <a:srgbClr val="F5C66B"/>
+                </a:solidFill>
+                <a:latin typeface="Aptos Mono"/>
+                <a:ea typeface="Aptos Mono"/>
+                <a:cs typeface="Aptos Mono"/>
+              </a:rPr>
+              <a:t>5</a:t>
+            </a:r>
+            <a:r>
+              <a:rPr sz="1125">
+                <a:solidFill>
+                  <a:srgbClr val="E7F1F5"/>
+                </a:solidFill>
+                <a:latin typeface="Aptos Mono"/>
+                <a:ea typeface="Aptos Mono"/>
+                <a:cs typeface="Aptos Mono"/>
+              </a:rPr>
+              <a:t>,</a:t>
+            </a:r>
+          </a:p>
+          <a:p xmlns:a="http://schemas.openxmlformats.org/drawingml/2006/main">
+            <a:pPr>
+              <a:lnSpc>
+                <a:spcPct val="105000"/>
+              </a:lnSpc>
+              <a:spcAft>
+                <a:spcPts val="0"/>
+              </a:spcAft>
+              <a:buNone/>
+              <a:defRPr sz="1125"/>
+            </a:pPr>
+            <a:r>
+              <a:rPr sz="1125">
+                <a:solidFill>
+                  <a:srgbClr val="67869A"/>
+                </a:solidFill>
+                <a:latin typeface="Aptos Mono"/>
+                <a:ea typeface="Aptos Mono"/>
+                <a:cs typeface="Aptos Mono"/>
+              </a:rPr>
+              <a:t> 9  </a:t>
+            </a:r>
+            <a:r>
+              <a:rPr sz="1125">
+                <a:solidFill>
+                  <a:srgbClr val="E7F1F5"/>
+                </a:solidFill>
+                <a:latin typeface="Aptos Mono"/>
+                <a:ea typeface="Aptos Mono"/>
+                <a:cs typeface="Aptos Mono"/>
+              </a:rPr>
+              <a:t>    </a:t>
+            </a:r>
+            <a:r>
+              <a:rPr sz="1125">
+                <a:solidFill>
+                  <a:srgbClr val="F5C66B"/>
+                </a:solidFill>
+                <a:latin typeface="Aptos Mono"/>
+                <a:ea typeface="Aptos Mono"/>
+                <a:cs typeface="Aptos Mono"/>
+              </a:rPr>
+              <a:t>3</a:t>
+            </a:r>
+            <a:r>
+              <a:rPr sz="1125">
+                <a:solidFill>
+                  <a:srgbClr val="E7F1F5"/>
+                </a:solidFill>
+                <a:latin typeface="Aptos Mono"/>
+                <a:ea typeface="Aptos Mono"/>
+                <a:cs typeface="Aptos Mono"/>
+              </a:rPr>
+              <a:t>,</a:t>
+            </a:r>
+          </a:p>
+          <a:p xmlns:a="http://schemas.openxmlformats.org/drawingml/2006/main">
+            <a:pPr>
+              <a:lnSpc>
+                <a:spcPct val="105000"/>
+              </a:lnSpc>
+              <a:spcAft>
+                <a:spcPts val="0"/>
+              </a:spcAft>
+              <a:buNone/>
+              <a:defRPr sz="1125"/>
+            </a:pPr>
+            <a:r>
+              <a:rPr sz="1125">
+                <a:solidFill>
+                  <a:srgbClr val="67869A"/>
+                </a:solidFill>
+                <a:latin typeface="Aptos Mono"/>
+                <a:ea typeface="Aptos Mono"/>
+                <a:cs typeface="Aptos Mono"/>
+              </a:rPr>
+              <a:t>10  </a:t>
+            </a:r>
+            <a:r>
+              <a:rPr sz="1125">
+                <a:solidFill>
+                  <a:srgbClr val="E7F1F5"/>
+                </a:solidFill>
+                <a:latin typeface="Aptos Mono"/>
+                <a:ea typeface="Aptos Mono"/>
+                <a:cs typeface="Aptos Mono"/>
+              </a:rPr>
+              <a:t>  );</a:t>
+            </a:r>
+          </a:p>
+          <a:p xmlns:a="http://schemas.openxmlformats.org/drawingml/2006/main">
+            <a:pPr>
+              <a:lnSpc>
+                <a:spcPct val="105000"/>
+              </a:lnSpc>
+              <a:spcAft>
+                <a:spcPts val="0"/>
+              </a:spcAft>
+              <a:buNone/>
+              <a:defRPr sz="1125"/>
+            </a:pPr>
+            <a:r>
+              <a:rPr sz="1125">
+                <a:solidFill>
+                  <a:srgbClr val="67869A"/>
+                </a:solidFill>
+                <a:latin typeface="Aptos Mono"/>
+                <a:ea typeface="Aptos Mono"/>
+                <a:cs typeface="Aptos Mono"/>
+              </a:rPr>
+              <a:t>11  </a:t>
+            </a:r>
+          </a:p>
+          <a:p xmlns:a="http://schemas.openxmlformats.org/drawingml/2006/main">
+            <a:pPr>
+              <a:lnSpc>
+                <a:spcPct val="105000"/>
+              </a:lnSpc>
+              <a:spcAft>
+                <a:spcPts val="0"/>
+              </a:spcAft>
+              <a:buNone/>
+              <a:defRPr sz="1125"/>
+            </a:pPr>
+            <a:r>
+              <a:rPr sz="1125">
+                <a:solidFill>
+                  <a:srgbClr val="67869A"/>
+                </a:solidFill>
+                <a:latin typeface="Aptos Mono"/>
+                <a:ea typeface="Aptos Mono"/>
+                <a:cs typeface="Aptos Mono"/>
+              </a:rPr>
+              <a:t>12  </a:t>
+            </a:r>
+            <a:r>
+              <a:rPr sz="1125">
+                <a:solidFill>
+                  <a:srgbClr val="E7F1F5"/>
+                </a:solidFill>
+                <a:latin typeface="Aptos Mono"/>
+                <a:ea typeface="Aptos Mono"/>
+                <a:cs typeface="Aptos Mono"/>
+              </a:rPr>
+              <a:t>  </a:t>
+            </a:r>
+            <a:r>
+              <a:rPr sz="1125">
+                <a:solidFill>
+                  <a:srgbClr val="78C7FF"/>
+                </a:solidFill>
+                <a:latin typeface="Aptos Mono"/>
+                <a:ea typeface="Aptos Mono"/>
+                <a:cs typeface="Aptos Mono"/>
+              </a:rPr>
+              <a:t>if</a:t>
+            </a:r>
+            <a:r>
+              <a:rPr sz="1125">
+                <a:solidFill>
+                  <a:srgbClr val="E7F1F5"/>
+                </a:solidFill>
+                <a:latin typeface="Aptos Mono"/>
+                <a:ea typeface="Aptos Mono"/>
+                <a:cs typeface="Aptos Mono"/>
+              </a:rPr>
+              <a:t> (</a:t>
+            </a:r>
+            <a:r>
+              <a:rPr sz="1125">
+                <a:solidFill>
+                  <a:srgbClr val="B4C9D8"/>
+                </a:solidFill>
+                <a:latin typeface="Aptos Mono"/>
+                <a:ea typeface="Aptos Mono"/>
+                <a:cs typeface="Aptos Mono"/>
+              </a:rPr>
+              <a:t>!</a:t>
+            </a:r>
+            <a:r>
+              <a:rPr sz="1125">
+                <a:solidFill>
+                  <a:srgbClr val="E7F1F5"/>
+                </a:solidFill>
+                <a:latin typeface="Aptos Mono"/>
+                <a:ea typeface="Aptos Mono"/>
+                <a:cs typeface="Aptos Mono"/>
+              </a:rPr>
+              <a:t>centered) {</a:t>
+            </a:r>
+          </a:p>
+          <a:p xmlns:a="http://schemas.openxmlformats.org/drawingml/2006/main">
+            <a:pPr>
+              <a:lnSpc>
+                <a:spcPct val="105000"/>
+              </a:lnSpc>
+              <a:spcAft>
+                <a:spcPts val="0"/>
+              </a:spcAft>
+              <a:buNone/>
+              <a:defRPr sz="1125"/>
+            </a:pPr>
+            <a:r>
+              <a:rPr sz="1125">
+                <a:solidFill>
+                  <a:srgbClr val="67869A"/>
+                </a:solidFill>
+                <a:latin typeface="Aptos Mono"/>
+                <a:ea typeface="Aptos Mono"/>
+                <a:cs typeface="Aptos Mono"/>
+              </a:rPr>
+              <a:t>13  </a:t>
+            </a:r>
+            <a:r>
+              <a:rPr sz="1125">
+                <a:solidFill>
+                  <a:srgbClr val="E7F1F5"/>
+                </a:solidFill>
+                <a:latin typeface="Aptos Mono"/>
+                <a:ea typeface="Aptos Mono"/>
+                <a:cs typeface="Aptos Mono"/>
+              </a:rPr>
+              <a:t>    console</a:t>
+            </a:r>
+            <a:r>
+              <a:rPr sz="1125">
+                <a:solidFill>
+                  <a:srgbClr val="B4C9D8"/>
+                </a:solidFill>
+                <a:latin typeface="Aptos Mono"/>
+                <a:ea typeface="Aptos Mono"/>
+                <a:cs typeface="Aptos Mono"/>
+              </a:rPr>
+              <a:t>.</a:t>
+            </a:r>
+            <a:r>
+              <a:rPr sz="1125">
+                <a:solidFill>
+                  <a:srgbClr val="55D6C2"/>
+                </a:solidFill>
+                <a:latin typeface="Aptos Mono"/>
+                <a:ea typeface="Aptos Mono"/>
+                <a:cs typeface="Aptos Mono"/>
+              </a:rPr>
+              <a:t>warn</a:t>
+            </a:r>
+            <a:r>
+              <a:rPr sz="1125">
+                <a:solidFill>
+                  <a:srgbClr val="E7F1F5"/>
+                </a:solidFill>
+                <a:latin typeface="Aptos Mono"/>
+                <a:ea typeface="Aptos Mono"/>
+                <a:cs typeface="Aptos Mono"/>
+              </a:rPr>
+              <a:t>(</a:t>
+            </a:r>
+            <a:r>
+              <a:rPr sz="1125">
+                <a:solidFill>
+                  <a:srgbClr val="A8E6A1"/>
+                </a:solidFill>
+                <a:latin typeface="Aptos Mono"/>
+                <a:ea typeface="Aptos Mono"/>
+                <a:cs typeface="Aptos Mono"/>
+              </a:rPr>
+              <a:t>"Tag 7 was not centered."</a:t>
+            </a:r>
+            <a:r>
+              <a:rPr sz="1125">
+                <a:solidFill>
+                  <a:srgbClr val="E7F1F5"/>
+                </a:solidFill>
+                <a:latin typeface="Aptos Mono"/>
+                <a:ea typeface="Aptos Mono"/>
+                <a:cs typeface="Aptos Mono"/>
+              </a:rPr>
+              <a:t>);</a:t>
+            </a:r>
+          </a:p>
+          <a:p xmlns:a="http://schemas.openxmlformats.org/drawingml/2006/main">
+            <a:pPr>
+              <a:lnSpc>
+                <a:spcPct val="105000"/>
+              </a:lnSpc>
+              <a:spcAft>
+                <a:spcPts val="0"/>
+              </a:spcAft>
+              <a:buNone/>
+              <a:defRPr sz="1125"/>
+            </a:pPr>
+            <a:r>
+              <a:rPr sz="1125">
+                <a:solidFill>
+                  <a:srgbClr val="67869A"/>
+                </a:solidFill>
+                <a:latin typeface="Aptos Mono"/>
+                <a:ea typeface="Aptos Mono"/>
+                <a:cs typeface="Aptos Mono"/>
+              </a:rPr>
+              <a:t>14  </a:t>
+            </a:r>
+            <a:r>
+              <a:rPr sz="1125">
+                <a:solidFill>
+                  <a:srgbClr val="E7F1F5"/>
+                </a:solidFill>
+                <a:latin typeface="Aptos Mono"/>
+                <a:ea typeface="Aptos Mono"/>
+                <a:cs typeface="Aptos Mono"/>
+              </a:rPr>
+              <a:t>  }</a:t>
+            </a:r>
+          </a:p>
+          <a:p xmlns:a="http://schemas.openxmlformats.org/drawingml/2006/main">
+            <a:pPr>
+              <a:lnSpc>
+                <a:spcPct val="105000"/>
+              </a:lnSpc>
+              <a:spcAft>
+                <a:spcPts val="0"/>
+              </a:spcAft>
+              <a:buNone/>
+              <a:defRPr sz="1125"/>
+            </a:pPr>
+            <a:r>
+              <a:rPr sz="1125">
+                <a:solidFill>
+                  <a:srgbClr val="67869A"/>
+                </a:solidFill>
+                <a:latin typeface="Aptos Mono"/>
+                <a:ea typeface="Aptos Mono"/>
+                <a:cs typeface="Aptos Mono"/>
+              </a:rPr>
+              <a:t>15  </a:t>
+            </a:r>
+            <a:r>
+              <a:rPr sz="1125">
+                <a:solidFill>
+                  <a:srgbClr val="E7F1F5"/>
+                </a:solidFill>
+                <a:latin typeface="Aptos Mono"/>
+                <a:ea typeface="Aptos Mono"/>
+                <a:cs typeface="Aptos Mono"/>
+              </a:rPr>
+              <a:t>} </a:t>
+            </a:r>
+            <a:r>
+              <a:rPr sz="1125">
+                <a:solidFill>
+                  <a:srgbClr val="78C7FF"/>
+                </a:solidFill>
+                <a:latin typeface="Aptos Mono"/>
+                <a:ea typeface="Aptos Mono"/>
+                <a:cs typeface="Aptos Mono"/>
+              </a:rPr>
+              <a:t>finally</a:t>
+            </a:r>
+            <a:r>
+              <a:rPr sz="1125">
+                <a:solidFill>
+                  <a:srgbClr val="E7F1F5"/>
+                </a:solidFill>
+                <a:latin typeface="Aptos Mono"/>
+                <a:ea typeface="Aptos Mono"/>
+                <a:cs typeface="Aptos Mono"/>
+              </a:rPr>
+              <a:t> {</a:t>
+            </a:r>
+          </a:p>
+          <a:p xmlns:a="http://schemas.openxmlformats.org/drawingml/2006/main">
+            <a:pPr>
+              <a:lnSpc>
+                <a:spcPct val="105000"/>
+              </a:lnSpc>
+              <a:spcAft>
+                <a:spcPts val="0"/>
+              </a:spcAft>
+              <a:buNone/>
+              <a:defRPr sz="1125"/>
+            </a:pPr>
+            <a:r>
+              <a:rPr sz="1125">
+                <a:solidFill>
+                  <a:srgbClr val="67869A"/>
+                </a:solidFill>
+                <a:latin typeface="Aptos Mono"/>
+                <a:ea typeface="Aptos Mono"/>
+                <a:cs typeface="Aptos Mono"/>
+              </a:rPr>
+              <a:t>16  </a:t>
+            </a:r>
+            <a:r>
+              <a:rPr sz="1125">
+                <a:solidFill>
+                  <a:srgbClr val="E7F1F5"/>
+                </a:solidFill>
+                <a:latin typeface="Aptos Mono"/>
+                <a:ea typeface="Aptos Mono"/>
+                <a:cs typeface="Aptos Mono"/>
+              </a:rPr>
+              <a:t>  </a:t>
+            </a:r>
+            <a:r>
+              <a:rPr sz="1125">
+                <a:solidFill>
+                  <a:srgbClr val="78C7FF"/>
+                </a:solidFill>
+                <a:latin typeface="Aptos Mono"/>
+                <a:ea typeface="Aptos Mono"/>
+                <a:cs typeface="Aptos Mono"/>
+              </a:rPr>
+              <a:t>await</a:t>
+            </a:r>
+            <a:r>
+              <a:rPr sz="1125">
+                <a:solidFill>
+                  <a:srgbClr val="E7F1F5"/>
+                </a:solidFill>
+                <a:latin typeface="Aptos Mono"/>
+                <a:ea typeface="Aptos Mono"/>
+                <a:cs typeface="Aptos Mono"/>
+              </a:rPr>
+              <a:t> drone</a:t>
+            </a:r>
+            <a:r>
+              <a:rPr sz="1125">
+                <a:solidFill>
+                  <a:srgbClr val="B4C9D8"/>
+                </a:solidFill>
+                <a:latin typeface="Aptos Mono"/>
+                <a:ea typeface="Aptos Mono"/>
+                <a:cs typeface="Aptos Mono"/>
+              </a:rPr>
+              <a:t>.</a:t>
+            </a:r>
+            <a:r>
+              <a:rPr sz="1125">
+                <a:solidFill>
+                  <a:srgbClr val="55D6C2"/>
+                </a:solidFill>
+                <a:latin typeface="Aptos Mono"/>
+                <a:ea typeface="Aptos Mono"/>
+                <a:cs typeface="Aptos Mono"/>
+              </a:rPr>
+              <a:t>land</a:t>
+            </a:r>
+            <a:r>
+              <a:rPr sz="1125">
+                <a:solidFill>
+                  <a:srgbClr val="E7F1F5"/>
+                </a:solidFill>
+                <a:latin typeface="Aptos Mono"/>
+                <a:ea typeface="Aptos Mono"/>
+                <a:cs typeface="Aptos Mono"/>
+              </a:rPr>
+              <a:t>();</a:t>
+            </a:r>
+          </a:p>
+          <a:p xmlns:a="http://schemas.openxmlformats.org/drawingml/2006/main">
+            <a:pPr>
+              <a:lnSpc>
+                <a:spcPct val="105000"/>
+              </a:lnSpc>
+              <a:spcAft>
+                <a:spcPts val="0"/>
+              </a:spcAft>
+              <a:buNone/>
+              <a:defRPr sz="1125"/>
+            </a:pPr>
+            <a:r>
+              <a:rPr sz="1125">
+                <a:solidFill>
+                  <a:srgbClr val="67869A"/>
+                </a:solidFill>
+                <a:latin typeface="Aptos Mono"/>
+                <a:ea typeface="Aptos Mono"/>
+                <a:cs typeface="Aptos Mono"/>
+              </a:rPr>
+              <a:t>17  </a:t>
+            </a:r>
+            <a:r>
+              <a:rPr sz="1125">
+                <a:solidFill>
+                  <a:srgbClr val="E7F1F5"/>
+                </a:solidFill>
+                <a:latin typeface="Aptos Mono"/>
+                <a:ea typeface="Aptos Mono"/>
+                <a:cs typeface="Aptos Mono"/>
+              </a:rPr>
+              <a:t>}</a:t>
+            </a:r>
+          </a:p>
+        </p:txBody>
+      </p:sp>
+      <p:sp>
+        <p:nvSpPr>
+          <p:cNvPr id="17" name="">
+            <a:extLst xmlns:a="http://schemas.openxmlformats.org/drawingml/2006/main">
+              <a:ext uri="{FF2B5EF4-FFF2-40B4-BE49-F238E27FC236}">
+                <a16:creationId xmlns:a16="http://schemas.microsoft.com/office/drawing/2014/main" id="{3DFC430C-E23F-48E5-85AF-57F9BF92D5D4}"/>
+              </a:ext>
+            </a:extLst>
+          </p:cNvPr>
+          <p:cNvSpPr>
+            <a:spLocks xmlns:a="http://schemas.openxmlformats.org/drawingml/2006/main" noGrp="1"/>
+          </p:cNvSpPr>
+          <p:nvPr/>
+        </p:nvSpPr>
+        <p:spPr>
+          <a:xfrm xmlns:a="http://schemas.openxmlformats.org/drawingml/2006/main">
+            <a:off x="6191250" y="1409700"/>
+            <a:ext cx="5391150" cy="2686050"/>
+          </a:xfrm>
+          <a:prstGeom xmlns:a="http://schemas.openxmlformats.org/drawingml/2006/main" prst="roundRect">
+            <a:avLst>
+              <a:gd name="adj" fmla="val 4255"/>
             </a:avLst>
           </a:prstGeom>
           <a:solidFill xmlns:a="http://schemas.openxmlformats.org/drawingml/2006/main">
@@ -8007,7 +9492,7 @@
           </a:solidFill>
           <a:ln xmlns:a="http://schemas.openxmlformats.org/drawingml/2006/main" w="14288">
             <a:solidFill>
-              <a:srgbClr val="B7CBD3"/>
+              <a:srgbClr val="C3D2D9"/>
             </a:solidFill>
             <a:prstDash val="solid"/>
           </a:ln>
@@ -8015,56 +9500,186 @@
       </p:sp>
       <p:sp>
         <p:nvSpPr>
-          <p:cNvPr id="20" name="">
-            <a:extLst xmlns:a="http://schemas.openxmlformats.org/drawingml/2006/main">
-              <a:ext uri="{FF2B5EF4-FFF2-40B4-BE49-F238E27FC236}">
-                <a16:creationId xmlns:a16="http://schemas.microsoft.com/office/drawing/2014/main" id="{249CD428-8FA8-4CEA-BDC9-42BF63E71744}"/>
-              </a:ext>
-            </a:extLst>
-          </p:cNvPr>
-          <p:cNvSpPr>
-            <a:spLocks xmlns:a="http://schemas.openxmlformats.org/drawingml/2006/main" noGrp="1"/>
-          </p:cNvSpPr>
-          <p:nvPr/>
-        </p:nvSpPr>
-        <p:spPr>
-          <a:xfrm xmlns:a="http://schemas.openxmlformats.org/drawingml/2006/main">
-            <a:off x="838200" y="2105025"/>
-            <a:ext cx="457200" cy="304800"/>
-          </a:xfrm>
-          <a:prstGeom xmlns:a="http://schemas.openxmlformats.org/drawingml/2006/main" prst="roundRect">
-            <a:avLst>
-              <a:gd name="adj" fmla="val 50000"/>
-            </a:avLst>
+          <p:cNvPr id="18" name="">
+            <a:extLst xmlns:a="http://schemas.openxmlformats.org/drawingml/2006/main">
+              <a:ext uri="{FF2B5EF4-FFF2-40B4-BE49-F238E27FC236}">
+                <a16:creationId xmlns:a16="http://schemas.microsoft.com/office/drawing/2014/main" id="{F478820A-DBF0-4B43-A3C2-316D5A387409}"/>
+              </a:ext>
+            </a:extLst>
+          </p:cNvPr>
+          <p:cNvSpPr>
+            <a:spLocks xmlns:a="http://schemas.openxmlformats.org/drawingml/2006/main" noGrp="1"/>
+          </p:cNvSpPr>
+          <p:nvPr/>
+        </p:nvSpPr>
+        <p:spPr>
+          <a:xfrm xmlns:a="http://schemas.openxmlformats.org/drawingml/2006/main">
+            <a:off x="6191250" y="1409700"/>
+            <a:ext cx="66675" cy="2686050"/>
+          </a:xfrm>
+          <a:prstGeom xmlns:a="http://schemas.openxmlformats.org/drawingml/2006/main" prst="rect">
+            <a:avLst/>
           </a:prstGeom>
           <a:solidFill xmlns:a="http://schemas.openxmlformats.org/drawingml/2006/main">
             <a:srgbClr val="008C95"/>
           </a:solidFill>
-          <a:ln xmlns:a="http://schemas.openxmlformats.org/drawingml/2006/main" w="14288">
+          <a:ln xmlns:a="http://schemas.openxmlformats.org/drawingml/2006/main" w="0">
             <a:solidFill>
               <a:srgbClr val="008C95"/>
             </a:solidFill>
             <a:prstDash val="solid"/>
           </a:ln>
         </p:spPr>
-        <p:txBody>
-          <a:bodyPr xmlns:a="http://schemas.openxmlformats.org/drawingml/2006/main"/>
-          <a:lstStyle xmlns:a="http://schemas.openxmlformats.org/drawingml/2006/main"/>
-          <a:p xmlns:a="http://schemas.openxmlformats.org/drawingml/2006/main">
-            <a:pPr algn="ctr">
-              <a:defRPr sz="1050" b="1">
-                <a:solidFill>
-                  <a:srgbClr val="FFFFFF"/>
+      </p:sp>
+      <p:sp>
+        <p:nvSpPr>
+          <p:cNvPr id="19" name="">
+            <a:extLst xmlns:a="http://schemas.openxmlformats.org/drawingml/2006/main">
+              <a:ext uri="{FF2B5EF4-FFF2-40B4-BE49-F238E27FC236}">
+                <a16:creationId xmlns:a16="http://schemas.microsoft.com/office/drawing/2014/main" id="{998AE7F8-6B4F-4966-A823-DA030648E912}"/>
+              </a:ext>
+            </a:extLst>
+          </p:cNvPr>
+          <p:cNvSpPr>
+            <a:spLocks xmlns:a="http://schemas.openxmlformats.org/drawingml/2006/main" noGrp="1"/>
+          </p:cNvSpPr>
+          <p:nvPr/>
+        </p:nvSpPr>
+        <p:spPr>
+          <a:xfrm xmlns:a="http://schemas.openxmlformats.org/drawingml/2006/main">
+            <a:off x="6400800" y="1543050"/>
+            <a:ext cx="4972050" cy="190500"/>
+          </a:xfrm>
+          <a:prstGeom xmlns:a="http://schemas.openxmlformats.org/drawingml/2006/main" prst="rect">
+            <a:avLst/>
+          </a:prstGeom>
+          <a:noFill xmlns:a="http://schemas.openxmlformats.org/drawingml/2006/main"/>
+          <a:ln xmlns:a="http://schemas.openxmlformats.org/drawingml/2006/main" w="0">
+            <a:noFill/>
+            <a:prstDash val="solid"/>
+          </a:ln>
+        </p:spPr>
+        <p:txBody>
+          <a:bodyPr xmlns:a="http://schemas.openxmlformats.org/drawingml/2006/main"/>
+          <a:lstStyle xmlns:a="http://schemas.openxmlformats.org/drawingml/2006/main"/>
+          <a:p xmlns:a="http://schemas.openxmlformats.org/drawingml/2006/main">
+            <a:pPr>
+              <a:defRPr sz="975" b="1">
+                <a:solidFill>
+                  <a:srgbClr val="008C95"/>
                 </a:solidFill>
               </a:defRPr>
             </a:pPr>
             <a:r>
-              <a:rPr sz="1050" b="1">
-                <a:solidFill>
-                  <a:srgbClr val="FFFFFF"/>
-                </a:solidFill>
-              </a:rPr>
-              <a:t>01</a:t>
+              <a:rPr sz="975" b="1">
+                <a:solidFill>
+                  <a:srgbClr val="008C95"/>
+                </a:solidFill>
+              </a:rPr>
+              <a:t>CENTER AND ALIGN</a:t>
+            </a:r>
+          </a:p>
+        </p:txBody>
+      </p:sp>
+      <p:sp>
+        <p:nvSpPr>
+          <p:cNvPr id="20" name="">
+            <a:extLst xmlns:a="http://schemas.openxmlformats.org/drawingml/2006/main">
+              <a:ext uri="{FF2B5EF4-FFF2-40B4-BE49-F238E27FC236}">
+                <a16:creationId xmlns:a16="http://schemas.microsoft.com/office/drawing/2014/main" id="{AFC04CAB-1AAD-430C-B44A-9CD8EF93DEA0}"/>
+              </a:ext>
+            </a:extLst>
+          </p:cNvPr>
+          <p:cNvSpPr>
+            <a:spLocks xmlns:a="http://schemas.openxmlformats.org/drawingml/2006/main" noGrp="1"/>
+          </p:cNvSpPr>
+          <p:nvPr/>
+        </p:nvSpPr>
+        <p:spPr>
+          <a:xfrm xmlns:a="http://schemas.openxmlformats.org/drawingml/2006/main">
+            <a:off x="6400800" y="1809750"/>
+            <a:ext cx="4972050" cy="457200"/>
+          </a:xfrm>
+          <a:prstGeom xmlns:a="http://schemas.openxmlformats.org/drawingml/2006/main" prst="rect">
+            <a:avLst/>
+          </a:prstGeom>
+          <a:solidFill xmlns:a="http://schemas.openxmlformats.org/drawingml/2006/main">
+            <a:srgbClr val="001B3A"/>
+          </a:solidFill>
+          <a:ln xmlns:a="http://schemas.openxmlformats.org/drawingml/2006/main" w="0">
+            <a:solidFill>
+              <a:srgbClr val="001B3A"/>
+            </a:solidFill>
+            <a:prstDash val="solid"/>
+          </a:ln>
+        </p:spPr>
+        <p:txBody>
+          <a:bodyPr xmlns:a="http://schemas.openxmlformats.org/drawingml/2006/main" lIns="76200" tIns="57150" rIns="76200" bIns="38100">
+            <a:noAutofit/>
+          </a:bodyPr>
+          <a:lstStyle xmlns:a="http://schemas.openxmlformats.org/drawingml/2006/main"/>
+          <a:p xmlns:a="http://schemas.openxmlformats.org/drawingml/2006/main">
+            <a:pPr>
+              <a:spcAft>
+                <a:spcPts val="0"/>
+              </a:spcAft>
+              <a:defRPr sz="975"/>
+            </a:pPr>
+            <a:r>
+              <a:rPr sz="975">
+                <a:solidFill>
+                  <a:srgbClr val="78C7FF"/>
+                </a:solidFill>
+                <a:latin typeface="Aptos Mono"/>
+                <a:ea typeface="Aptos Mono"/>
+                <a:cs typeface="Aptos Mono"/>
+              </a:rPr>
+              <a:t>await</a:t>
+            </a:r>
+            <a:r>
+              <a:rPr sz="975">
+                <a:solidFill>
+                  <a:srgbClr val="E7F1F5"/>
+                </a:solidFill>
+                <a:latin typeface="Aptos Mono"/>
+                <a:ea typeface="Aptos Mono"/>
+                <a:cs typeface="Aptos Mono"/>
+              </a:rPr>
+              <a:t> vision</a:t>
+            </a:r>
+            <a:r>
+              <a:rPr sz="975">
+                <a:solidFill>
+                  <a:srgbClr val="B4C9D8"/>
+                </a:solidFill>
+                <a:latin typeface="Aptos Mono"/>
+                <a:ea typeface="Aptos Mono"/>
+                <a:cs typeface="Aptos Mono"/>
+              </a:rPr>
+              <a:t>.</a:t>
+            </a:r>
+            <a:r>
+              <a:rPr sz="975">
+                <a:solidFill>
+                  <a:srgbClr val="55D6C2"/>
+                </a:solidFill>
+                <a:latin typeface="Aptos Mono"/>
+                <a:ea typeface="Aptos Mono"/>
+                <a:cs typeface="Aptos Mono"/>
+              </a:rPr>
+              <a:t>centerOnAprilTag</a:t>
+            </a:r>
+            <a:r>
+              <a:rPr sz="975">
+                <a:solidFill>
+                  <a:srgbClr val="E7F1F5"/>
+                </a:solidFill>
+                <a:latin typeface="Aptos Mono"/>
+                <a:ea typeface="Aptos Mono"/>
+                <a:cs typeface="Aptos Mono"/>
+              </a:rPr>
+              <a:t>(
+  drone, id, power, centerSlack, angleSlack, lostSearches)</a:t>
             </a:r>
           </a:p>
         </p:txBody>
@@ -8074,69 +9689,19 @@
           <p:cNvPr id="21" name="">
             <a:extLst xmlns:a="http://schemas.openxmlformats.org/drawingml/2006/main">
               <a:ext uri="{FF2B5EF4-FFF2-40B4-BE49-F238E27FC236}">
-                <a16:creationId xmlns:a16="http://schemas.microsoft.com/office/drawing/2014/main" id="{C9AFCFDA-F529-4BE7-AE72-C3D713FF7E67}"/>
-              </a:ext>
-            </a:extLst>
-          </p:cNvPr>
-          <p:cNvSpPr>
-            <a:spLocks xmlns:a="http://schemas.openxmlformats.org/drawingml/2006/main" noGrp="1"/>
-          </p:cNvSpPr>
-          <p:nvPr/>
-        </p:nvSpPr>
-        <p:spPr>
-          <a:xfrm xmlns:a="http://schemas.openxmlformats.org/drawingml/2006/main">
-            <a:off x="838200" y="2552700"/>
-            <a:ext cx="1645920" cy="314325"/>
-          </a:xfrm>
-          <a:prstGeom xmlns:a="http://schemas.openxmlformats.org/drawingml/2006/main" prst="rect">
-            <a:avLst/>
-          </a:prstGeom>
-          <a:noFill xmlns:a="http://schemas.openxmlformats.org/drawingml/2006/main"/>
-          <a:ln xmlns:a="http://schemas.openxmlformats.org/drawingml/2006/main" w="0">
-            <a:noFill/>
-            <a:prstDash val="solid"/>
-          </a:ln>
-        </p:spPr>
-        <p:txBody>
-          <a:bodyPr xmlns:a="http://schemas.openxmlformats.org/drawingml/2006/main"/>
-          <a:lstStyle xmlns:a="http://schemas.openxmlformats.org/drawingml/2006/main"/>
-          <a:p xmlns:a="http://schemas.openxmlformats.org/drawingml/2006/main">
-            <a:pPr>
-              <a:defRPr sz="1500" b="1">
-                <a:solidFill>
-                  <a:srgbClr val="001B3A"/>
-                </a:solidFill>
-              </a:defRPr>
-            </a:pPr>
-            <a:r>
-              <a:rPr sz="1500" b="1">
-                <a:solidFill>
-                  <a:srgbClr val="001B3A"/>
-                </a:solidFill>
-              </a:rPr>
-              <a:t>Generate</a:t>
-            </a:r>
-          </a:p>
-        </p:txBody>
-      </p:sp>
-      <p:sp>
-        <p:nvSpPr>
-          <p:cNvPr id="22" name="">
-            <a:extLst xmlns:a="http://schemas.openxmlformats.org/drawingml/2006/main">
-              <a:ext uri="{FF2B5EF4-FFF2-40B4-BE49-F238E27FC236}">
-                <a16:creationId xmlns:a16="http://schemas.microsoft.com/office/drawing/2014/main" id="{6D49BC6C-FE9C-49F4-A33A-DCB40CADE359}"/>
-              </a:ext>
-            </a:extLst>
-          </p:cNvPr>
-          <p:cNvSpPr>
-            <a:spLocks xmlns:a="http://schemas.openxmlformats.org/drawingml/2006/main" noGrp="1"/>
-          </p:cNvSpPr>
-          <p:nvPr/>
-        </p:nvSpPr>
-        <p:spPr>
-          <a:xfrm xmlns:a="http://schemas.openxmlformats.org/drawingml/2006/main">
-            <a:off x="838200" y="2943225"/>
-            <a:ext cx="1645920" cy="457200"/>
+                <a16:creationId xmlns:a16="http://schemas.microsoft.com/office/drawing/2014/main" id="{9F8C041C-A629-46FF-8174-6FCCB90D5F07}"/>
+              </a:ext>
+            </a:extLst>
+          </p:cNvPr>
+          <p:cNvSpPr>
+            <a:spLocks xmlns:a="http://schemas.openxmlformats.org/drawingml/2006/main" noGrp="1"/>
+          </p:cNvSpPr>
+          <p:nvPr/>
+        </p:nvSpPr>
+        <p:spPr>
+          <a:xfrm xmlns:a="http://schemas.openxmlformats.org/drawingml/2006/main">
+            <a:off x="6419850" y="2400300"/>
+            <a:ext cx="4933950" cy="1562100"/>
           </a:xfrm>
           <a:prstGeom xmlns:a="http://schemas.openxmlformats.org/drawingml/2006/main" prst="rect">
             <a:avLst/>
@@ -8154,43 +9719,162 @@
             <a:pPr>
               <a:defRPr sz="1050">
                 <a:solidFill>
-                  <a:srgbClr val="536A7B"/>
+                  <a:srgbClr val="0D2843"/>
                 </a:solidFill>
               </a:defRPr>
             </a:pPr>
             <a:r>
               <a:rPr sz="1050">
                 <a:solidFill>
-                  <a:srgbClr val="536A7B"/>
-                </a:solidFill>
-              </a:rPr>
-              <a:t>Choose ID 0–586 and export the printable PDF.</a:t>
-            </a:r>
-          </a:p>
-        </p:txBody>
-      </p:sp>
-      <p:sp>
-        <p:nvSpPr>
-          <p:cNvPr id="23" name="">
-            <a:extLst xmlns:a="http://schemas.openxmlformats.org/drawingml/2006/main">
-              <a:ext uri="{FF2B5EF4-FFF2-40B4-BE49-F238E27FC236}">
-                <a16:creationId xmlns:a16="http://schemas.microsoft.com/office/drawing/2014/main" id="{E3EF45B3-FA42-49FA-9B2D-6EE722B36F96}"/>
-              </a:ext>
-            </a:extLst>
-          </p:cNvPr>
-          <p:cNvSpPr>
-            <a:spLocks xmlns:a="http://schemas.openxmlformats.org/drawingml/2006/main" noGrp="1"/>
-          </p:cNvSpPr>
-          <p:nvPr/>
-        </p:nvSpPr>
-        <p:spPr>
-          <a:xfrm xmlns:a="http://schemas.openxmlformats.org/drawingml/2006/main">
-            <a:off x="2884170" y="1952625"/>
-            <a:ext cx="1988820" cy="1619250"/>
+                  <a:srgbClr val="0D2843"/>
+                </a:solidFill>
+              </a:rPr>
+              <a:t>drone — DroneController used for corrective motion</a:t>
+            </a:r>
+          </a:p>
+          <a:p xmlns:a="http://schemas.openxmlformats.org/drawingml/2006/main">
+            <a:pPr>
+              <a:defRPr sz="1050">
+                <a:solidFill>
+                  <a:srgbClr val="0D2843"/>
+                </a:solidFill>
+              </a:defRPr>
+            </a:pPr>
+            <a:r>
+              <a:rPr sz="1050">
+                <a:solidFill>
+                  <a:srgbClr val="0D2843"/>
+                </a:solidFill>
+              </a:rPr>
+              <a:t>id — 0…586 or "any"; default "any"</a:t>
+            </a:r>
+          </a:p>
+          <a:p xmlns:a="http://schemas.openxmlformats.org/drawingml/2006/main">
+            <a:pPr>
+              <a:defRPr sz="1050">
+                <a:solidFill>
+                  <a:srgbClr val="0D2843"/>
+                </a:solidFill>
+              </a:defRPr>
+            </a:pPr>
+            <a:r>
+              <a:rPr sz="1050">
+                <a:solidFill>
+                  <a:srgbClr val="0D2843"/>
+                </a:solidFill>
+              </a:rPr>
+              <a:t>power — translation 0…100%; default 10</a:t>
+            </a:r>
+          </a:p>
+          <a:p xmlns:a="http://schemas.openxmlformats.org/drawingml/2006/main">
+            <a:pPr>
+              <a:defRPr sz="1050">
+                <a:solidFill>
+                  <a:srgbClr val="0D2843"/>
+                </a:solidFill>
+              </a:defRPr>
+            </a:pPr>
+            <a:r>
+              <a:rPr sz="1050">
+                <a:solidFill>
+                  <a:srgbClr val="0D2843"/>
+                </a:solidFill>
+              </a:rPr>
+              <a:t>centerSlack — 1…35% of frame; default 5</a:t>
+            </a:r>
+          </a:p>
+          <a:p xmlns:a="http://schemas.openxmlformats.org/drawingml/2006/main">
+            <a:pPr>
+              <a:defRPr sz="1050">
+                <a:solidFill>
+                  <a:srgbClr val="0D2843"/>
+                </a:solidFill>
+              </a:defRPr>
+            </a:pPr>
+            <a:r>
+              <a:rPr sz="1050">
+                <a:solidFill>
+                  <a:srgbClr val="0D2843"/>
+                </a:solidFill>
+              </a:rPr>
+              <a:t>angleSlack — 1…45 degrees; default 5</a:t>
+            </a:r>
+          </a:p>
+          <a:p xmlns:a="http://schemas.openxmlformats.org/drawingml/2006/main">
+            <a:pPr>
+              <a:defRPr sz="1050">
+                <a:solidFill>
+                  <a:srgbClr val="0D2843"/>
+                </a:solidFill>
+              </a:defRPr>
+            </a:pPr>
+            <a:r>
+              <a:rPr sz="1050">
+                <a:solidFill>
+                  <a:srgbClr val="0D2843"/>
+                </a:solidFill>
+              </a:rPr>
+              <a:t>lostSearches — 1…20 scans; default 3</a:t>
+            </a:r>
+          </a:p>
+          <a:p xmlns:a="http://schemas.openxmlformats.org/drawingml/2006/main">
+            <a:pPr>
+              <a:defRPr sz="1050">
+                <a:solidFill>
+                  <a:srgbClr val="0D2843"/>
+                </a:solidFill>
+              </a:defRPr>
+            </a:pPr>
+            <a:r>
+              <a:rPr sz="1050">
+                <a:solidFill>
+                  <a:srgbClr val="0D2843"/>
+                </a:solidFill>
+              </a:rPr>
+              <a:t>returns — Promise&lt;boolean&gt;; also has a 30 s timeout</a:t>
+            </a:r>
+          </a:p>
+          <a:p xmlns:a="http://schemas.openxmlformats.org/drawingml/2006/main">
+            <a:pPr>
+              <a:defRPr sz="1050">
+                <a:solidFill>
+                  <a:srgbClr val="0D2843"/>
+                </a:solidFill>
+              </a:defRPr>
+            </a:pPr>
+            <a:r>
+              <a:rPr sz="1050">
+                <a:solidFill>
+                  <a:srgbClr val="0D2843"/>
+                </a:solidFill>
+              </a:rPr>
+              <a:t>does not — control altitude or land the aircraft</a:t>
+            </a:r>
+          </a:p>
+        </p:txBody>
+      </p:sp>
+      <p:sp>
+        <p:nvSpPr>
+          <p:cNvPr id="22" name="">
+            <a:extLst xmlns:a="http://schemas.openxmlformats.org/drawingml/2006/main">
+              <a:ext uri="{FF2B5EF4-FFF2-40B4-BE49-F238E27FC236}">
+                <a16:creationId xmlns:a16="http://schemas.microsoft.com/office/drawing/2014/main" id="{76A87D30-F18E-4D63-8A1E-130D6E0D3CB4}"/>
+              </a:ext>
+            </a:extLst>
+          </p:cNvPr>
+          <p:cNvSpPr>
+            <a:spLocks xmlns:a="http://schemas.openxmlformats.org/drawingml/2006/main" noGrp="1"/>
+          </p:cNvSpPr>
+          <p:nvPr/>
+        </p:nvSpPr>
+        <p:spPr>
+          <a:xfrm xmlns:a="http://schemas.openxmlformats.org/drawingml/2006/main">
+            <a:off x="6191250" y="4267200"/>
+            <a:ext cx="5391150" cy="933450"/>
           </a:xfrm>
           <a:prstGeom xmlns:a="http://schemas.openxmlformats.org/drawingml/2006/main" prst="roundRect">
             <a:avLst>
-              <a:gd name="adj" fmla="val 7059"/>
+              <a:gd name="adj" fmla="val 12245"/>
             </a:avLst>
           </a:prstGeom>
           <a:solidFill xmlns:a="http://schemas.openxmlformats.org/drawingml/2006/main">
@@ -8198,7 +9882,7 @@
           </a:solidFill>
           <a:ln xmlns:a="http://schemas.openxmlformats.org/drawingml/2006/main" w="14288">
             <a:solidFill>
-              <a:srgbClr val="B7CBD3"/>
+              <a:srgbClr val="C3D2D9"/>
             </a:solidFill>
             <a:prstDash val="solid"/>
           </a:ln>
@@ -8206,182 +9890,278 @@
       </p:sp>
       <p:sp>
         <p:nvSpPr>
+          <p:cNvPr id="23" name="">
+            <a:extLst xmlns:a="http://schemas.openxmlformats.org/drawingml/2006/main">
+              <a:ext uri="{FF2B5EF4-FFF2-40B4-BE49-F238E27FC236}">
+                <a16:creationId xmlns:a16="http://schemas.microsoft.com/office/drawing/2014/main" id="{EC79EA68-D469-4B43-8702-164E15B0ABA0}"/>
+              </a:ext>
+            </a:extLst>
+          </p:cNvPr>
+          <p:cNvSpPr>
+            <a:spLocks xmlns:a="http://schemas.openxmlformats.org/drawingml/2006/main" noGrp="1"/>
+          </p:cNvSpPr>
+          <p:nvPr/>
+        </p:nvSpPr>
+        <p:spPr>
+          <a:xfrm xmlns:a="http://schemas.openxmlformats.org/drawingml/2006/main">
+            <a:off x="6191250" y="4267200"/>
+            <a:ext cx="66675" cy="933450"/>
+          </a:xfrm>
+          <a:prstGeom xmlns:a="http://schemas.openxmlformats.org/drawingml/2006/main" prst="rect">
+            <a:avLst/>
+          </a:prstGeom>
+          <a:solidFill xmlns:a="http://schemas.openxmlformats.org/drawingml/2006/main">
+            <a:srgbClr val="C9A227"/>
+          </a:solidFill>
+          <a:ln xmlns:a="http://schemas.openxmlformats.org/drawingml/2006/main" w="0">
+            <a:solidFill>
+              <a:srgbClr val="C9A227"/>
+            </a:solidFill>
+            <a:prstDash val="solid"/>
+          </a:ln>
+        </p:spPr>
+      </p:sp>
+      <p:sp>
+        <p:nvSpPr>
           <p:cNvPr id="24" name="">
             <a:extLst xmlns:a="http://schemas.openxmlformats.org/drawingml/2006/main">
               <a:ext uri="{FF2B5EF4-FFF2-40B4-BE49-F238E27FC236}">
-                <a16:creationId xmlns:a16="http://schemas.microsoft.com/office/drawing/2014/main" id="{FB5285DC-7525-4EB6-B053-319DFDB115D7}"/>
-              </a:ext>
-            </a:extLst>
-          </p:cNvPr>
-          <p:cNvSpPr>
-            <a:spLocks xmlns:a="http://schemas.openxmlformats.org/drawingml/2006/main" noGrp="1"/>
-          </p:cNvSpPr>
-          <p:nvPr/>
-        </p:nvSpPr>
-        <p:spPr>
-          <a:xfrm xmlns:a="http://schemas.openxmlformats.org/drawingml/2006/main">
-            <a:off x="3055620" y="2105025"/>
-            <a:ext cx="457200" cy="304800"/>
+                <a16:creationId xmlns:a16="http://schemas.microsoft.com/office/drawing/2014/main" id="{BE47D21E-4F5D-4CB1-A978-8122493D6F5C}"/>
+              </a:ext>
+            </a:extLst>
+          </p:cNvPr>
+          <p:cNvSpPr>
+            <a:spLocks xmlns:a="http://schemas.openxmlformats.org/drawingml/2006/main" noGrp="1"/>
+          </p:cNvSpPr>
+          <p:nvPr/>
+        </p:nvSpPr>
+        <p:spPr>
+          <a:xfrm xmlns:a="http://schemas.openxmlformats.org/drawingml/2006/main">
+            <a:off x="6400800" y="4352925"/>
+            <a:ext cx="4972050" cy="161925"/>
+          </a:xfrm>
+          <a:prstGeom xmlns:a="http://schemas.openxmlformats.org/drawingml/2006/main" prst="rect">
+            <a:avLst/>
+          </a:prstGeom>
+          <a:noFill xmlns:a="http://schemas.openxmlformats.org/drawingml/2006/main"/>
+          <a:ln xmlns:a="http://schemas.openxmlformats.org/drawingml/2006/main" w="0">
+            <a:noFill/>
+            <a:prstDash val="solid"/>
+          </a:ln>
+        </p:spPr>
+        <p:txBody>
+          <a:bodyPr xmlns:a="http://schemas.openxmlformats.org/drawingml/2006/main"/>
+          <a:lstStyle xmlns:a="http://schemas.openxmlformats.org/drawingml/2006/main"/>
+          <a:p xmlns:a="http://schemas.openxmlformats.org/drawingml/2006/main">
+            <a:pPr>
+              <a:defRPr sz="900" b="1">
+                <a:solidFill>
+                  <a:srgbClr val="001B3A"/>
+                </a:solidFill>
+              </a:defRPr>
+            </a:pPr>
+            <a:r>
+              <a:rPr sz="900" b="1">
+                <a:solidFill>
+                  <a:srgbClr val="001B3A"/>
+                </a:solidFill>
+              </a:rPr>
+              <a:t>SCAN ALL TAGS</a:t>
+            </a:r>
+          </a:p>
+        </p:txBody>
+      </p:sp>
+      <p:sp>
+        <p:nvSpPr>
+          <p:cNvPr id="25" name="">
+            <a:extLst xmlns:a="http://schemas.openxmlformats.org/drawingml/2006/main">
+              <a:ext uri="{FF2B5EF4-FFF2-40B4-BE49-F238E27FC236}">
+                <a16:creationId xmlns:a16="http://schemas.microsoft.com/office/drawing/2014/main" id="{43D9C9D0-55F9-428F-A8E7-9D2F18871DA3}"/>
+              </a:ext>
+            </a:extLst>
+          </p:cNvPr>
+          <p:cNvSpPr>
+            <a:spLocks xmlns:a="http://schemas.openxmlformats.org/drawingml/2006/main" noGrp="1"/>
+          </p:cNvSpPr>
+          <p:nvPr/>
+        </p:nvSpPr>
+        <p:spPr>
+          <a:xfrm xmlns:a="http://schemas.openxmlformats.org/drawingml/2006/main">
+            <a:off x="6400800" y="4533900"/>
+            <a:ext cx="4972050" cy="266700"/>
+          </a:xfrm>
+          <a:prstGeom xmlns:a="http://schemas.openxmlformats.org/drawingml/2006/main" prst="rect">
+            <a:avLst/>
+          </a:prstGeom>
+          <a:solidFill xmlns:a="http://schemas.openxmlformats.org/drawingml/2006/main">
+            <a:srgbClr val="001B3A"/>
+          </a:solidFill>
+          <a:ln xmlns:a="http://schemas.openxmlformats.org/drawingml/2006/main" w="0">
+            <a:solidFill>
+              <a:srgbClr val="001B3A"/>
+            </a:solidFill>
+            <a:prstDash val="solid"/>
+          </a:ln>
+        </p:spPr>
+        <p:txBody>
+          <a:bodyPr xmlns:a="http://schemas.openxmlformats.org/drawingml/2006/main" lIns="76200" tIns="47625" rIns="76200" bIns="28575">
+            <a:noAutofit/>
+          </a:bodyPr>
+          <a:lstStyle xmlns:a="http://schemas.openxmlformats.org/drawingml/2006/main"/>
+          <a:p xmlns:a="http://schemas.openxmlformats.org/drawingml/2006/main">
+            <a:pPr>
+              <a:spcAft>
+                <a:spcPts val="0"/>
+              </a:spcAft>
+              <a:defRPr sz="938"/>
+            </a:pPr>
+            <a:r>
+              <a:rPr sz="938">
+                <a:solidFill>
+                  <a:srgbClr val="78C7FF"/>
+                </a:solidFill>
+                <a:latin typeface="Aptos Mono"/>
+                <a:ea typeface="Aptos Mono"/>
+                <a:cs typeface="Aptos Mono"/>
+              </a:rPr>
+              <a:t>await</a:t>
+            </a:r>
+            <a:r>
+              <a:rPr sz="938">
+                <a:solidFill>
+                  <a:srgbClr val="E7F1F5"/>
+                </a:solidFill>
+                <a:latin typeface="Aptos Mono"/>
+                <a:ea typeface="Aptos Mono"/>
+                <a:cs typeface="Aptos Mono"/>
+              </a:rPr>
+              <a:t> vision</a:t>
+            </a:r>
+            <a:r>
+              <a:rPr sz="938">
+                <a:solidFill>
+                  <a:srgbClr val="B4C9D8"/>
+                </a:solidFill>
+                <a:latin typeface="Aptos Mono"/>
+                <a:ea typeface="Aptos Mono"/>
+                <a:cs typeface="Aptos Mono"/>
+              </a:rPr>
+              <a:t>.</a:t>
+            </a:r>
+            <a:r>
+              <a:rPr sz="938">
+                <a:solidFill>
+                  <a:srgbClr val="55D6C2"/>
+                </a:solidFill>
+                <a:latin typeface="Aptos Mono"/>
+                <a:ea typeface="Aptos Mono"/>
+                <a:cs typeface="Aptos Mono"/>
+              </a:rPr>
+              <a:t>scanAprilTags</a:t>
+            </a:r>
+            <a:r>
+              <a:rPr sz="938">
+                <a:solidFill>
+                  <a:srgbClr val="E7F1F5"/>
+                </a:solidFill>
+                <a:latin typeface="Aptos Mono"/>
+                <a:ea typeface="Aptos Mono"/>
+                <a:cs typeface="Aptos Mono"/>
+              </a:rPr>
+              <a:t>(announceScan)</a:t>
+            </a:r>
+          </a:p>
+        </p:txBody>
+      </p:sp>
+      <p:sp>
+        <p:nvSpPr>
+          <p:cNvPr id="26" name="">
+            <a:extLst xmlns:a="http://schemas.openxmlformats.org/drawingml/2006/main">
+              <a:ext uri="{FF2B5EF4-FFF2-40B4-BE49-F238E27FC236}">
+                <a16:creationId xmlns:a16="http://schemas.microsoft.com/office/drawing/2014/main" id="{1C128527-6BC5-4C5F-BE52-5FB3F52B92CC}"/>
+              </a:ext>
+            </a:extLst>
+          </p:cNvPr>
+          <p:cNvSpPr>
+            <a:spLocks xmlns:a="http://schemas.openxmlformats.org/drawingml/2006/main" noGrp="1"/>
+          </p:cNvSpPr>
+          <p:nvPr/>
+        </p:nvSpPr>
+        <p:spPr>
+          <a:xfrm xmlns:a="http://schemas.openxmlformats.org/drawingml/2006/main">
+            <a:off x="6419850" y="4848225"/>
+            <a:ext cx="4933950" cy="304800"/>
+          </a:xfrm>
+          <a:prstGeom xmlns:a="http://schemas.openxmlformats.org/drawingml/2006/main" prst="rect">
+            <a:avLst/>
+          </a:prstGeom>
+          <a:noFill xmlns:a="http://schemas.openxmlformats.org/drawingml/2006/main"/>
+          <a:ln xmlns:a="http://schemas.openxmlformats.org/drawingml/2006/main" w="0">
+            <a:noFill/>
+            <a:prstDash val="solid"/>
+          </a:ln>
+        </p:spPr>
+        <p:txBody>
+          <a:bodyPr xmlns:a="http://schemas.openxmlformats.org/drawingml/2006/main"/>
+          <a:lstStyle xmlns:a="http://schemas.openxmlformats.org/drawingml/2006/main"/>
+          <a:p xmlns:a="http://schemas.openxmlformats.org/drawingml/2006/main">
+            <a:pPr>
+              <a:defRPr sz="900">
+                <a:solidFill>
+                  <a:srgbClr val="0D2843"/>
+                </a:solidFill>
+              </a:defRPr>
+            </a:pPr>
+            <a:r>
+              <a:rPr sz="900">
+                <a:solidFill>
+                  <a:srgbClr val="0D2843"/>
+                </a:solidFill>
+              </a:rPr>
+              <a:t>announceScan: boolean; default true · returns Promise&lt;AprilTagDetection[]&gt;</a:t>
+            </a:r>
+          </a:p>
+          <a:p xmlns:a="http://schemas.openxmlformats.org/drawingml/2006/main">
+            <a:pPr>
+              <a:defRPr sz="900">
+                <a:solidFill>
+                  <a:srgbClr val="0D2843"/>
+                </a:solidFill>
+              </a:defRPr>
+            </a:pPr>
+            <a:r>
+              <a:rPr sz="900">
+                <a:solidFill>
+                  <a:srgbClr val="0D2843"/>
+                </a:solidFill>
+              </a:rPr>
+              <a:t>fields: id, bbox, corners, centerX/Y, yaw, hamming · throws on camera failure</a:t>
+            </a:r>
+          </a:p>
+        </p:txBody>
+      </p:sp>
+      <p:sp>
+        <p:nvSpPr>
+          <p:cNvPr id="27" name="">
+            <a:extLst xmlns:a="http://schemas.openxmlformats.org/drawingml/2006/main">
+              <a:ext uri="{FF2B5EF4-FFF2-40B4-BE49-F238E27FC236}">
+                <a16:creationId xmlns:a16="http://schemas.microsoft.com/office/drawing/2014/main" id="{960CB50B-FF00-46DF-B499-EBD03E76995C}"/>
+              </a:ext>
+            </a:extLst>
+          </p:cNvPr>
+          <p:cNvSpPr>
+            <a:spLocks xmlns:a="http://schemas.openxmlformats.org/drawingml/2006/main" noGrp="1"/>
+          </p:cNvSpPr>
+          <p:nvPr/>
+        </p:nvSpPr>
+        <p:spPr>
+          <a:xfrm xmlns:a="http://schemas.openxmlformats.org/drawingml/2006/main">
+            <a:off x="6191250" y="5314950"/>
+            <a:ext cx="5391150" cy="933450"/>
           </a:xfrm>
           <a:prstGeom xmlns:a="http://schemas.openxmlformats.org/drawingml/2006/main" prst="roundRect">
             <a:avLst>
-              <a:gd name="adj" fmla="val 50000"/>
-            </a:avLst>
-          </a:prstGeom>
-          <a:solidFill xmlns:a="http://schemas.openxmlformats.org/drawingml/2006/main">
-            <a:srgbClr val="008C95"/>
-          </a:solidFill>
-          <a:ln xmlns:a="http://schemas.openxmlformats.org/drawingml/2006/main" w="14288">
-            <a:solidFill>
-              <a:srgbClr val="008C95"/>
-            </a:solidFill>
-            <a:prstDash val="solid"/>
-          </a:ln>
-        </p:spPr>
-        <p:txBody>
-          <a:bodyPr xmlns:a="http://schemas.openxmlformats.org/drawingml/2006/main"/>
-          <a:lstStyle xmlns:a="http://schemas.openxmlformats.org/drawingml/2006/main"/>
-          <a:p xmlns:a="http://schemas.openxmlformats.org/drawingml/2006/main">
-            <a:pPr algn="ctr">
-              <a:defRPr sz="1050" b="1">
-                <a:solidFill>
-                  <a:srgbClr val="FFFFFF"/>
-                </a:solidFill>
-              </a:defRPr>
-            </a:pPr>
-            <a:r>
-              <a:rPr sz="1050" b="1">
-                <a:solidFill>
-                  <a:srgbClr val="FFFFFF"/>
-                </a:solidFill>
-              </a:rPr>
-              <a:t>02</a:t>
-            </a:r>
-          </a:p>
-        </p:txBody>
-      </p:sp>
-      <p:sp>
-        <p:nvSpPr>
-          <p:cNvPr id="25" name="">
-            <a:extLst xmlns:a="http://schemas.openxmlformats.org/drawingml/2006/main">
-              <a:ext uri="{FF2B5EF4-FFF2-40B4-BE49-F238E27FC236}">
-                <a16:creationId xmlns:a16="http://schemas.microsoft.com/office/drawing/2014/main" id="{1B74E7CB-559E-4D46-96F7-AB2354CF5289}"/>
-              </a:ext>
-            </a:extLst>
-          </p:cNvPr>
-          <p:cNvSpPr>
-            <a:spLocks xmlns:a="http://schemas.openxmlformats.org/drawingml/2006/main" noGrp="1"/>
-          </p:cNvSpPr>
-          <p:nvPr/>
-        </p:nvSpPr>
-        <p:spPr>
-          <a:xfrm xmlns:a="http://schemas.openxmlformats.org/drawingml/2006/main">
-            <a:off x="3055620" y="2552700"/>
-            <a:ext cx="1645920" cy="314325"/>
-          </a:xfrm>
-          <a:prstGeom xmlns:a="http://schemas.openxmlformats.org/drawingml/2006/main" prst="rect">
-            <a:avLst/>
-          </a:prstGeom>
-          <a:noFill xmlns:a="http://schemas.openxmlformats.org/drawingml/2006/main"/>
-          <a:ln xmlns:a="http://schemas.openxmlformats.org/drawingml/2006/main" w="0">
-            <a:noFill/>
-            <a:prstDash val="solid"/>
-          </a:ln>
-        </p:spPr>
-        <p:txBody>
-          <a:bodyPr xmlns:a="http://schemas.openxmlformats.org/drawingml/2006/main"/>
-          <a:lstStyle xmlns:a="http://schemas.openxmlformats.org/drawingml/2006/main"/>
-          <a:p xmlns:a="http://schemas.openxmlformats.org/drawingml/2006/main">
-            <a:pPr>
-              <a:defRPr sz="1500" b="1">
-                <a:solidFill>
-                  <a:srgbClr val="001B3A"/>
-                </a:solidFill>
-              </a:defRPr>
-            </a:pPr>
-            <a:r>
-              <a:rPr sz="1500" b="1">
-                <a:solidFill>
-                  <a:srgbClr val="001B3A"/>
-                </a:solidFill>
-              </a:rPr>
-              <a:t>Place</a:t>
-            </a:r>
-          </a:p>
-        </p:txBody>
-      </p:sp>
-      <p:sp>
-        <p:nvSpPr>
-          <p:cNvPr id="26" name="">
-            <a:extLst xmlns:a="http://schemas.openxmlformats.org/drawingml/2006/main">
-              <a:ext uri="{FF2B5EF4-FFF2-40B4-BE49-F238E27FC236}">
-                <a16:creationId xmlns:a16="http://schemas.microsoft.com/office/drawing/2014/main" id="{FDDDDA01-AD7B-478F-B84E-5ED1C4A867FE}"/>
-              </a:ext>
-            </a:extLst>
-          </p:cNvPr>
-          <p:cNvSpPr>
-            <a:spLocks xmlns:a="http://schemas.openxmlformats.org/drawingml/2006/main" noGrp="1"/>
-          </p:cNvSpPr>
-          <p:nvPr/>
-        </p:nvSpPr>
-        <p:spPr>
-          <a:xfrm xmlns:a="http://schemas.openxmlformats.org/drawingml/2006/main">
-            <a:off x="3055620" y="2943225"/>
-            <a:ext cx="1645920" cy="457200"/>
-          </a:xfrm>
-          <a:prstGeom xmlns:a="http://schemas.openxmlformats.org/drawingml/2006/main" prst="rect">
-            <a:avLst/>
-          </a:prstGeom>
-          <a:noFill xmlns:a="http://schemas.openxmlformats.org/drawingml/2006/main"/>
-          <a:ln xmlns:a="http://schemas.openxmlformats.org/drawingml/2006/main" w="0">
-            <a:noFill/>
-            <a:prstDash val="solid"/>
-          </a:ln>
-        </p:spPr>
-        <p:txBody>
-          <a:bodyPr xmlns:a="http://schemas.openxmlformats.org/drawingml/2006/main"/>
-          <a:lstStyle xmlns:a="http://schemas.openxmlformats.org/drawingml/2006/main"/>
-          <a:p xmlns:a="http://schemas.openxmlformats.org/drawingml/2006/main">
-            <a:pPr>
-              <a:defRPr sz="1050">
-                <a:solidFill>
-                  <a:srgbClr val="536A7B"/>
-                </a:solidFill>
-              </a:defRPr>
-            </a:pPr>
-            <a:r>
-              <a:rPr sz="1050">
-                <a:solidFill>
-                  <a:srgbClr val="536A7B"/>
-                </a:solidFill>
-              </a:rPr>
-              <a:t>Keep the full border and quiet zone visible.</a:t>
-            </a:r>
-          </a:p>
-        </p:txBody>
-      </p:sp>
-      <p:sp>
-        <p:nvSpPr>
-          <p:cNvPr id="27" name="">
-            <a:extLst xmlns:a="http://schemas.openxmlformats.org/drawingml/2006/main">
-              <a:ext uri="{FF2B5EF4-FFF2-40B4-BE49-F238E27FC236}">
-                <a16:creationId xmlns:a16="http://schemas.microsoft.com/office/drawing/2014/main" id="{780E2919-E588-4D72-A8D4-818A3629E9EA}"/>
-              </a:ext>
-            </a:extLst>
-          </p:cNvPr>
-          <p:cNvSpPr>
-            <a:spLocks xmlns:a="http://schemas.openxmlformats.org/drawingml/2006/main" noGrp="1"/>
-          </p:cNvSpPr>
-          <p:nvPr/>
-        </p:nvSpPr>
-        <p:spPr>
-          <a:xfrm xmlns:a="http://schemas.openxmlformats.org/drawingml/2006/main">
-            <a:off x="5101590" y="1952625"/>
-            <a:ext cx="1988820" cy="1619250"/>
-          </a:xfrm>
-          <a:prstGeom xmlns:a="http://schemas.openxmlformats.org/drawingml/2006/main" prst="roundRect">
-            <a:avLst>
-              <a:gd name="adj" fmla="val 7059"/>
+              <a:gd name="adj" fmla="val 12245"/>
             </a:avLst>
           </a:prstGeom>
           <a:solidFill xmlns:a="http://schemas.openxmlformats.org/drawingml/2006/main">
@@ -8389,7 +10169,7 @@
           </a:solidFill>
           <a:ln xmlns:a="http://schemas.openxmlformats.org/drawingml/2006/main" w="14288">
             <a:solidFill>
-              <a:srgbClr val="B7CBD3"/>
+              <a:srgbClr val="C3D2D9"/>
             </a:solidFill>
             <a:prstDash val="solid"/>
           </a:ln>
@@ -8400,103 +10180,80 @@
           <p:cNvPr id="28" name="">
             <a:extLst xmlns:a="http://schemas.openxmlformats.org/drawingml/2006/main">
               <a:ext uri="{FF2B5EF4-FFF2-40B4-BE49-F238E27FC236}">
-                <a16:creationId xmlns:a16="http://schemas.microsoft.com/office/drawing/2014/main" id="{DFA547DB-F2B5-417D-89B2-F134DD272188}"/>
-              </a:ext>
-            </a:extLst>
-          </p:cNvPr>
-          <p:cNvSpPr>
-            <a:spLocks xmlns:a="http://schemas.openxmlformats.org/drawingml/2006/main" noGrp="1"/>
-          </p:cNvSpPr>
-          <p:nvPr/>
-        </p:nvSpPr>
-        <p:spPr>
-          <a:xfrm xmlns:a="http://schemas.openxmlformats.org/drawingml/2006/main">
-            <a:off x="5273040" y="2105025"/>
-            <a:ext cx="457200" cy="304800"/>
-          </a:xfrm>
-          <a:prstGeom xmlns:a="http://schemas.openxmlformats.org/drawingml/2006/main" prst="roundRect">
-            <a:avLst>
-              <a:gd name="adj" fmla="val 50000"/>
-            </a:avLst>
+                <a16:creationId xmlns:a16="http://schemas.microsoft.com/office/drawing/2014/main" id="{C62B1288-0CD1-4BFE-8BBD-A91E8EBEB6E0}"/>
+              </a:ext>
+            </a:extLst>
+          </p:cNvPr>
+          <p:cNvSpPr>
+            <a:spLocks xmlns:a="http://schemas.openxmlformats.org/drawingml/2006/main" noGrp="1"/>
+          </p:cNvSpPr>
+          <p:nvPr/>
+        </p:nvSpPr>
+        <p:spPr>
+          <a:xfrm xmlns:a="http://schemas.openxmlformats.org/drawingml/2006/main">
+            <a:off x="6191250" y="5314950"/>
+            <a:ext cx="66675" cy="933450"/>
+          </a:xfrm>
+          <a:prstGeom xmlns:a="http://schemas.openxmlformats.org/drawingml/2006/main" prst="rect">
+            <a:avLst/>
           </a:prstGeom>
           <a:solidFill xmlns:a="http://schemas.openxmlformats.org/drawingml/2006/main">
-            <a:srgbClr val="008C95"/>
+            <a:srgbClr val="D94F5C"/>
           </a:solidFill>
-          <a:ln xmlns:a="http://schemas.openxmlformats.org/drawingml/2006/main" w="14288">
+          <a:ln xmlns:a="http://schemas.openxmlformats.org/drawingml/2006/main" w="0">
             <a:solidFill>
-              <a:srgbClr val="008C95"/>
+              <a:srgbClr val="D94F5C"/>
             </a:solidFill>
             <a:prstDash val="solid"/>
           </a:ln>
         </p:spPr>
-        <p:txBody>
-          <a:bodyPr xmlns:a="http://schemas.openxmlformats.org/drawingml/2006/main"/>
-          <a:lstStyle xmlns:a="http://schemas.openxmlformats.org/drawingml/2006/main"/>
-          <a:p xmlns:a="http://schemas.openxmlformats.org/drawingml/2006/main">
-            <a:pPr algn="ctr">
-              <a:defRPr sz="1050" b="1">
-                <a:solidFill>
-                  <a:srgbClr val="FFFFFF"/>
+      </p:sp>
+      <p:sp>
+        <p:nvSpPr>
+          <p:cNvPr id="29" name="">
+            <a:extLst xmlns:a="http://schemas.openxmlformats.org/drawingml/2006/main">
+              <a:ext uri="{FF2B5EF4-FFF2-40B4-BE49-F238E27FC236}">
+                <a16:creationId xmlns:a16="http://schemas.microsoft.com/office/drawing/2014/main" id="{F4BE0004-C4C1-436E-A3B0-5CED3ED223F1}"/>
+              </a:ext>
+            </a:extLst>
+          </p:cNvPr>
+          <p:cNvSpPr>
+            <a:spLocks xmlns:a="http://schemas.openxmlformats.org/drawingml/2006/main" noGrp="1"/>
+          </p:cNvSpPr>
+          <p:nvPr/>
+        </p:nvSpPr>
+        <p:spPr>
+          <a:xfrm xmlns:a="http://schemas.openxmlformats.org/drawingml/2006/main">
+            <a:off x="6400800" y="5400675"/>
+            <a:ext cx="4972050" cy="161925"/>
+          </a:xfrm>
+          <a:prstGeom xmlns:a="http://schemas.openxmlformats.org/drawingml/2006/main" prst="rect">
+            <a:avLst/>
+          </a:prstGeom>
+          <a:noFill xmlns:a="http://schemas.openxmlformats.org/drawingml/2006/main"/>
+          <a:ln xmlns:a="http://schemas.openxmlformats.org/drawingml/2006/main" w="0">
+            <a:noFill/>
+            <a:prstDash val="solid"/>
+          </a:ln>
+        </p:spPr>
+        <p:txBody>
+          <a:bodyPr xmlns:a="http://schemas.openxmlformats.org/drawingml/2006/main"/>
+          <a:lstStyle xmlns:a="http://schemas.openxmlformats.org/drawingml/2006/main"/>
+          <a:p xmlns:a="http://schemas.openxmlformats.org/drawingml/2006/main">
+            <a:pPr>
+              <a:defRPr sz="900" b="1">
+                <a:solidFill>
+                  <a:srgbClr val="D94F5C"/>
                 </a:solidFill>
               </a:defRPr>
             </a:pPr>
             <a:r>
-              <a:rPr sz="1050" b="1">
-                <a:solidFill>
-                  <a:srgbClr val="FFFFFF"/>
-                </a:solidFill>
-              </a:rPr>
-              <a:t>03</a:t>
-            </a:r>
-          </a:p>
-        </p:txBody>
-      </p:sp>
-      <p:sp>
-        <p:nvSpPr>
-          <p:cNvPr id="29" name="">
-            <a:extLst xmlns:a="http://schemas.openxmlformats.org/drawingml/2006/main">
-              <a:ext uri="{FF2B5EF4-FFF2-40B4-BE49-F238E27FC236}">
-                <a16:creationId xmlns:a16="http://schemas.microsoft.com/office/drawing/2014/main" id="{ADA57B98-D274-4F2D-AAE9-5B7D76839439}"/>
-              </a:ext>
-            </a:extLst>
-          </p:cNvPr>
-          <p:cNvSpPr>
-            <a:spLocks xmlns:a="http://schemas.openxmlformats.org/drawingml/2006/main" noGrp="1"/>
-          </p:cNvSpPr>
-          <p:nvPr/>
-        </p:nvSpPr>
-        <p:spPr>
-          <a:xfrm xmlns:a="http://schemas.openxmlformats.org/drawingml/2006/main">
-            <a:off x="5273040" y="2552700"/>
-            <a:ext cx="1645920" cy="314325"/>
-          </a:xfrm>
-          <a:prstGeom xmlns:a="http://schemas.openxmlformats.org/drawingml/2006/main" prst="rect">
-            <a:avLst/>
-          </a:prstGeom>
-          <a:noFill xmlns:a="http://schemas.openxmlformats.org/drawingml/2006/main"/>
-          <a:ln xmlns:a="http://schemas.openxmlformats.org/drawingml/2006/main" w="0">
-            <a:noFill/>
-            <a:prstDash val="solid"/>
-          </a:ln>
-        </p:spPr>
-        <p:txBody>
-          <a:bodyPr xmlns:a="http://schemas.openxmlformats.org/drawingml/2006/main"/>
-          <a:lstStyle xmlns:a="http://schemas.openxmlformats.org/drawingml/2006/main"/>
-          <a:p xmlns:a="http://schemas.openxmlformats.org/drawingml/2006/main">
-            <a:pPr>
-              <a:defRPr sz="1500" b="1">
-                <a:solidFill>
-                  <a:srgbClr val="001B3A"/>
-                </a:solidFill>
-              </a:defRPr>
-            </a:pPr>
-            <a:r>
-              <a:rPr sz="1500" b="1">
-                <a:solidFill>
-                  <a:srgbClr val="001B3A"/>
-                </a:solidFill>
-              </a:rPr>
-              <a:t>Scan</a:t>
+              <a:rPr sz="900" b="1">
+                <a:solidFill>
+                  <a:srgbClr val="D94F5C"/>
+                </a:solidFill>
+              </a:rPr>
+              <a:t>TEST ONE ID</a:t>
             </a:r>
           </a:p>
         </p:txBody>
@@ -8506,681 +10263,166 @@
           <p:cNvPr id="30" name="">
             <a:extLst xmlns:a="http://schemas.openxmlformats.org/drawingml/2006/main">
               <a:ext uri="{FF2B5EF4-FFF2-40B4-BE49-F238E27FC236}">
-                <a16:creationId xmlns:a16="http://schemas.microsoft.com/office/drawing/2014/main" id="{AD691753-D9D9-4D66-967C-A5E0CCEF30AB}"/>
-              </a:ext>
-            </a:extLst>
-          </p:cNvPr>
-          <p:cNvSpPr>
-            <a:spLocks xmlns:a="http://schemas.openxmlformats.org/drawingml/2006/main" noGrp="1"/>
-          </p:cNvSpPr>
-          <p:nvPr/>
-        </p:nvSpPr>
-        <p:spPr>
-          <a:xfrm xmlns:a="http://schemas.openxmlformats.org/drawingml/2006/main">
-            <a:off x="5273040" y="2943225"/>
-            <a:ext cx="1645920" cy="457200"/>
-          </a:xfrm>
-          <a:prstGeom xmlns:a="http://schemas.openxmlformats.org/drawingml/2006/main" prst="rect">
-            <a:avLst/>
-          </a:prstGeom>
-          <a:noFill xmlns:a="http://schemas.openxmlformats.org/drawingml/2006/main"/>
-          <a:ln xmlns:a="http://schemas.openxmlformats.org/drawingml/2006/main" w="0">
-            <a:noFill/>
-            <a:prstDash val="solid"/>
-          </a:ln>
-        </p:spPr>
-        <p:txBody>
-          <a:bodyPr xmlns:a="http://schemas.openxmlformats.org/drawingml/2006/main"/>
-          <a:lstStyle xmlns:a="http://schemas.openxmlformats.org/drawingml/2006/main"/>
-          <a:p xmlns:a="http://schemas.openxmlformats.org/drawingml/2006/main">
-            <a:pPr>
-              <a:defRPr sz="1050">
-                <a:solidFill>
-                  <a:srgbClr val="536A7B"/>
-                </a:solidFill>
-              </a:defRPr>
-            </a:pPr>
-            <a:r>
-              <a:rPr sz="1050">
-                <a:solidFill>
-                  <a:srgbClr val="536A7B"/>
-                </a:solidFill>
-              </a:rPr>
-              <a:t>Test once or use scan for AprilTags.</a:t>
-            </a:r>
-          </a:p>
-        </p:txBody>
-      </p:sp>
-      <p:sp>
-        <p:nvSpPr>
-          <p:cNvPr id="31" name="">
-            <a:extLst xmlns:a="http://schemas.openxmlformats.org/drawingml/2006/main">
-              <a:ext uri="{FF2B5EF4-FFF2-40B4-BE49-F238E27FC236}">
-                <a16:creationId xmlns:a16="http://schemas.microsoft.com/office/drawing/2014/main" id="{A32D5A1C-7BCD-40DE-B348-909CA95436F9}"/>
-              </a:ext>
-            </a:extLst>
-          </p:cNvPr>
-          <p:cNvSpPr>
-            <a:spLocks xmlns:a="http://schemas.openxmlformats.org/drawingml/2006/main" noGrp="1"/>
-          </p:cNvSpPr>
-          <p:nvPr/>
-        </p:nvSpPr>
-        <p:spPr>
-          <a:xfrm xmlns:a="http://schemas.openxmlformats.org/drawingml/2006/main">
-            <a:off x="7319010" y="1952625"/>
-            <a:ext cx="1988820" cy="1619250"/>
-          </a:xfrm>
-          <a:prstGeom xmlns:a="http://schemas.openxmlformats.org/drawingml/2006/main" prst="roundRect">
-            <a:avLst>
-              <a:gd name="adj" fmla="val 7059"/>
-            </a:avLst>
-          </a:prstGeom>
-          <a:solidFill xmlns:a="http://schemas.openxmlformats.org/drawingml/2006/main">
-            <a:srgbClr val="FFFFFF"/>
-          </a:solidFill>
-          <a:ln xmlns:a="http://schemas.openxmlformats.org/drawingml/2006/main" w="14288">
-            <a:solidFill>
-              <a:srgbClr val="B7CBD3"/>
-            </a:solidFill>
-            <a:prstDash val="solid"/>
-          </a:ln>
-        </p:spPr>
-      </p:sp>
-      <p:sp>
-        <p:nvSpPr>
-          <p:cNvPr id="32" name="">
-            <a:extLst xmlns:a="http://schemas.openxmlformats.org/drawingml/2006/main">
-              <a:ext uri="{FF2B5EF4-FFF2-40B4-BE49-F238E27FC236}">
-                <a16:creationId xmlns:a16="http://schemas.microsoft.com/office/drawing/2014/main" id="{9F35FB69-6C97-4EEE-85E9-65829040F6BB}"/>
-              </a:ext>
-            </a:extLst>
-          </p:cNvPr>
-          <p:cNvSpPr>
-            <a:spLocks xmlns:a="http://schemas.openxmlformats.org/drawingml/2006/main" noGrp="1"/>
-          </p:cNvSpPr>
-          <p:nvPr/>
-        </p:nvSpPr>
-        <p:spPr>
-          <a:xfrm xmlns:a="http://schemas.openxmlformats.org/drawingml/2006/main">
-            <a:off x="7490460" y="2105025"/>
-            <a:ext cx="457200" cy="304800"/>
-          </a:xfrm>
-          <a:prstGeom xmlns:a="http://schemas.openxmlformats.org/drawingml/2006/main" prst="roundRect">
-            <a:avLst>
-              <a:gd name="adj" fmla="val 50000"/>
-            </a:avLst>
-          </a:prstGeom>
-          <a:solidFill xmlns:a="http://schemas.openxmlformats.org/drawingml/2006/main">
-            <a:srgbClr val="008C95"/>
-          </a:solidFill>
-          <a:ln xmlns:a="http://schemas.openxmlformats.org/drawingml/2006/main" w="14288">
-            <a:solidFill>
-              <a:srgbClr val="008C95"/>
-            </a:solidFill>
-            <a:prstDash val="solid"/>
-          </a:ln>
-        </p:spPr>
-        <p:txBody>
-          <a:bodyPr xmlns:a="http://schemas.openxmlformats.org/drawingml/2006/main"/>
-          <a:lstStyle xmlns:a="http://schemas.openxmlformats.org/drawingml/2006/main"/>
-          <a:p xmlns:a="http://schemas.openxmlformats.org/drawingml/2006/main">
-            <a:pPr algn="ctr">
-              <a:defRPr sz="1050" b="1">
-                <a:solidFill>
-                  <a:srgbClr val="FFFFFF"/>
-                </a:solidFill>
-              </a:defRPr>
-            </a:pPr>
-            <a:r>
-              <a:rPr sz="1050" b="1">
-                <a:solidFill>
-                  <a:srgbClr val="FFFFFF"/>
-                </a:solidFill>
-              </a:rPr>
-              <a:t>04</a:t>
-            </a:r>
-          </a:p>
-        </p:txBody>
-      </p:sp>
-      <p:sp>
-        <p:nvSpPr>
-          <p:cNvPr id="33" name="">
-            <a:extLst xmlns:a="http://schemas.openxmlformats.org/drawingml/2006/main">
-              <a:ext uri="{FF2B5EF4-FFF2-40B4-BE49-F238E27FC236}">
-                <a16:creationId xmlns:a16="http://schemas.microsoft.com/office/drawing/2014/main" id="{B3EE1DFC-E5CB-4855-B143-7D6B2B6FB06E}"/>
-              </a:ext>
-            </a:extLst>
-          </p:cNvPr>
-          <p:cNvSpPr>
-            <a:spLocks xmlns:a="http://schemas.openxmlformats.org/drawingml/2006/main" noGrp="1"/>
-          </p:cNvSpPr>
-          <p:nvPr/>
-        </p:nvSpPr>
-        <p:spPr>
-          <a:xfrm xmlns:a="http://schemas.openxmlformats.org/drawingml/2006/main">
-            <a:off x="7490460" y="2552700"/>
-            <a:ext cx="1645920" cy="314325"/>
-          </a:xfrm>
-          <a:prstGeom xmlns:a="http://schemas.openxmlformats.org/drawingml/2006/main" prst="rect">
-            <a:avLst/>
-          </a:prstGeom>
-          <a:noFill xmlns:a="http://schemas.openxmlformats.org/drawingml/2006/main"/>
-          <a:ln xmlns:a="http://schemas.openxmlformats.org/drawingml/2006/main" w="0">
-            <a:noFill/>
-            <a:prstDash val="solid"/>
-          </a:ln>
-        </p:spPr>
-        <p:txBody>
-          <a:bodyPr xmlns:a="http://schemas.openxmlformats.org/drawingml/2006/main"/>
-          <a:lstStyle xmlns:a="http://schemas.openxmlformats.org/drawingml/2006/main"/>
-          <a:p xmlns:a="http://schemas.openxmlformats.org/drawingml/2006/main">
-            <a:pPr>
-              <a:defRPr sz="1500" b="1">
-                <a:solidFill>
-                  <a:srgbClr val="001B3A"/>
-                </a:solidFill>
-              </a:defRPr>
-            </a:pPr>
-            <a:r>
-              <a:rPr sz="1500" b="1">
-                <a:solidFill>
-                  <a:srgbClr val="001B3A"/>
-                </a:solidFill>
-              </a:rPr>
-              <a:t>Interpret</a:t>
-            </a:r>
-          </a:p>
-        </p:txBody>
-      </p:sp>
-      <p:sp>
-        <p:nvSpPr>
-          <p:cNvPr id="34" name="">
-            <a:extLst xmlns:a="http://schemas.openxmlformats.org/drawingml/2006/main">
-              <a:ext uri="{FF2B5EF4-FFF2-40B4-BE49-F238E27FC236}">
-                <a16:creationId xmlns:a16="http://schemas.microsoft.com/office/drawing/2014/main" id="{2AA3B5B9-A48A-48B3-BFAE-3071FC9C52BE}"/>
-              </a:ext>
-            </a:extLst>
-          </p:cNvPr>
-          <p:cNvSpPr>
-            <a:spLocks xmlns:a="http://schemas.openxmlformats.org/drawingml/2006/main" noGrp="1"/>
-          </p:cNvSpPr>
-          <p:nvPr/>
-        </p:nvSpPr>
-        <p:spPr>
-          <a:xfrm xmlns:a="http://schemas.openxmlformats.org/drawingml/2006/main">
-            <a:off x="7490460" y="2943225"/>
-            <a:ext cx="1645920" cy="457200"/>
-          </a:xfrm>
-          <a:prstGeom xmlns:a="http://schemas.openxmlformats.org/drawingml/2006/main" prst="rect">
-            <a:avLst/>
-          </a:prstGeom>
-          <a:noFill xmlns:a="http://schemas.openxmlformats.org/drawingml/2006/main"/>
-          <a:ln xmlns:a="http://schemas.openxmlformats.org/drawingml/2006/main" w="0">
-            <a:noFill/>
-            <a:prstDash val="solid"/>
-          </a:ln>
-        </p:spPr>
-        <p:txBody>
-          <a:bodyPr xmlns:a="http://schemas.openxmlformats.org/drawingml/2006/main"/>
-          <a:lstStyle xmlns:a="http://schemas.openxmlformats.org/drawingml/2006/main"/>
-          <a:p xmlns:a="http://schemas.openxmlformats.org/drawingml/2006/main">
-            <a:pPr>
-              <a:defRPr sz="1050">
-                <a:solidFill>
-                  <a:srgbClr val="536A7B"/>
-                </a:solidFill>
-              </a:defRPr>
-            </a:pPr>
-            <a:r>
-              <a:rPr sz="1050">
-                <a:solidFill>
-                  <a:srgbClr val="536A7B"/>
-                </a:solidFill>
-              </a:rPr>
-              <a:t>Read ID, center x/y, and 2D yaw.</a:t>
-            </a:r>
-          </a:p>
-        </p:txBody>
-      </p:sp>
-      <p:sp>
-        <p:nvSpPr>
-          <p:cNvPr id="35" name="">
-            <a:extLst xmlns:a="http://schemas.openxmlformats.org/drawingml/2006/main">
-              <a:ext uri="{FF2B5EF4-FFF2-40B4-BE49-F238E27FC236}">
-                <a16:creationId xmlns:a16="http://schemas.microsoft.com/office/drawing/2014/main" id="{7437E911-53BF-407B-9411-CBC1CC908C5A}"/>
-              </a:ext>
-            </a:extLst>
-          </p:cNvPr>
-          <p:cNvSpPr>
-            <a:spLocks xmlns:a="http://schemas.openxmlformats.org/drawingml/2006/main" noGrp="1"/>
-          </p:cNvSpPr>
-          <p:nvPr/>
-        </p:nvSpPr>
-        <p:spPr>
-          <a:xfrm xmlns:a="http://schemas.openxmlformats.org/drawingml/2006/main">
-            <a:off x="9536430" y="1952625"/>
-            <a:ext cx="1988820" cy="1619250"/>
-          </a:xfrm>
-          <a:prstGeom xmlns:a="http://schemas.openxmlformats.org/drawingml/2006/main" prst="roundRect">
-            <a:avLst>
-              <a:gd name="adj" fmla="val 7059"/>
-            </a:avLst>
+                <a16:creationId xmlns:a16="http://schemas.microsoft.com/office/drawing/2014/main" id="{40134768-BDE8-46F7-8371-63FB856E4DC7}"/>
+              </a:ext>
+            </a:extLst>
+          </p:cNvPr>
+          <p:cNvSpPr>
+            <a:spLocks xmlns:a="http://schemas.openxmlformats.org/drawingml/2006/main" noGrp="1"/>
+          </p:cNvSpPr>
+          <p:nvPr/>
+        </p:nvSpPr>
+        <p:spPr>
+          <a:xfrm xmlns:a="http://schemas.openxmlformats.org/drawingml/2006/main">
+            <a:off x="6400800" y="5581650"/>
+            <a:ext cx="4972050" cy="266700"/>
+          </a:xfrm>
+          <a:prstGeom xmlns:a="http://schemas.openxmlformats.org/drawingml/2006/main" prst="rect">
+            <a:avLst/>
           </a:prstGeom>
           <a:solidFill xmlns:a="http://schemas.openxmlformats.org/drawingml/2006/main">
             <a:srgbClr val="001B3A"/>
           </a:solidFill>
-          <a:ln xmlns:a="http://schemas.openxmlformats.org/drawingml/2006/main" w="14288">
+          <a:ln xmlns:a="http://schemas.openxmlformats.org/drawingml/2006/main" w="0">
             <a:solidFill>
               <a:srgbClr val="001B3A"/>
             </a:solidFill>
             <a:prstDash val="solid"/>
           </a:ln>
         </p:spPr>
-      </p:sp>
-      <p:sp>
-        <p:nvSpPr>
-          <p:cNvPr id="36" name="">
-            <a:extLst xmlns:a="http://schemas.openxmlformats.org/drawingml/2006/main">
-              <a:ext uri="{FF2B5EF4-FFF2-40B4-BE49-F238E27FC236}">
-                <a16:creationId xmlns:a16="http://schemas.microsoft.com/office/drawing/2014/main" id="{6D4212D1-5B56-49FC-86AC-3DFFFF623221}"/>
-              </a:ext>
-            </a:extLst>
-          </p:cNvPr>
-          <p:cNvSpPr>
-            <a:spLocks xmlns:a="http://schemas.openxmlformats.org/drawingml/2006/main" noGrp="1"/>
-          </p:cNvSpPr>
-          <p:nvPr/>
-        </p:nvSpPr>
-        <p:spPr>
-          <a:xfrm xmlns:a="http://schemas.openxmlformats.org/drawingml/2006/main">
-            <a:off x="9707880" y="2105025"/>
-            <a:ext cx="457200" cy="304800"/>
-          </a:xfrm>
-          <a:prstGeom xmlns:a="http://schemas.openxmlformats.org/drawingml/2006/main" prst="roundRect">
-            <a:avLst>
-              <a:gd name="adj" fmla="val 50000"/>
-            </a:avLst>
-          </a:prstGeom>
-          <a:solidFill xmlns:a="http://schemas.openxmlformats.org/drawingml/2006/main">
-            <a:srgbClr val="C9A227"/>
-          </a:solidFill>
-          <a:ln xmlns:a="http://schemas.openxmlformats.org/drawingml/2006/main" w="14288">
-            <a:solidFill>
-              <a:srgbClr val="C9A227"/>
-            </a:solidFill>
-            <a:prstDash val="solid"/>
-          </a:ln>
-        </p:spPr>
-        <p:txBody>
-          <a:bodyPr xmlns:a="http://schemas.openxmlformats.org/drawingml/2006/main"/>
-          <a:lstStyle xmlns:a="http://schemas.openxmlformats.org/drawingml/2006/main"/>
-          <a:p xmlns:a="http://schemas.openxmlformats.org/drawingml/2006/main">
-            <a:pPr algn="ctr">
-              <a:defRPr sz="1050" b="1">
-                <a:solidFill>
-                  <a:srgbClr val="001B3A"/>
+        <p:txBody>
+          <a:bodyPr xmlns:a="http://schemas.openxmlformats.org/drawingml/2006/main" lIns="76200" tIns="47625" rIns="76200" bIns="28575">
+            <a:noAutofit/>
+          </a:bodyPr>
+          <a:lstStyle xmlns:a="http://schemas.openxmlformats.org/drawingml/2006/main"/>
+          <a:p xmlns:a="http://schemas.openxmlformats.org/drawingml/2006/main">
+            <a:pPr>
+              <a:spcAft>
+                <a:spcPts val="0"/>
+              </a:spcAft>
+              <a:defRPr sz="938"/>
+            </a:pPr>
+            <a:r>
+              <a:rPr sz="938">
+                <a:solidFill>
+                  <a:srgbClr val="78C7FF"/>
+                </a:solidFill>
+                <a:latin typeface="Aptos Mono"/>
+                <a:ea typeface="Aptos Mono"/>
+                <a:cs typeface="Aptos Mono"/>
+              </a:rPr>
+              <a:t>await</a:t>
+            </a:r>
+            <a:r>
+              <a:rPr sz="938">
+                <a:solidFill>
+                  <a:srgbClr val="E7F1F5"/>
+                </a:solidFill>
+                <a:latin typeface="Aptos Mono"/>
+                <a:ea typeface="Aptos Mono"/>
+                <a:cs typeface="Aptos Mono"/>
+              </a:rPr>
+              <a:t> vision</a:t>
+            </a:r>
+            <a:r>
+              <a:rPr sz="938">
+                <a:solidFill>
+                  <a:srgbClr val="B4C9D8"/>
+                </a:solidFill>
+                <a:latin typeface="Aptos Mono"/>
+                <a:ea typeface="Aptos Mono"/>
+                <a:cs typeface="Aptos Mono"/>
+              </a:rPr>
+              <a:t>.</a:t>
+            </a:r>
+            <a:r>
+              <a:rPr sz="938">
+                <a:solidFill>
+                  <a:srgbClr val="55D6C2"/>
+                </a:solidFill>
+                <a:latin typeface="Aptos Mono"/>
+                <a:ea typeface="Aptos Mono"/>
+                <a:cs typeface="Aptos Mono"/>
+              </a:rPr>
+              <a:t>seesAprilTag</a:t>
+            </a:r>
+            <a:r>
+              <a:rPr sz="938">
+                <a:solidFill>
+                  <a:srgbClr val="E7F1F5"/>
+                </a:solidFill>
+                <a:latin typeface="Aptos Mono"/>
+                <a:ea typeface="Aptos Mono"/>
+                <a:cs typeface="Aptos Mono"/>
+              </a:rPr>
+              <a:t>(id)</a:t>
+            </a:r>
+          </a:p>
+        </p:txBody>
+      </p:sp>
+      <p:sp>
+        <p:nvSpPr>
+          <p:cNvPr id="31" name="">
+            <a:extLst xmlns:a="http://schemas.openxmlformats.org/drawingml/2006/main">
+              <a:ext uri="{FF2B5EF4-FFF2-40B4-BE49-F238E27FC236}">
+                <a16:creationId xmlns:a16="http://schemas.microsoft.com/office/drawing/2014/main" id="{8647E11A-9AD2-4171-97FB-ED0D94426EE7}"/>
+              </a:ext>
+            </a:extLst>
+          </p:cNvPr>
+          <p:cNvSpPr>
+            <a:spLocks xmlns:a="http://schemas.openxmlformats.org/drawingml/2006/main" noGrp="1"/>
+          </p:cNvSpPr>
+          <p:nvPr/>
+        </p:nvSpPr>
+        <p:spPr>
+          <a:xfrm xmlns:a="http://schemas.openxmlformats.org/drawingml/2006/main">
+            <a:off x="6419850" y="5895975"/>
+            <a:ext cx="4933950" cy="304800"/>
+          </a:xfrm>
+          <a:prstGeom xmlns:a="http://schemas.openxmlformats.org/drawingml/2006/main" prst="rect">
+            <a:avLst/>
+          </a:prstGeom>
+          <a:noFill xmlns:a="http://schemas.openxmlformats.org/drawingml/2006/main"/>
+          <a:ln xmlns:a="http://schemas.openxmlformats.org/drawingml/2006/main" w="0">
+            <a:noFill/>
+            <a:prstDash val="solid"/>
+          </a:ln>
+        </p:spPr>
+        <p:txBody>
+          <a:bodyPr xmlns:a="http://schemas.openxmlformats.org/drawingml/2006/main"/>
+          <a:lstStyle xmlns:a="http://schemas.openxmlformats.org/drawingml/2006/main"/>
+          <a:p xmlns:a="http://schemas.openxmlformats.org/drawingml/2006/main">
+            <a:pPr>
+              <a:defRPr sz="900">
+                <a:solidFill>
+                  <a:srgbClr val="0D2843"/>
                 </a:solidFill>
               </a:defRPr>
             </a:pPr>
             <a:r>
-              <a:rPr sz="1050" b="1">
-                <a:solidFill>
-                  <a:srgbClr val="001B3A"/>
-                </a:solidFill>
-              </a:rPr>
-              <a:t>05</a:t>
-            </a:r>
-          </a:p>
-        </p:txBody>
-      </p:sp>
-      <p:sp>
-        <p:nvSpPr>
-          <p:cNvPr id="37" name="">
-            <a:extLst xmlns:a="http://schemas.openxmlformats.org/drawingml/2006/main">
-              <a:ext uri="{FF2B5EF4-FFF2-40B4-BE49-F238E27FC236}">
-                <a16:creationId xmlns:a16="http://schemas.microsoft.com/office/drawing/2014/main" id="{A0A31770-A2F9-480F-B246-95BFC3206096}"/>
-              </a:ext>
-            </a:extLst>
-          </p:cNvPr>
-          <p:cNvSpPr>
-            <a:spLocks xmlns:a="http://schemas.openxmlformats.org/drawingml/2006/main" noGrp="1"/>
-          </p:cNvSpPr>
-          <p:nvPr/>
-        </p:nvSpPr>
-        <p:spPr>
-          <a:xfrm xmlns:a="http://schemas.openxmlformats.org/drawingml/2006/main">
-            <a:off x="9707880" y="2552700"/>
-            <a:ext cx="1645920" cy="314325"/>
-          </a:xfrm>
-          <a:prstGeom xmlns:a="http://schemas.openxmlformats.org/drawingml/2006/main" prst="rect">
-            <a:avLst/>
-          </a:prstGeom>
-          <a:noFill xmlns:a="http://schemas.openxmlformats.org/drawingml/2006/main"/>
-          <a:ln xmlns:a="http://schemas.openxmlformats.org/drawingml/2006/main" w="0">
-            <a:noFill/>
-            <a:prstDash val="solid"/>
-          </a:ln>
-        </p:spPr>
-        <p:txBody>
-          <a:bodyPr xmlns:a="http://schemas.openxmlformats.org/drawingml/2006/main"/>
-          <a:lstStyle xmlns:a="http://schemas.openxmlformats.org/drawingml/2006/main"/>
+              <a:rPr sz="900">
+                <a:solidFill>
+                  <a:srgbClr val="0D2843"/>
+                </a:solidFill>
+              </a:rPr>
+              <a:t>id: 0…586 or "any"; default "any" · numeric IDs are rounded</a:t>
+            </a:r>
+          </a:p>
           <a:p xmlns:a="http://schemas.openxmlformats.org/drawingml/2006/main">
             <a:pPr>
-              <a:defRPr sz="1500" b="1">
-                <a:solidFill>
-                  <a:srgbClr val="FFFFFF"/>
+              <a:defRPr sz="900">
+                <a:solidFill>
+                  <a:srgbClr val="0D2843"/>
                 </a:solidFill>
               </a:defRPr>
             </a:pPr>
             <a:r>
-              <a:rPr sz="1500" b="1">
-                <a:solidFill>
-                  <a:srgbClr val="FFFFFF"/>
-                </a:solidFill>
-              </a:rPr>
-              <a:t>Act</a:t>
-            </a:r>
-          </a:p>
-        </p:txBody>
-      </p:sp>
-      <p:sp>
-        <p:nvSpPr>
-          <p:cNvPr id="38" name="">
-            <a:extLst xmlns:a="http://schemas.openxmlformats.org/drawingml/2006/main">
-              <a:ext uri="{FF2B5EF4-FFF2-40B4-BE49-F238E27FC236}">
-                <a16:creationId xmlns:a16="http://schemas.microsoft.com/office/drawing/2014/main" id="{67FB53F8-34B4-4971-8A99-D25DB9782460}"/>
-              </a:ext>
-            </a:extLst>
-          </p:cNvPr>
-          <p:cNvSpPr>
-            <a:spLocks xmlns:a="http://schemas.openxmlformats.org/drawingml/2006/main" noGrp="1"/>
-          </p:cNvSpPr>
-          <p:nvPr/>
-        </p:nvSpPr>
-        <p:spPr>
-          <a:xfrm xmlns:a="http://schemas.openxmlformats.org/drawingml/2006/main">
-            <a:off x="9707880" y="2943225"/>
-            <a:ext cx="1645920" cy="457200"/>
-          </a:xfrm>
-          <a:prstGeom xmlns:a="http://schemas.openxmlformats.org/drawingml/2006/main" prst="rect">
-            <a:avLst/>
-          </a:prstGeom>
-          <a:noFill xmlns:a="http://schemas.openxmlformats.org/drawingml/2006/main"/>
-          <a:ln xmlns:a="http://schemas.openxmlformats.org/drawingml/2006/main" w="0">
-            <a:noFill/>
-            <a:prstDash val="solid"/>
-          </a:ln>
-        </p:spPr>
-        <p:txBody>
-          <a:bodyPr xmlns:a="http://schemas.openxmlformats.org/drawingml/2006/main"/>
-          <a:lstStyle xmlns:a="http://schemas.openxmlformats.org/drawingml/2006/main"/>
-          <a:p xmlns:a="http://schemas.openxmlformats.org/drawingml/2006/main">
-            <a:pPr>
-              <a:defRPr sz="1050">
-                <a:solidFill>
-                  <a:srgbClr val="D5E6EC"/>
-                </a:solidFill>
-              </a:defRPr>
-            </a:pPr>
-            <a:r>
-              <a:rPr sz="1050">
-                <a:solidFill>
-                  <a:srgbClr val="D5E6EC"/>
-                </a:solidFill>
-              </a:rPr>
-              <a:t>Center, align, branch, time out, or land safely.</a:t>
-            </a:r>
-          </a:p>
-        </p:txBody>
-      </p:sp>
-      <p:sp>
-        <p:nvSpPr>
-          <p:cNvPr id="39" name="">
-            <a:extLst xmlns:a="http://schemas.openxmlformats.org/drawingml/2006/main">
-              <a:ext uri="{FF2B5EF4-FFF2-40B4-BE49-F238E27FC236}">
-                <a16:creationId xmlns:a16="http://schemas.microsoft.com/office/drawing/2014/main" id="{9A45DBB4-89AF-40C7-91D3-A31AAB7AEF82}"/>
-              </a:ext>
-            </a:extLst>
-          </p:cNvPr>
-          <p:cNvSpPr>
-            <a:spLocks xmlns:a="http://schemas.openxmlformats.org/drawingml/2006/main" noGrp="1"/>
-          </p:cNvSpPr>
-          <p:nvPr/>
-        </p:nvSpPr>
-        <p:spPr>
-          <a:xfrm xmlns:a="http://schemas.openxmlformats.org/drawingml/2006/main">
-            <a:off x="704850" y="4191000"/>
-            <a:ext cx="10763250" cy="1485900"/>
-          </a:xfrm>
-          <a:prstGeom xmlns:a="http://schemas.openxmlformats.org/drawingml/2006/main" prst="roundRect">
-            <a:avLst>
-              <a:gd name="adj" fmla="val 7692"/>
-            </a:avLst>
-          </a:prstGeom>
-          <a:solidFill xmlns:a="http://schemas.openxmlformats.org/drawingml/2006/main">
-            <a:srgbClr val="FFFFFF"/>
-          </a:solidFill>
-          <a:ln xmlns:a="http://schemas.openxmlformats.org/drawingml/2006/main" w="14288">
-            <a:solidFill>
-              <a:srgbClr val="C6D4DB"/>
-            </a:solidFill>
-            <a:prstDash val="solid"/>
-          </a:ln>
-        </p:spPr>
-      </p:sp>
-      <p:sp>
-        <p:nvSpPr>
-          <p:cNvPr id="40" name="">
-            <a:extLst xmlns:a="http://schemas.openxmlformats.org/drawingml/2006/main">
-              <a:ext uri="{FF2B5EF4-FFF2-40B4-BE49-F238E27FC236}">
-                <a16:creationId xmlns:a16="http://schemas.microsoft.com/office/drawing/2014/main" id="{8C39820A-E6AB-4F0B-A35B-F6615EFD4428}"/>
-              </a:ext>
-            </a:extLst>
-          </p:cNvPr>
-          <p:cNvSpPr>
-            <a:spLocks xmlns:a="http://schemas.openxmlformats.org/drawingml/2006/main" noGrp="1"/>
-          </p:cNvSpPr>
-          <p:nvPr/>
-        </p:nvSpPr>
-        <p:spPr>
-          <a:xfrm xmlns:a="http://schemas.openxmlformats.org/drawingml/2006/main">
-            <a:off x="704850" y="4191000"/>
-            <a:ext cx="66675" cy="1485900"/>
-          </a:xfrm>
-          <a:prstGeom xmlns:a="http://schemas.openxmlformats.org/drawingml/2006/main" prst="rect">
-            <a:avLst/>
-          </a:prstGeom>
-          <a:solidFill xmlns:a="http://schemas.openxmlformats.org/drawingml/2006/main">
-            <a:srgbClr val="008C95"/>
-          </a:solidFill>
-          <a:ln xmlns:a="http://schemas.openxmlformats.org/drawingml/2006/main" w="0">
-            <a:solidFill>
-              <a:srgbClr val="008C95"/>
-            </a:solidFill>
-            <a:prstDash val="solid"/>
-          </a:ln>
-        </p:spPr>
-      </p:sp>
-      <p:sp>
-        <p:nvSpPr>
-          <p:cNvPr id="41" name="">
-            <a:extLst xmlns:a="http://schemas.openxmlformats.org/drawingml/2006/main">
-              <a:ext uri="{FF2B5EF4-FFF2-40B4-BE49-F238E27FC236}">
-                <a16:creationId xmlns:a16="http://schemas.microsoft.com/office/drawing/2014/main" id="{1D863EAC-9B3A-4725-A244-6C57646D510A}"/>
-              </a:ext>
-            </a:extLst>
-          </p:cNvPr>
-          <p:cNvSpPr>
-            <a:spLocks xmlns:a="http://schemas.openxmlformats.org/drawingml/2006/main" noGrp="1"/>
-          </p:cNvSpPr>
-          <p:nvPr/>
-        </p:nvSpPr>
-        <p:spPr>
-          <a:xfrm xmlns:a="http://schemas.openxmlformats.org/drawingml/2006/main">
-            <a:off x="933450" y="4381500"/>
-            <a:ext cx="10344150" cy="266700"/>
-          </a:xfrm>
-          <a:prstGeom xmlns:a="http://schemas.openxmlformats.org/drawingml/2006/main" prst="rect">
-            <a:avLst/>
-          </a:prstGeom>
-          <a:noFill xmlns:a="http://schemas.openxmlformats.org/drawingml/2006/main"/>
-          <a:ln xmlns:a="http://schemas.openxmlformats.org/drawingml/2006/main" w="0">
-            <a:noFill/>
-            <a:prstDash val="solid"/>
-          </a:ln>
-        </p:spPr>
-        <p:txBody>
-          <a:bodyPr xmlns:a="http://schemas.openxmlformats.org/drawingml/2006/main"/>
-          <a:lstStyle xmlns:a="http://schemas.openxmlformats.org/drawingml/2006/main"/>
-          <a:p xmlns:a="http://schemas.openxmlformats.org/drawingml/2006/main">
-            <a:pPr>
-              <a:defRPr sz="1500" b="1">
-                <a:solidFill>
-                  <a:srgbClr val="001B3A"/>
-                </a:solidFill>
-              </a:defRPr>
-            </a:pPr>
-            <a:r>
-              <a:rPr sz="1500" b="1">
-                <a:solidFill>
-                  <a:srgbClr val="001B3A"/>
-                </a:solidFill>
-              </a:rPr>
-              <a:t>Block patterns</a:t>
-            </a:r>
-          </a:p>
-        </p:txBody>
-      </p:sp>
-      <p:sp>
-        <p:nvSpPr>
-          <p:cNvPr id="42" name="">
-            <a:extLst xmlns:a="http://schemas.openxmlformats.org/drawingml/2006/main">
-              <a:ext uri="{FF2B5EF4-FFF2-40B4-BE49-F238E27FC236}">
-                <a16:creationId xmlns:a16="http://schemas.microsoft.com/office/drawing/2014/main" id="{B960E370-96F6-488F-8E29-6512F551966A}"/>
-              </a:ext>
-            </a:extLst>
-          </p:cNvPr>
-          <p:cNvSpPr>
-            <a:spLocks xmlns:a="http://schemas.openxmlformats.org/drawingml/2006/main" noGrp="1"/>
-          </p:cNvSpPr>
-          <p:nvPr/>
-        </p:nvSpPr>
-        <p:spPr>
-          <a:xfrm xmlns:a="http://schemas.openxmlformats.org/drawingml/2006/main">
-            <a:off x="933450" y="4772025"/>
-            <a:ext cx="10344150" cy="762000"/>
-          </a:xfrm>
-          <a:prstGeom xmlns:a="http://schemas.openxmlformats.org/drawingml/2006/main" prst="rect">
-            <a:avLst/>
-          </a:prstGeom>
-          <a:noFill xmlns:a="http://schemas.openxmlformats.org/drawingml/2006/main"/>
-          <a:ln xmlns:a="http://schemas.openxmlformats.org/drawingml/2006/main" w="0">
-            <a:noFill/>
-            <a:prstDash val="solid"/>
-          </a:ln>
-        </p:spPr>
-        <p:txBody>
-          <a:bodyPr xmlns:a="http://schemas.openxmlformats.org/drawingml/2006/main"/>
-          <a:lstStyle xmlns:a="http://schemas.openxmlformats.org/drawingml/2006/main"/>
-          <a:p xmlns:a="http://schemas.openxmlformats.org/drawingml/2006/main">
-            <a:pPr>
-              <a:defRPr sz="1275">
+              <a:rPr sz="900">
                 <a:solidFill>
                   <a:srgbClr val="0D2843"/>
                 </a:solidFill>
-              </a:defRPr>
-            </a:pPr>
-            <a:r>
-              <a:rPr sz="1275">
-                <a:solidFill>
-                  <a:srgbClr val="0D2843"/>
-                </a:solidFill>
-              </a:rPr>
-              <a:t>• scan for AprilTags</a:t>
-            </a:r>
-          </a:p>
-          <a:p xmlns:a="http://schemas.openxmlformats.org/drawingml/2006/main">
-            <a:pPr>
-              <a:defRPr sz="1275">
-                <a:solidFill>
-                  <a:srgbClr val="0D2843"/>
-                </a:solidFill>
-              </a:defRPr>
-            </a:pPr>
-            <a:r>
-              <a:rPr sz="1275">
-                <a:solidFill>
-                  <a:srgbClr val="0D2843"/>
-                </a:solidFill>
-              </a:rPr>
-              <a:t>• camera sees AprilTag with ID any / 0–586</a:t>
-            </a:r>
-          </a:p>
-          <a:p xmlns:a="http://schemas.openxmlformats.org/drawingml/2006/main">
-            <a:pPr>
-              <a:defRPr sz="1275">
-                <a:solidFill>
-                  <a:srgbClr val="0D2843"/>
-                </a:solidFill>
-              </a:defRPr>
-            </a:pPr>
-            <a:r>
-              <a:rPr sz="1275">
-                <a:solidFill>
-                  <a:srgbClr val="0D2843"/>
-                </a:solidFill>
-              </a:rPr>
-              <a:t>• center on AprilTag with power, center slack, angle slack, and lost-tag limit</a:t>
-            </a:r>
-          </a:p>
-        </p:txBody>
-      </p:sp>
-      <p:sp>
-        <p:nvSpPr>
-          <p:cNvPr id="43" name="">
-            <a:extLst xmlns:a="http://schemas.openxmlformats.org/drawingml/2006/main">
-              <a:ext uri="{FF2B5EF4-FFF2-40B4-BE49-F238E27FC236}">
-                <a16:creationId xmlns:a16="http://schemas.microsoft.com/office/drawing/2014/main" id="{C267D14F-6F84-491D-AC0E-B5B965BDFB2C}"/>
-              </a:ext>
-            </a:extLst>
-          </p:cNvPr>
-          <p:cNvSpPr>
-            <a:spLocks xmlns:a="http://schemas.openxmlformats.org/drawingml/2006/main" noGrp="1"/>
-          </p:cNvSpPr>
-          <p:nvPr/>
-        </p:nvSpPr>
-        <p:spPr>
-          <a:xfrm xmlns:a="http://schemas.openxmlformats.org/drawingml/2006/main">
-            <a:off x="1238250" y="5924550"/>
-            <a:ext cx="9715500" cy="285750"/>
-          </a:xfrm>
-          <a:prstGeom xmlns:a="http://schemas.openxmlformats.org/drawingml/2006/main" prst="rect">
-            <a:avLst/>
-          </a:prstGeom>
-          <a:noFill xmlns:a="http://schemas.openxmlformats.org/drawingml/2006/main"/>
-          <a:ln xmlns:a="http://schemas.openxmlformats.org/drawingml/2006/main" w="0">
-            <a:noFill/>
-            <a:prstDash val="solid"/>
-          </a:ln>
-        </p:spPr>
-        <p:txBody>
-          <a:bodyPr xmlns:a="http://schemas.openxmlformats.org/drawingml/2006/main"/>
-          <a:lstStyle xmlns:a="http://schemas.openxmlformats.org/drawingml/2006/main"/>
-          <a:p xmlns:a="http://schemas.openxmlformats.org/drawingml/2006/main">
-            <a:pPr algn="ctr">
-              <a:defRPr sz="1425" b="1">
-                <a:solidFill>
-                  <a:srgbClr val="D94F5C"/>
-                </a:solidFill>
-              </a:defRPr>
-            </a:pPr>
-            <a:r>
-              <a:rPr sz="1425" b="1">
-                <a:solidFill>
-                  <a:srgbClr val="D94F5C"/>
-                </a:solidFill>
-              </a:rPr>
-              <a:t>Hopper Studio provides a relative visual landmark—not global position, altitude, or collision avoidance.</a:t>
+              </a:rPr>
+              <a:t>returns Promise&lt;boolean&gt; after a fresh scan · throws on camera failure</a:t>
             </a:r>
           </a:p>
         </p:txBody>
@@ -9188,7 +10430,7 @@
     </p:spTree>
     <p:extLst>
       <p:ext uri="{BB962C8B-B14F-4D97-AF65-F5344CB8AC3E}">
-        <p14:creationId xmlns:p14="http://schemas.microsoft.com/office/powerpoint/2010/main" val="552490658"/>
+        <p14:creationId xmlns:p14="http://schemas.microsoft.com/office/powerpoint/2010/main" val="253760006"/>
       </p:ext>
     </p:extLst>
   </p:cSld>
